--- a/Slides/MMTOTempDependentResults.pptx
+++ b/Slides/MMTOTempDependentResults.pptx
@@ -5,11 +5,22 @@
     <p:sldMasterId id="2147483648" r:id="rId1"/>
   </p:sldMasterIdLst>
   <p:notesMasterIdLst>
-    <p:notesMasterId r:id="rId4"/>
+    <p:notesMasterId r:id="rId15"/>
   </p:notesMasterIdLst>
   <p:sldIdLst>
-    <p:sldId id="2381" r:id="rId2"/>
-    <p:sldId id="2392" r:id="rId3"/>
+    <p:sldId id="2403" r:id="rId2"/>
+    <p:sldId id="2393" r:id="rId3"/>
+    <p:sldId id="2402" r:id="rId4"/>
+    <p:sldId id="2396" r:id="rId5"/>
+    <p:sldId id="2381" r:id="rId6"/>
+    <p:sldId id="2392" r:id="rId7"/>
+    <p:sldId id="2394" r:id="rId8"/>
+    <p:sldId id="2395" r:id="rId9"/>
+    <p:sldId id="2398" r:id="rId10"/>
+    <p:sldId id="2401" r:id="rId11"/>
+    <p:sldId id="2397" r:id="rId12"/>
+    <p:sldId id="2399" r:id="rId13"/>
+    <p:sldId id="2400" r:id="rId14"/>
   </p:sldIdLst>
   <p:sldSz cx="12192000" cy="6858000"/>
   <p:notesSz cx="6858000" cy="9144000"/>
@@ -198,7 +209,7 @@
           <a:p>
             <a:fld id="{317BC63F-E652-456B-B880-2F318D1A1929}" type="datetimeFigureOut">
               <a:rPr lang="en-US" smtClean="0"/>
-              <a:t>10/21/2025</a:t>
+              <a:t>10/23/2025</a:t>
             </a:fld>
             <a:endParaRPr lang="en-US"/>
           </a:p>
@@ -465,6 +476,930 @@
 </p:notesMaster>
 </file>
 
+<file path=ppt/notesSlides/notesSlide1.xml><?xml version="1.0" encoding="utf-8"?>
+<p:notes xmlns:a="http://schemas.openxmlformats.org/drawingml/2006/main" xmlns:r="http://schemas.openxmlformats.org/officeDocument/2006/relationships" xmlns:p="http://schemas.openxmlformats.org/presentationml/2006/main">
+  <p:cSld>
+    <p:spTree>
+      <p:nvGrpSpPr>
+        <p:cNvPr id="1" name="">
+          <a:extLst>
+            <a:ext uri="{FF2B5EF4-FFF2-40B4-BE49-F238E27FC236}">
+              <a16:creationId xmlns:a16="http://schemas.microsoft.com/office/drawing/2014/main" id="{E063E921-FB76-0F4E-CF67-342D994340B7}"/>
+            </a:ext>
+          </a:extLst>
+        </p:cNvPr>
+        <p:cNvGrpSpPr/>
+        <p:nvPr/>
+      </p:nvGrpSpPr>
+      <p:grpSpPr>
+        <a:xfrm>
+          <a:off x="0" y="0"/>
+          <a:ext cx="0" cy="0"/>
+          <a:chOff x="0" y="0"/>
+          <a:chExt cx="0" cy="0"/>
+        </a:xfrm>
+      </p:grpSpPr>
+      <p:sp>
+        <p:nvSpPr>
+          <p:cNvPr id="2" name="Slide Image Placeholder 1">
+            <a:extLst>
+              <a:ext uri="{FF2B5EF4-FFF2-40B4-BE49-F238E27FC236}">
+                <a16:creationId xmlns:a16="http://schemas.microsoft.com/office/drawing/2014/main" id="{39F3B462-56C8-46A7-CCE8-306B8EEB4964}"/>
+              </a:ext>
+            </a:extLst>
+          </p:cNvPr>
+          <p:cNvSpPr>
+            <a:spLocks noGrp="1" noRot="1" noChangeAspect="1"/>
+          </p:cNvSpPr>
+          <p:nvPr>
+            <p:ph type="sldImg"/>
+          </p:nvPr>
+        </p:nvSpPr>
+        <p:spPr/>
+      </p:sp>
+      <p:sp>
+        <p:nvSpPr>
+          <p:cNvPr id="3" name="Notes Placeholder 2">
+            <a:extLst>
+              <a:ext uri="{FF2B5EF4-FFF2-40B4-BE49-F238E27FC236}">
+                <a16:creationId xmlns:a16="http://schemas.microsoft.com/office/drawing/2014/main" id="{97B38E72-6F95-C42B-2756-4A763FFE7FCD}"/>
+              </a:ext>
+            </a:extLst>
+          </p:cNvPr>
+          <p:cNvSpPr>
+            <a:spLocks noGrp="1"/>
+          </p:cNvSpPr>
+          <p:nvPr>
+            <p:ph type="body" idx="1"/>
+          </p:nvPr>
+        </p:nvSpPr>
+        <p:spPr/>
+        <p:txBody>
+          <a:bodyPr/>
+          <a:lstStyle/>
+          <a:p>
+            <a:endParaRPr lang="en-US" dirty="0"/>
+          </a:p>
+        </p:txBody>
+      </p:sp>
+      <p:sp>
+        <p:nvSpPr>
+          <p:cNvPr id="4" name="Slide Number Placeholder 3">
+            <a:extLst>
+              <a:ext uri="{FF2B5EF4-FFF2-40B4-BE49-F238E27FC236}">
+                <a16:creationId xmlns:a16="http://schemas.microsoft.com/office/drawing/2014/main" id="{EA47CD1C-4385-157B-93D0-0E661B20C07D}"/>
+              </a:ext>
+            </a:extLst>
+          </p:cNvPr>
+          <p:cNvSpPr>
+            <a:spLocks noGrp="1"/>
+          </p:cNvSpPr>
+          <p:nvPr>
+            <p:ph type="sldNum" sz="quarter" idx="5"/>
+          </p:nvPr>
+        </p:nvSpPr>
+        <p:spPr/>
+        <p:txBody>
+          <a:bodyPr/>
+          <a:lstStyle/>
+          <a:p>
+            <a:fld id="{2F865DCE-AB5F-46FA-B07C-E9C2FA20270E}" type="slidenum">
+              <a:rPr lang="en-US" smtClean="0"/>
+              <a:t>1</a:t>
+            </a:fld>
+            <a:endParaRPr lang="en-US"/>
+          </a:p>
+        </p:txBody>
+      </p:sp>
+    </p:spTree>
+    <p:extLst>
+      <p:ext uri="{BB962C8B-B14F-4D97-AF65-F5344CB8AC3E}">
+        <p14:creationId xmlns:p14="http://schemas.microsoft.com/office/powerpoint/2010/main" val="2533738908"/>
+      </p:ext>
+    </p:extLst>
+  </p:cSld>
+  <p:clrMapOvr>
+    <a:masterClrMapping/>
+  </p:clrMapOvr>
+</p:notes>
+</file>
+
+<file path=ppt/notesSlides/notesSlide2.xml><?xml version="1.0" encoding="utf-8"?>
+<p:notes xmlns:a="http://schemas.openxmlformats.org/drawingml/2006/main" xmlns:r="http://schemas.openxmlformats.org/officeDocument/2006/relationships" xmlns:p="http://schemas.openxmlformats.org/presentationml/2006/main">
+  <p:cSld>
+    <p:spTree>
+      <p:nvGrpSpPr>
+        <p:cNvPr id="1" name=""/>
+        <p:cNvGrpSpPr/>
+        <p:nvPr/>
+      </p:nvGrpSpPr>
+      <p:grpSpPr>
+        <a:xfrm>
+          <a:off x="0" y="0"/>
+          <a:ext cx="0" cy="0"/>
+          <a:chOff x="0" y="0"/>
+          <a:chExt cx="0" cy="0"/>
+        </a:xfrm>
+      </p:grpSpPr>
+      <p:sp>
+        <p:nvSpPr>
+          <p:cNvPr id="2" name="Slide Image Placeholder 1"/>
+          <p:cNvSpPr>
+            <a:spLocks noGrp="1" noRot="1" noChangeAspect="1"/>
+          </p:cNvSpPr>
+          <p:nvPr>
+            <p:ph type="sldImg"/>
+          </p:nvPr>
+        </p:nvSpPr>
+        <p:spPr/>
+      </p:sp>
+      <p:sp>
+        <p:nvSpPr>
+          <p:cNvPr id="3" name="Notes Placeholder 2"/>
+          <p:cNvSpPr>
+            <a:spLocks noGrp="1"/>
+          </p:cNvSpPr>
+          <p:nvPr>
+            <p:ph type="body" idx="1"/>
+          </p:nvPr>
+        </p:nvSpPr>
+        <p:spPr/>
+        <p:txBody>
+          <a:bodyPr/>
+          <a:lstStyle/>
+          <a:p>
+            <a:endParaRPr lang="en-US" dirty="0"/>
+          </a:p>
+        </p:txBody>
+      </p:sp>
+      <p:sp>
+        <p:nvSpPr>
+          <p:cNvPr id="4" name="Slide Number Placeholder 3"/>
+          <p:cNvSpPr>
+            <a:spLocks noGrp="1"/>
+          </p:cNvSpPr>
+          <p:nvPr>
+            <p:ph type="sldNum" sz="quarter" idx="5"/>
+          </p:nvPr>
+        </p:nvSpPr>
+        <p:spPr/>
+        <p:txBody>
+          <a:bodyPr/>
+          <a:lstStyle/>
+          <a:p>
+            <a:fld id="{2F865DCE-AB5F-46FA-B07C-E9C2FA20270E}" type="slidenum">
+              <a:rPr lang="en-US" smtClean="0"/>
+              <a:t>2</a:t>
+            </a:fld>
+            <a:endParaRPr lang="en-US"/>
+          </a:p>
+        </p:txBody>
+      </p:sp>
+    </p:spTree>
+    <p:extLst>
+      <p:ext uri="{BB962C8B-B14F-4D97-AF65-F5344CB8AC3E}">
+        <p14:creationId xmlns:p14="http://schemas.microsoft.com/office/powerpoint/2010/main" val="2983792499"/>
+      </p:ext>
+    </p:extLst>
+  </p:cSld>
+  <p:clrMapOvr>
+    <a:masterClrMapping/>
+  </p:clrMapOvr>
+</p:notes>
+</file>
+
+<file path=ppt/notesSlides/notesSlide3.xml><?xml version="1.0" encoding="utf-8"?>
+<p:notes xmlns:a="http://schemas.openxmlformats.org/drawingml/2006/main" xmlns:r="http://schemas.openxmlformats.org/officeDocument/2006/relationships" xmlns:p="http://schemas.openxmlformats.org/presentationml/2006/main">
+  <p:cSld>
+    <p:spTree>
+      <p:nvGrpSpPr>
+        <p:cNvPr id="1" name="">
+          <a:extLst>
+            <a:ext uri="{FF2B5EF4-FFF2-40B4-BE49-F238E27FC236}">
+              <a16:creationId xmlns:a16="http://schemas.microsoft.com/office/drawing/2014/main" id="{3CB55361-C014-2AD6-5B2F-6348C6DA93ED}"/>
+            </a:ext>
+          </a:extLst>
+        </p:cNvPr>
+        <p:cNvGrpSpPr/>
+        <p:nvPr/>
+      </p:nvGrpSpPr>
+      <p:grpSpPr>
+        <a:xfrm>
+          <a:off x="0" y="0"/>
+          <a:ext cx="0" cy="0"/>
+          <a:chOff x="0" y="0"/>
+          <a:chExt cx="0" cy="0"/>
+        </a:xfrm>
+      </p:grpSpPr>
+      <p:sp>
+        <p:nvSpPr>
+          <p:cNvPr id="2" name="Slide Image Placeholder 1">
+            <a:extLst>
+              <a:ext uri="{FF2B5EF4-FFF2-40B4-BE49-F238E27FC236}">
+                <a16:creationId xmlns:a16="http://schemas.microsoft.com/office/drawing/2014/main" id="{BF2099C1-8EB9-DCAC-2A7F-812C04D73CB9}"/>
+              </a:ext>
+            </a:extLst>
+          </p:cNvPr>
+          <p:cNvSpPr>
+            <a:spLocks noGrp="1" noRot="1" noChangeAspect="1"/>
+          </p:cNvSpPr>
+          <p:nvPr>
+            <p:ph type="sldImg"/>
+          </p:nvPr>
+        </p:nvSpPr>
+        <p:spPr/>
+      </p:sp>
+      <p:sp>
+        <p:nvSpPr>
+          <p:cNvPr id="3" name="Notes Placeholder 2">
+            <a:extLst>
+              <a:ext uri="{FF2B5EF4-FFF2-40B4-BE49-F238E27FC236}">
+                <a16:creationId xmlns:a16="http://schemas.microsoft.com/office/drawing/2014/main" id="{B30C86C4-8D34-95FE-7C63-44B12DCF20EA}"/>
+              </a:ext>
+            </a:extLst>
+          </p:cNvPr>
+          <p:cNvSpPr>
+            <a:spLocks noGrp="1"/>
+          </p:cNvSpPr>
+          <p:nvPr>
+            <p:ph type="body" idx="1"/>
+          </p:nvPr>
+        </p:nvSpPr>
+        <p:spPr/>
+        <p:txBody>
+          <a:bodyPr/>
+          <a:lstStyle/>
+          <a:p>
+            <a:endParaRPr lang="en-US" dirty="0"/>
+          </a:p>
+        </p:txBody>
+      </p:sp>
+      <p:sp>
+        <p:nvSpPr>
+          <p:cNvPr id="4" name="Slide Number Placeholder 3">
+            <a:extLst>
+              <a:ext uri="{FF2B5EF4-FFF2-40B4-BE49-F238E27FC236}">
+                <a16:creationId xmlns:a16="http://schemas.microsoft.com/office/drawing/2014/main" id="{C1E40C50-738A-CB4E-6012-1CEF0BC902B0}"/>
+              </a:ext>
+            </a:extLst>
+          </p:cNvPr>
+          <p:cNvSpPr>
+            <a:spLocks noGrp="1"/>
+          </p:cNvSpPr>
+          <p:nvPr>
+            <p:ph type="sldNum" sz="quarter" idx="5"/>
+          </p:nvPr>
+        </p:nvSpPr>
+        <p:spPr/>
+        <p:txBody>
+          <a:bodyPr/>
+          <a:lstStyle/>
+          <a:p>
+            <a:fld id="{2F865DCE-AB5F-46FA-B07C-E9C2FA20270E}" type="slidenum">
+              <a:rPr lang="en-US" smtClean="0"/>
+              <a:t>3</a:t>
+            </a:fld>
+            <a:endParaRPr lang="en-US"/>
+          </a:p>
+        </p:txBody>
+      </p:sp>
+    </p:spTree>
+    <p:extLst>
+      <p:ext uri="{BB962C8B-B14F-4D97-AF65-F5344CB8AC3E}">
+        <p14:creationId xmlns:p14="http://schemas.microsoft.com/office/powerpoint/2010/main" val="3513390706"/>
+      </p:ext>
+    </p:extLst>
+  </p:cSld>
+  <p:clrMapOvr>
+    <a:masterClrMapping/>
+  </p:clrMapOvr>
+</p:notes>
+</file>
+
+<file path=ppt/notesSlides/notesSlide4.xml><?xml version="1.0" encoding="utf-8"?>
+<p:notes xmlns:a="http://schemas.openxmlformats.org/drawingml/2006/main" xmlns:r="http://schemas.openxmlformats.org/officeDocument/2006/relationships" xmlns:p="http://schemas.openxmlformats.org/presentationml/2006/main">
+  <p:cSld>
+    <p:spTree>
+      <p:nvGrpSpPr>
+        <p:cNvPr id="1" name=""/>
+        <p:cNvGrpSpPr/>
+        <p:nvPr/>
+      </p:nvGrpSpPr>
+      <p:grpSpPr>
+        <a:xfrm>
+          <a:off x="0" y="0"/>
+          <a:ext cx="0" cy="0"/>
+          <a:chOff x="0" y="0"/>
+          <a:chExt cx="0" cy="0"/>
+        </a:xfrm>
+      </p:grpSpPr>
+      <p:sp>
+        <p:nvSpPr>
+          <p:cNvPr id="2" name="Slide Image Placeholder 1"/>
+          <p:cNvSpPr>
+            <a:spLocks noGrp="1" noRot="1" noChangeAspect="1"/>
+          </p:cNvSpPr>
+          <p:nvPr>
+            <p:ph type="sldImg"/>
+          </p:nvPr>
+        </p:nvSpPr>
+        <p:spPr/>
+      </p:sp>
+      <p:sp>
+        <p:nvSpPr>
+          <p:cNvPr id="3" name="Notes Placeholder 2"/>
+          <p:cNvSpPr>
+            <a:spLocks noGrp="1"/>
+          </p:cNvSpPr>
+          <p:nvPr>
+            <p:ph type="body" idx="1"/>
+          </p:nvPr>
+        </p:nvSpPr>
+        <p:spPr/>
+        <p:txBody>
+          <a:bodyPr/>
+          <a:lstStyle/>
+          <a:p>
+            <a:endParaRPr lang="en-US" dirty="0"/>
+          </a:p>
+        </p:txBody>
+      </p:sp>
+      <p:sp>
+        <p:nvSpPr>
+          <p:cNvPr id="4" name="Slide Number Placeholder 3"/>
+          <p:cNvSpPr>
+            <a:spLocks noGrp="1"/>
+          </p:cNvSpPr>
+          <p:nvPr>
+            <p:ph type="sldNum" sz="quarter" idx="5"/>
+          </p:nvPr>
+        </p:nvSpPr>
+        <p:spPr/>
+        <p:txBody>
+          <a:bodyPr/>
+          <a:lstStyle/>
+          <a:p>
+            <a:fld id="{2F865DCE-AB5F-46FA-B07C-E9C2FA20270E}" type="slidenum">
+              <a:rPr lang="en-US" smtClean="0"/>
+              <a:t>8</a:t>
+            </a:fld>
+            <a:endParaRPr lang="en-US"/>
+          </a:p>
+        </p:txBody>
+      </p:sp>
+    </p:spTree>
+    <p:extLst>
+      <p:ext uri="{BB962C8B-B14F-4D97-AF65-F5344CB8AC3E}">
+        <p14:creationId xmlns:p14="http://schemas.microsoft.com/office/powerpoint/2010/main" val="1741665244"/>
+      </p:ext>
+    </p:extLst>
+  </p:cSld>
+  <p:clrMapOvr>
+    <a:masterClrMapping/>
+  </p:clrMapOvr>
+</p:notes>
+</file>
+
+<file path=ppt/notesSlides/notesSlide5.xml><?xml version="1.0" encoding="utf-8"?>
+<p:notes xmlns:a="http://schemas.openxmlformats.org/drawingml/2006/main" xmlns:r="http://schemas.openxmlformats.org/officeDocument/2006/relationships" xmlns:p="http://schemas.openxmlformats.org/presentationml/2006/main">
+  <p:cSld>
+    <p:spTree>
+      <p:nvGrpSpPr>
+        <p:cNvPr id="1" name="">
+          <a:extLst>
+            <a:ext uri="{FF2B5EF4-FFF2-40B4-BE49-F238E27FC236}">
+              <a16:creationId xmlns:a16="http://schemas.microsoft.com/office/drawing/2014/main" id="{B69B776B-667A-8903-8714-F2C15AF37B0E}"/>
+            </a:ext>
+          </a:extLst>
+        </p:cNvPr>
+        <p:cNvGrpSpPr/>
+        <p:nvPr/>
+      </p:nvGrpSpPr>
+      <p:grpSpPr>
+        <a:xfrm>
+          <a:off x="0" y="0"/>
+          <a:ext cx="0" cy="0"/>
+          <a:chOff x="0" y="0"/>
+          <a:chExt cx="0" cy="0"/>
+        </a:xfrm>
+      </p:grpSpPr>
+      <p:sp>
+        <p:nvSpPr>
+          <p:cNvPr id="2" name="Slide Image Placeholder 1">
+            <a:extLst>
+              <a:ext uri="{FF2B5EF4-FFF2-40B4-BE49-F238E27FC236}">
+                <a16:creationId xmlns:a16="http://schemas.microsoft.com/office/drawing/2014/main" id="{E445C33D-33B1-7684-94B3-AFD5C580301A}"/>
+              </a:ext>
+            </a:extLst>
+          </p:cNvPr>
+          <p:cNvSpPr>
+            <a:spLocks noGrp="1" noRot="1" noChangeAspect="1"/>
+          </p:cNvSpPr>
+          <p:nvPr>
+            <p:ph type="sldImg"/>
+          </p:nvPr>
+        </p:nvSpPr>
+        <p:spPr/>
+      </p:sp>
+      <p:sp>
+        <p:nvSpPr>
+          <p:cNvPr id="3" name="Notes Placeholder 2">
+            <a:extLst>
+              <a:ext uri="{FF2B5EF4-FFF2-40B4-BE49-F238E27FC236}">
+                <a16:creationId xmlns:a16="http://schemas.microsoft.com/office/drawing/2014/main" id="{7BBAAED9-2096-8096-33F3-3B449C6DB174}"/>
+              </a:ext>
+            </a:extLst>
+          </p:cNvPr>
+          <p:cNvSpPr>
+            <a:spLocks noGrp="1"/>
+          </p:cNvSpPr>
+          <p:nvPr>
+            <p:ph type="body" idx="1"/>
+          </p:nvPr>
+        </p:nvSpPr>
+        <p:spPr/>
+        <p:txBody>
+          <a:bodyPr/>
+          <a:lstStyle/>
+          <a:p>
+            <a:endParaRPr lang="en-US" dirty="0"/>
+          </a:p>
+        </p:txBody>
+      </p:sp>
+      <p:sp>
+        <p:nvSpPr>
+          <p:cNvPr id="4" name="Slide Number Placeholder 3">
+            <a:extLst>
+              <a:ext uri="{FF2B5EF4-FFF2-40B4-BE49-F238E27FC236}">
+                <a16:creationId xmlns:a16="http://schemas.microsoft.com/office/drawing/2014/main" id="{6B2A87F2-898E-90FA-5A09-483C46CBD278}"/>
+              </a:ext>
+            </a:extLst>
+          </p:cNvPr>
+          <p:cNvSpPr>
+            <a:spLocks noGrp="1"/>
+          </p:cNvSpPr>
+          <p:nvPr>
+            <p:ph type="sldNum" sz="quarter" idx="5"/>
+          </p:nvPr>
+        </p:nvSpPr>
+        <p:spPr/>
+        <p:txBody>
+          <a:bodyPr/>
+          <a:lstStyle/>
+          <a:p>
+            <a:fld id="{2F865DCE-AB5F-46FA-B07C-E9C2FA20270E}" type="slidenum">
+              <a:rPr lang="en-US" smtClean="0"/>
+              <a:t>9</a:t>
+            </a:fld>
+            <a:endParaRPr lang="en-US"/>
+          </a:p>
+        </p:txBody>
+      </p:sp>
+    </p:spTree>
+    <p:extLst>
+      <p:ext uri="{BB962C8B-B14F-4D97-AF65-F5344CB8AC3E}">
+        <p14:creationId xmlns:p14="http://schemas.microsoft.com/office/powerpoint/2010/main" val="3767729906"/>
+      </p:ext>
+    </p:extLst>
+  </p:cSld>
+  <p:clrMapOvr>
+    <a:masterClrMapping/>
+  </p:clrMapOvr>
+</p:notes>
+</file>
+
+<file path=ppt/notesSlides/notesSlide6.xml><?xml version="1.0" encoding="utf-8"?>
+<p:notes xmlns:a="http://schemas.openxmlformats.org/drawingml/2006/main" xmlns:r="http://schemas.openxmlformats.org/officeDocument/2006/relationships" xmlns:p="http://schemas.openxmlformats.org/presentationml/2006/main">
+  <p:cSld>
+    <p:spTree>
+      <p:nvGrpSpPr>
+        <p:cNvPr id="1" name="">
+          <a:extLst>
+            <a:ext uri="{FF2B5EF4-FFF2-40B4-BE49-F238E27FC236}">
+              <a16:creationId xmlns:a16="http://schemas.microsoft.com/office/drawing/2014/main" id="{AB1C43D1-4202-EC09-82EF-186187F741B2}"/>
+            </a:ext>
+          </a:extLst>
+        </p:cNvPr>
+        <p:cNvGrpSpPr/>
+        <p:nvPr/>
+      </p:nvGrpSpPr>
+      <p:grpSpPr>
+        <a:xfrm>
+          <a:off x="0" y="0"/>
+          <a:ext cx="0" cy="0"/>
+          <a:chOff x="0" y="0"/>
+          <a:chExt cx="0" cy="0"/>
+        </a:xfrm>
+      </p:grpSpPr>
+      <p:sp>
+        <p:nvSpPr>
+          <p:cNvPr id="2" name="Slide Image Placeholder 1">
+            <a:extLst>
+              <a:ext uri="{FF2B5EF4-FFF2-40B4-BE49-F238E27FC236}">
+                <a16:creationId xmlns:a16="http://schemas.microsoft.com/office/drawing/2014/main" id="{2BE523F1-7C48-2D2F-917E-BD88AB9B4ECF}"/>
+              </a:ext>
+            </a:extLst>
+          </p:cNvPr>
+          <p:cNvSpPr>
+            <a:spLocks noGrp="1" noRot="1" noChangeAspect="1"/>
+          </p:cNvSpPr>
+          <p:nvPr>
+            <p:ph type="sldImg"/>
+          </p:nvPr>
+        </p:nvSpPr>
+        <p:spPr/>
+      </p:sp>
+      <p:sp>
+        <p:nvSpPr>
+          <p:cNvPr id="3" name="Notes Placeholder 2">
+            <a:extLst>
+              <a:ext uri="{FF2B5EF4-FFF2-40B4-BE49-F238E27FC236}">
+                <a16:creationId xmlns:a16="http://schemas.microsoft.com/office/drawing/2014/main" id="{5769D4FF-AECE-1FD8-0D7C-683FB7506EFD}"/>
+              </a:ext>
+            </a:extLst>
+          </p:cNvPr>
+          <p:cNvSpPr>
+            <a:spLocks noGrp="1"/>
+          </p:cNvSpPr>
+          <p:nvPr>
+            <p:ph type="body" idx="1"/>
+          </p:nvPr>
+        </p:nvSpPr>
+        <p:spPr/>
+        <p:txBody>
+          <a:bodyPr/>
+          <a:lstStyle/>
+          <a:p>
+            <a:endParaRPr lang="en-US" dirty="0"/>
+          </a:p>
+        </p:txBody>
+      </p:sp>
+      <p:sp>
+        <p:nvSpPr>
+          <p:cNvPr id="4" name="Slide Number Placeholder 3">
+            <a:extLst>
+              <a:ext uri="{FF2B5EF4-FFF2-40B4-BE49-F238E27FC236}">
+                <a16:creationId xmlns:a16="http://schemas.microsoft.com/office/drawing/2014/main" id="{B597E4D3-4524-7D26-6AF8-2382769B6D8E}"/>
+              </a:ext>
+            </a:extLst>
+          </p:cNvPr>
+          <p:cNvSpPr>
+            <a:spLocks noGrp="1"/>
+          </p:cNvSpPr>
+          <p:nvPr>
+            <p:ph type="sldNum" sz="quarter" idx="5"/>
+          </p:nvPr>
+        </p:nvSpPr>
+        <p:spPr/>
+        <p:txBody>
+          <a:bodyPr/>
+          <a:lstStyle/>
+          <a:p>
+            <a:fld id="{2F865DCE-AB5F-46FA-B07C-E9C2FA20270E}" type="slidenum">
+              <a:rPr lang="en-US" smtClean="0"/>
+              <a:t>10</a:t>
+            </a:fld>
+            <a:endParaRPr lang="en-US"/>
+          </a:p>
+        </p:txBody>
+      </p:sp>
+    </p:spTree>
+    <p:extLst>
+      <p:ext uri="{BB962C8B-B14F-4D97-AF65-F5344CB8AC3E}">
+        <p14:creationId xmlns:p14="http://schemas.microsoft.com/office/powerpoint/2010/main" val="3611109787"/>
+      </p:ext>
+    </p:extLst>
+  </p:cSld>
+  <p:clrMapOvr>
+    <a:masterClrMapping/>
+  </p:clrMapOvr>
+</p:notes>
+</file>
+
+<file path=ppt/notesSlides/notesSlide7.xml><?xml version="1.0" encoding="utf-8"?>
+<p:notes xmlns:a="http://schemas.openxmlformats.org/drawingml/2006/main" xmlns:r="http://schemas.openxmlformats.org/officeDocument/2006/relationships" xmlns:p="http://schemas.openxmlformats.org/presentationml/2006/main">
+  <p:cSld>
+    <p:spTree>
+      <p:nvGrpSpPr>
+        <p:cNvPr id="1" name="">
+          <a:extLst>
+            <a:ext uri="{FF2B5EF4-FFF2-40B4-BE49-F238E27FC236}">
+              <a16:creationId xmlns:a16="http://schemas.microsoft.com/office/drawing/2014/main" id="{1B3CC4D1-7398-9706-97DF-45F64EAF6A74}"/>
+            </a:ext>
+          </a:extLst>
+        </p:cNvPr>
+        <p:cNvGrpSpPr/>
+        <p:nvPr/>
+      </p:nvGrpSpPr>
+      <p:grpSpPr>
+        <a:xfrm>
+          <a:off x="0" y="0"/>
+          <a:ext cx="0" cy="0"/>
+          <a:chOff x="0" y="0"/>
+          <a:chExt cx="0" cy="0"/>
+        </a:xfrm>
+      </p:grpSpPr>
+      <p:sp>
+        <p:nvSpPr>
+          <p:cNvPr id="2" name="Slide Image Placeholder 1">
+            <a:extLst>
+              <a:ext uri="{FF2B5EF4-FFF2-40B4-BE49-F238E27FC236}">
+                <a16:creationId xmlns:a16="http://schemas.microsoft.com/office/drawing/2014/main" id="{90255D6F-DD8B-31FA-4BDA-6FF1E56DD6CB}"/>
+              </a:ext>
+            </a:extLst>
+          </p:cNvPr>
+          <p:cNvSpPr>
+            <a:spLocks noGrp="1" noRot="1" noChangeAspect="1"/>
+          </p:cNvSpPr>
+          <p:nvPr>
+            <p:ph type="sldImg"/>
+          </p:nvPr>
+        </p:nvSpPr>
+        <p:spPr/>
+      </p:sp>
+      <p:sp>
+        <p:nvSpPr>
+          <p:cNvPr id="3" name="Notes Placeholder 2">
+            <a:extLst>
+              <a:ext uri="{FF2B5EF4-FFF2-40B4-BE49-F238E27FC236}">
+                <a16:creationId xmlns:a16="http://schemas.microsoft.com/office/drawing/2014/main" id="{02740E9E-EBE7-CD83-7226-88F876954F4C}"/>
+              </a:ext>
+            </a:extLst>
+          </p:cNvPr>
+          <p:cNvSpPr>
+            <a:spLocks noGrp="1"/>
+          </p:cNvSpPr>
+          <p:nvPr>
+            <p:ph type="body" idx="1"/>
+          </p:nvPr>
+        </p:nvSpPr>
+        <p:spPr/>
+        <p:txBody>
+          <a:bodyPr/>
+          <a:lstStyle/>
+          <a:p>
+            <a:endParaRPr lang="en-US" dirty="0"/>
+          </a:p>
+        </p:txBody>
+      </p:sp>
+      <p:sp>
+        <p:nvSpPr>
+          <p:cNvPr id="4" name="Slide Number Placeholder 3">
+            <a:extLst>
+              <a:ext uri="{FF2B5EF4-FFF2-40B4-BE49-F238E27FC236}">
+                <a16:creationId xmlns:a16="http://schemas.microsoft.com/office/drawing/2014/main" id="{A5335A28-C2DD-9CFE-70E4-A7CEB3FED172}"/>
+              </a:ext>
+            </a:extLst>
+          </p:cNvPr>
+          <p:cNvSpPr>
+            <a:spLocks noGrp="1"/>
+          </p:cNvSpPr>
+          <p:nvPr>
+            <p:ph type="sldNum" sz="quarter" idx="5"/>
+          </p:nvPr>
+        </p:nvSpPr>
+        <p:spPr/>
+        <p:txBody>
+          <a:bodyPr/>
+          <a:lstStyle/>
+          <a:p>
+            <a:fld id="{2F865DCE-AB5F-46FA-B07C-E9C2FA20270E}" type="slidenum">
+              <a:rPr lang="en-US" smtClean="0"/>
+              <a:t>11</a:t>
+            </a:fld>
+            <a:endParaRPr lang="en-US"/>
+          </a:p>
+        </p:txBody>
+      </p:sp>
+    </p:spTree>
+    <p:extLst>
+      <p:ext uri="{BB962C8B-B14F-4D97-AF65-F5344CB8AC3E}">
+        <p14:creationId xmlns:p14="http://schemas.microsoft.com/office/powerpoint/2010/main" val="2948167076"/>
+      </p:ext>
+    </p:extLst>
+  </p:cSld>
+  <p:clrMapOvr>
+    <a:masterClrMapping/>
+  </p:clrMapOvr>
+</p:notes>
+</file>
+
+<file path=ppt/notesSlides/notesSlide8.xml><?xml version="1.0" encoding="utf-8"?>
+<p:notes xmlns:a="http://schemas.openxmlformats.org/drawingml/2006/main" xmlns:r="http://schemas.openxmlformats.org/officeDocument/2006/relationships" xmlns:p="http://schemas.openxmlformats.org/presentationml/2006/main">
+  <p:cSld>
+    <p:spTree>
+      <p:nvGrpSpPr>
+        <p:cNvPr id="1" name="">
+          <a:extLst>
+            <a:ext uri="{FF2B5EF4-FFF2-40B4-BE49-F238E27FC236}">
+              <a16:creationId xmlns:a16="http://schemas.microsoft.com/office/drawing/2014/main" id="{A683D92A-C809-88BD-DC73-33A94683F1C5}"/>
+            </a:ext>
+          </a:extLst>
+        </p:cNvPr>
+        <p:cNvGrpSpPr/>
+        <p:nvPr/>
+      </p:nvGrpSpPr>
+      <p:grpSpPr>
+        <a:xfrm>
+          <a:off x="0" y="0"/>
+          <a:ext cx="0" cy="0"/>
+          <a:chOff x="0" y="0"/>
+          <a:chExt cx="0" cy="0"/>
+        </a:xfrm>
+      </p:grpSpPr>
+      <p:sp>
+        <p:nvSpPr>
+          <p:cNvPr id="2" name="Slide Image Placeholder 1">
+            <a:extLst>
+              <a:ext uri="{FF2B5EF4-FFF2-40B4-BE49-F238E27FC236}">
+                <a16:creationId xmlns:a16="http://schemas.microsoft.com/office/drawing/2014/main" id="{F3B4DBD5-71B6-4625-ECED-B56420E4DDA1}"/>
+              </a:ext>
+            </a:extLst>
+          </p:cNvPr>
+          <p:cNvSpPr>
+            <a:spLocks noGrp="1" noRot="1" noChangeAspect="1"/>
+          </p:cNvSpPr>
+          <p:nvPr>
+            <p:ph type="sldImg"/>
+          </p:nvPr>
+        </p:nvSpPr>
+        <p:spPr/>
+      </p:sp>
+      <p:sp>
+        <p:nvSpPr>
+          <p:cNvPr id="3" name="Notes Placeholder 2">
+            <a:extLst>
+              <a:ext uri="{FF2B5EF4-FFF2-40B4-BE49-F238E27FC236}">
+                <a16:creationId xmlns:a16="http://schemas.microsoft.com/office/drawing/2014/main" id="{B1B3F84F-708F-5EF3-75C2-F06BB48CD673}"/>
+              </a:ext>
+            </a:extLst>
+          </p:cNvPr>
+          <p:cNvSpPr>
+            <a:spLocks noGrp="1"/>
+          </p:cNvSpPr>
+          <p:nvPr>
+            <p:ph type="body" idx="1"/>
+          </p:nvPr>
+        </p:nvSpPr>
+        <p:spPr/>
+        <p:txBody>
+          <a:bodyPr/>
+          <a:lstStyle/>
+          <a:p>
+            <a:endParaRPr lang="en-US" dirty="0"/>
+          </a:p>
+        </p:txBody>
+      </p:sp>
+      <p:sp>
+        <p:nvSpPr>
+          <p:cNvPr id="4" name="Slide Number Placeholder 3">
+            <a:extLst>
+              <a:ext uri="{FF2B5EF4-FFF2-40B4-BE49-F238E27FC236}">
+                <a16:creationId xmlns:a16="http://schemas.microsoft.com/office/drawing/2014/main" id="{0BC47F62-3604-26CB-819A-E300EB7B936D}"/>
+              </a:ext>
+            </a:extLst>
+          </p:cNvPr>
+          <p:cNvSpPr>
+            <a:spLocks noGrp="1"/>
+          </p:cNvSpPr>
+          <p:nvPr>
+            <p:ph type="sldNum" sz="quarter" idx="5"/>
+          </p:nvPr>
+        </p:nvSpPr>
+        <p:spPr/>
+        <p:txBody>
+          <a:bodyPr/>
+          <a:lstStyle/>
+          <a:p>
+            <a:fld id="{2F865DCE-AB5F-46FA-B07C-E9C2FA20270E}" type="slidenum">
+              <a:rPr lang="en-US" smtClean="0"/>
+              <a:t>12</a:t>
+            </a:fld>
+            <a:endParaRPr lang="en-US"/>
+          </a:p>
+        </p:txBody>
+      </p:sp>
+    </p:spTree>
+    <p:extLst>
+      <p:ext uri="{BB962C8B-B14F-4D97-AF65-F5344CB8AC3E}">
+        <p14:creationId xmlns:p14="http://schemas.microsoft.com/office/powerpoint/2010/main" val="1714538103"/>
+      </p:ext>
+    </p:extLst>
+  </p:cSld>
+  <p:clrMapOvr>
+    <a:masterClrMapping/>
+  </p:clrMapOvr>
+</p:notes>
+</file>
+
+<file path=ppt/notesSlides/notesSlide9.xml><?xml version="1.0" encoding="utf-8"?>
+<p:notes xmlns:a="http://schemas.openxmlformats.org/drawingml/2006/main" xmlns:r="http://schemas.openxmlformats.org/officeDocument/2006/relationships" xmlns:p="http://schemas.openxmlformats.org/presentationml/2006/main">
+  <p:cSld>
+    <p:spTree>
+      <p:nvGrpSpPr>
+        <p:cNvPr id="1" name="">
+          <a:extLst>
+            <a:ext uri="{FF2B5EF4-FFF2-40B4-BE49-F238E27FC236}">
+              <a16:creationId xmlns:a16="http://schemas.microsoft.com/office/drawing/2014/main" id="{98AD0A73-5D20-FB1E-1A74-8CFDB3FFFC80}"/>
+            </a:ext>
+          </a:extLst>
+        </p:cNvPr>
+        <p:cNvGrpSpPr/>
+        <p:nvPr/>
+      </p:nvGrpSpPr>
+      <p:grpSpPr>
+        <a:xfrm>
+          <a:off x="0" y="0"/>
+          <a:ext cx="0" cy="0"/>
+          <a:chOff x="0" y="0"/>
+          <a:chExt cx="0" cy="0"/>
+        </a:xfrm>
+      </p:grpSpPr>
+      <p:sp>
+        <p:nvSpPr>
+          <p:cNvPr id="2" name="Slide Image Placeholder 1">
+            <a:extLst>
+              <a:ext uri="{FF2B5EF4-FFF2-40B4-BE49-F238E27FC236}">
+                <a16:creationId xmlns:a16="http://schemas.microsoft.com/office/drawing/2014/main" id="{6EBE1BD4-F01C-64CC-BF7E-FD9149514D02}"/>
+              </a:ext>
+            </a:extLst>
+          </p:cNvPr>
+          <p:cNvSpPr>
+            <a:spLocks noGrp="1" noRot="1" noChangeAspect="1"/>
+          </p:cNvSpPr>
+          <p:nvPr>
+            <p:ph type="sldImg"/>
+          </p:nvPr>
+        </p:nvSpPr>
+        <p:spPr/>
+      </p:sp>
+      <p:sp>
+        <p:nvSpPr>
+          <p:cNvPr id="3" name="Notes Placeholder 2">
+            <a:extLst>
+              <a:ext uri="{FF2B5EF4-FFF2-40B4-BE49-F238E27FC236}">
+                <a16:creationId xmlns:a16="http://schemas.microsoft.com/office/drawing/2014/main" id="{80BCF540-2358-68A8-8D4D-E47CFBE3B332}"/>
+              </a:ext>
+            </a:extLst>
+          </p:cNvPr>
+          <p:cNvSpPr>
+            <a:spLocks noGrp="1"/>
+          </p:cNvSpPr>
+          <p:nvPr>
+            <p:ph type="body" idx="1"/>
+          </p:nvPr>
+        </p:nvSpPr>
+        <p:spPr/>
+        <p:txBody>
+          <a:bodyPr/>
+          <a:lstStyle/>
+          <a:p>
+            <a:endParaRPr lang="en-US" dirty="0"/>
+          </a:p>
+        </p:txBody>
+      </p:sp>
+      <p:sp>
+        <p:nvSpPr>
+          <p:cNvPr id="4" name="Slide Number Placeholder 3">
+            <a:extLst>
+              <a:ext uri="{FF2B5EF4-FFF2-40B4-BE49-F238E27FC236}">
+                <a16:creationId xmlns:a16="http://schemas.microsoft.com/office/drawing/2014/main" id="{9B42D920-C0C3-F98F-5BFD-462D3B0F94BF}"/>
+              </a:ext>
+            </a:extLst>
+          </p:cNvPr>
+          <p:cNvSpPr>
+            <a:spLocks noGrp="1"/>
+          </p:cNvSpPr>
+          <p:nvPr>
+            <p:ph type="sldNum" sz="quarter" idx="5"/>
+          </p:nvPr>
+        </p:nvSpPr>
+        <p:spPr/>
+        <p:txBody>
+          <a:bodyPr/>
+          <a:lstStyle/>
+          <a:p>
+            <a:fld id="{2F865DCE-AB5F-46FA-B07C-E9C2FA20270E}" type="slidenum">
+              <a:rPr lang="en-US" smtClean="0"/>
+              <a:t>13</a:t>
+            </a:fld>
+            <a:endParaRPr lang="en-US"/>
+          </a:p>
+        </p:txBody>
+      </p:sp>
+    </p:spTree>
+    <p:extLst>
+      <p:ext uri="{BB962C8B-B14F-4D97-AF65-F5344CB8AC3E}">
+        <p14:creationId xmlns:p14="http://schemas.microsoft.com/office/powerpoint/2010/main" val="66425194"/>
+      </p:ext>
+    </p:extLst>
+  </p:cSld>
+  <p:clrMapOvr>
+    <a:masterClrMapping/>
+  </p:clrMapOvr>
+</p:notes>
+</file>
+
 <file path=ppt/slideLayouts/slideLayout1.xml><?xml version="1.0" encoding="utf-8"?>
 <p:sldLayout xmlns:a="http://schemas.openxmlformats.org/drawingml/2006/main" xmlns:r="http://schemas.openxmlformats.org/officeDocument/2006/relationships" xmlns:p="http://schemas.openxmlformats.org/presentationml/2006/main" type="title" preserve="1">
   <p:cSld name="Title Slide">
@@ -612,7 +1547,7 @@
           <a:p>
             <a:fld id="{935B4303-DE67-4DA8-B375-7E6264E8BDE4}" type="datetimeFigureOut">
               <a:rPr lang="en-US" smtClean="0"/>
-              <a:t>10/21/2025</a:t>
+              <a:t>10/23/2025</a:t>
             </a:fld>
             <a:endParaRPr lang="en-US"/>
           </a:p>
@@ -810,7 +1745,7 @@
           <a:p>
             <a:fld id="{935B4303-DE67-4DA8-B375-7E6264E8BDE4}" type="datetimeFigureOut">
               <a:rPr lang="en-US" smtClean="0"/>
-              <a:t>10/21/2025</a:t>
+              <a:t>10/23/2025</a:t>
             </a:fld>
             <a:endParaRPr lang="en-US"/>
           </a:p>
@@ -1018,7 +1953,7 @@
           <a:p>
             <a:fld id="{935B4303-DE67-4DA8-B375-7E6264E8BDE4}" type="datetimeFigureOut">
               <a:rPr lang="en-US" smtClean="0"/>
-              <a:t>10/21/2025</a:t>
+              <a:t>10/23/2025</a:t>
             </a:fld>
             <a:endParaRPr lang="en-US"/>
           </a:p>
@@ -1528,7 +2463,7 @@
           <a:p>
             <a:fld id="{935B4303-DE67-4DA8-B375-7E6264E8BDE4}" type="datetimeFigureOut">
               <a:rPr lang="en-US" smtClean="0"/>
-              <a:t>10/21/2025</a:t>
+              <a:t>10/23/2025</a:t>
             </a:fld>
             <a:endParaRPr lang="en-US"/>
           </a:p>
@@ -1803,7 +2738,7 @@
           <a:p>
             <a:fld id="{935B4303-DE67-4DA8-B375-7E6264E8BDE4}" type="datetimeFigureOut">
               <a:rPr lang="en-US" smtClean="0"/>
-              <a:t>10/21/2025</a:t>
+              <a:t>10/23/2025</a:t>
             </a:fld>
             <a:endParaRPr lang="en-US"/>
           </a:p>
@@ -2068,7 +3003,7 @@
           <a:p>
             <a:fld id="{935B4303-DE67-4DA8-B375-7E6264E8BDE4}" type="datetimeFigureOut">
               <a:rPr lang="en-US" smtClean="0"/>
-              <a:t>10/21/2025</a:t>
+              <a:t>10/23/2025</a:t>
             </a:fld>
             <a:endParaRPr lang="en-US"/>
           </a:p>
@@ -2480,7 +3415,7 @@
           <a:p>
             <a:fld id="{935B4303-DE67-4DA8-B375-7E6264E8BDE4}" type="datetimeFigureOut">
               <a:rPr lang="en-US" smtClean="0"/>
-              <a:t>10/21/2025</a:t>
+              <a:t>10/23/2025</a:t>
             </a:fld>
             <a:endParaRPr lang="en-US"/>
           </a:p>
@@ -2621,7 +3556,7 @@
           <a:p>
             <a:fld id="{935B4303-DE67-4DA8-B375-7E6264E8BDE4}" type="datetimeFigureOut">
               <a:rPr lang="en-US" smtClean="0"/>
-              <a:t>10/21/2025</a:t>
+              <a:t>10/23/2025</a:t>
             </a:fld>
             <a:endParaRPr lang="en-US"/>
           </a:p>
@@ -2734,7 +3669,7 @@
           <a:p>
             <a:fld id="{935B4303-DE67-4DA8-B375-7E6264E8BDE4}" type="datetimeFigureOut">
               <a:rPr lang="en-US" smtClean="0"/>
-              <a:t>10/21/2025</a:t>
+              <a:t>10/23/2025</a:t>
             </a:fld>
             <a:endParaRPr lang="en-US"/>
           </a:p>
@@ -3045,7 +3980,7 @@
           <a:p>
             <a:fld id="{935B4303-DE67-4DA8-B375-7E6264E8BDE4}" type="datetimeFigureOut">
               <a:rPr lang="en-US" smtClean="0"/>
-              <a:t>10/21/2025</a:t>
+              <a:t>10/23/2025</a:t>
             </a:fld>
             <a:endParaRPr lang="en-US"/>
           </a:p>
@@ -3333,7 +4268,7 @@
           <a:p>
             <a:fld id="{935B4303-DE67-4DA8-B375-7E6264E8BDE4}" type="datetimeFigureOut">
               <a:rPr lang="en-US" smtClean="0"/>
-              <a:t>10/21/2025</a:t>
+              <a:t>10/23/2025</a:t>
             </a:fld>
             <a:endParaRPr lang="en-US"/>
           </a:p>
@@ -3574,7 +4509,7 @@
           <a:p>
             <a:fld id="{935B4303-DE67-4DA8-B375-7E6264E8BDE4}" type="datetimeFigureOut">
               <a:rPr lang="en-US" smtClean="0"/>
-              <a:t>10/21/2025</a:t>
+              <a:t>10/23/2025</a:t>
             </a:fld>
             <a:endParaRPr lang="en-US"/>
           </a:p>
@@ -3983,6 +4918,2704 @@
         <p:cNvPr id="1" name="">
           <a:extLst>
             <a:ext uri="{FF2B5EF4-FFF2-40B4-BE49-F238E27FC236}">
+              <a16:creationId xmlns:a16="http://schemas.microsoft.com/office/drawing/2014/main" id="{5749AB31-8040-8323-B077-BC801A1BA720}"/>
+            </a:ext>
+          </a:extLst>
+        </p:cNvPr>
+        <p:cNvGrpSpPr/>
+        <p:nvPr/>
+      </p:nvGrpSpPr>
+      <p:grpSpPr>
+        <a:xfrm>
+          <a:off x="0" y="0"/>
+          <a:ext cx="0" cy="0"/>
+          <a:chOff x="0" y="0"/>
+          <a:chExt cx="0" cy="0"/>
+        </a:xfrm>
+      </p:grpSpPr>
+      <p:sp>
+        <p:nvSpPr>
+          <p:cNvPr id="3" name="Slide Number Placeholder 2">
+            <a:extLst>
+              <a:ext uri="{FF2B5EF4-FFF2-40B4-BE49-F238E27FC236}">
+                <a16:creationId xmlns:a16="http://schemas.microsoft.com/office/drawing/2014/main" id="{181E6319-EB59-2F14-7917-A039812DBC26}"/>
+              </a:ext>
+            </a:extLst>
+          </p:cNvPr>
+          <p:cNvSpPr>
+            <a:spLocks noGrp="1"/>
+          </p:cNvSpPr>
+          <p:nvPr>
+            <p:ph type="sldNum" sz="quarter" idx="11"/>
+          </p:nvPr>
+        </p:nvSpPr>
+        <p:spPr>
+          <a:xfrm>
+            <a:off x="9222902" y="6492875"/>
+            <a:ext cx="2743200" cy="365125"/>
+          </a:xfrm>
+        </p:spPr>
+        <p:txBody>
+          <a:bodyPr/>
+          <a:lstStyle/>
+          <a:p>
+            <a:pPr>
+              <a:defRPr/>
+            </a:pPr>
+            <a:fld id="{231CC523-8BC6-4921-807A-66BD262F34AB}" type="slidenum">
+              <a:rPr lang="en-US" smtClean="0"/>
+              <a:pPr>
+                <a:defRPr/>
+              </a:pPr>
+              <a:t>1</a:t>
+            </a:fld>
+            <a:endParaRPr lang="en-US"/>
+          </a:p>
+        </p:txBody>
+      </p:sp>
+      <p:sp>
+        <p:nvSpPr>
+          <p:cNvPr id="6" name="Title 5">
+            <a:extLst>
+              <a:ext uri="{FF2B5EF4-FFF2-40B4-BE49-F238E27FC236}">
+                <a16:creationId xmlns:a16="http://schemas.microsoft.com/office/drawing/2014/main" id="{2F4CBB14-5163-3CAF-43FE-009FFE315BB8}"/>
+              </a:ext>
+            </a:extLst>
+          </p:cNvPr>
+          <p:cNvSpPr>
+            <a:spLocks noGrp="1"/>
+          </p:cNvSpPr>
+          <p:nvPr>
+            <p:ph type="ctrTitle"/>
+          </p:nvPr>
+        </p:nvSpPr>
+        <p:spPr>
+          <a:xfrm>
+            <a:off x="1446835" y="2673753"/>
+            <a:ext cx="9387069" cy="1626574"/>
+          </a:xfrm>
+        </p:spPr>
+        <p:txBody>
+          <a:bodyPr>
+            <a:normAutofit/>
+          </a:bodyPr>
+          <a:lstStyle/>
+          <a:p>
+            <a:pPr algn="ctr"/>
+            <a:r>
+              <a:rPr lang="en-US" dirty="0"/>
+              <a:t>Results and observations for </a:t>
+            </a:r>
+            <a:r>
+              <a:rPr lang="en-US" b="1" dirty="0"/>
+              <a:t>temperature-dependent</a:t>
+            </a:r>
+            <a:r>
+              <a:rPr lang="en-US" dirty="0"/>
+              <a:t> MMTO</a:t>
+            </a:r>
+            <a:br>
+              <a:rPr lang="en-US" dirty="0"/>
+            </a:br>
+            <a:r>
+              <a:rPr lang="en-US" dirty="0"/>
+              <a:t>(both linear and non-linear scenarios)</a:t>
+            </a:r>
+            <a:br>
+              <a:rPr lang="en-US" dirty="0"/>
+            </a:br>
+            <a:br>
+              <a:rPr lang="en-US" dirty="0"/>
+            </a:br>
+            <a:r>
+              <a:rPr lang="en-US" dirty="0"/>
+              <a:t>See MMTO_TempDependent_main.py</a:t>
+            </a:r>
+          </a:p>
+        </p:txBody>
+      </p:sp>
+    </p:spTree>
+    <p:extLst>
+      <p:ext uri="{BB962C8B-B14F-4D97-AF65-F5344CB8AC3E}">
+        <p14:creationId xmlns:p14="http://schemas.microsoft.com/office/powerpoint/2010/main" val="3517157959"/>
+      </p:ext>
+    </p:extLst>
+  </p:cSld>
+  <p:clrMapOvr>
+    <a:masterClrMapping/>
+  </p:clrMapOvr>
+</p:sld>
+</file>
+
+<file path=ppt/slides/slide10.xml><?xml version="1.0" encoding="utf-8"?>
+<p:sld xmlns:a="http://schemas.openxmlformats.org/drawingml/2006/main" xmlns:r="http://schemas.openxmlformats.org/officeDocument/2006/relationships" xmlns:p="http://schemas.openxmlformats.org/presentationml/2006/main">
+  <p:cSld>
+    <p:spTree>
+      <p:nvGrpSpPr>
+        <p:cNvPr id="1" name="">
+          <a:extLst>
+            <a:ext uri="{FF2B5EF4-FFF2-40B4-BE49-F238E27FC236}">
+              <a16:creationId xmlns:a16="http://schemas.microsoft.com/office/drawing/2014/main" id="{E24AFA08-09AB-0730-4B62-80D6DF1810E8}"/>
+            </a:ext>
+          </a:extLst>
+        </p:cNvPr>
+        <p:cNvGrpSpPr/>
+        <p:nvPr/>
+      </p:nvGrpSpPr>
+      <p:grpSpPr>
+        <a:xfrm>
+          <a:off x="0" y="0"/>
+          <a:ext cx="0" cy="0"/>
+          <a:chOff x="0" y="0"/>
+          <a:chExt cx="0" cy="0"/>
+        </a:xfrm>
+      </p:grpSpPr>
+      <p:sp>
+        <p:nvSpPr>
+          <p:cNvPr id="3" name="Slide Number Placeholder 2">
+            <a:extLst>
+              <a:ext uri="{FF2B5EF4-FFF2-40B4-BE49-F238E27FC236}">
+                <a16:creationId xmlns:a16="http://schemas.microsoft.com/office/drawing/2014/main" id="{B9E6A686-1423-F9E8-FA50-5BD76CD0E1E5}"/>
+              </a:ext>
+            </a:extLst>
+          </p:cNvPr>
+          <p:cNvSpPr>
+            <a:spLocks noGrp="1"/>
+          </p:cNvSpPr>
+          <p:nvPr>
+            <p:ph type="sldNum" sz="quarter" idx="11"/>
+          </p:nvPr>
+        </p:nvSpPr>
+        <p:spPr>
+          <a:xfrm>
+            <a:off x="8940799" y="6430254"/>
+            <a:ext cx="2743200" cy="365125"/>
+          </a:xfrm>
+        </p:spPr>
+        <p:txBody>
+          <a:bodyPr/>
+          <a:lstStyle/>
+          <a:p>
+            <a:pPr>
+              <a:defRPr/>
+            </a:pPr>
+            <a:fld id="{231CC523-8BC6-4921-807A-66BD262F34AB}" type="slidenum">
+              <a:rPr lang="en-US" smtClean="0"/>
+              <a:pPr>
+                <a:defRPr/>
+              </a:pPr>
+              <a:t>10</a:t>
+            </a:fld>
+            <a:endParaRPr lang="en-US"/>
+          </a:p>
+        </p:txBody>
+      </p:sp>
+      <p:sp>
+        <p:nvSpPr>
+          <p:cNvPr id="9" name="Title 8">
+            <a:extLst>
+              <a:ext uri="{FF2B5EF4-FFF2-40B4-BE49-F238E27FC236}">
+                <a16:creationId xmlns:a16="http://schemas.microsoft.com/office/drawing/2014/main" id="{E6D629A3-E080-0512-7AA9-6E2990D4B27F}"/>
+              </a:ext>
+            </a:extLst>
+          </p:cNvPr>
+          <p:cNvSpPr>
+            <a:spLocks noGrp="1"/>
+          </p:cNvSpPr>
+          <p:nvPr>
+            <p:ph type="ctrTitle"/>
+          </p:nvPr>
+        </p:nvSpPr>
+        <p:spPr>
+          <a:xfrm>
+            <a:off x="381000" y="126366"/>
+            <a:ext cx="11302999" cy="612648"/>
+          </a:xfrm>
+        </p:spPr>
+        <p:txBody>
+          <a:bodyPr>
+            <a:normAutofit/>
+          </a:bodyPr>
+          <a:lstStyle/>
+          <a:p>
+            <a:r>
+              <a:rPr lang="en-US" dirty="0"/>
+              <a:t>Latent Space Accuracy</a:t>
+            </a:r>
+          </a:p>
+        </p:txBody>
+      </p:sp>
+      <p:pic>
+        <p:nvPicPr>
+          <p:cNvPr id="17" name="Picture 16">
+            <a:extLst>
+              <a:ext uri="{FF2B5EF4-FFF2-40B4-BE49-F238E27FC236}">
+                <a16:creationId xmlns:a16="http://schemas.microsoft.com/office/drawing/2014/main" id="{FBC7E963-4A72-D9D0-E235-ECC14336A0B6}"/>
+              </a:ext>
+            </a:extLst>
+          </p:cNvPr>
+          <p:cNvPicPr>
+            <a:picLocks noChangeAspect="1"/>
+          </p:cNvPicPr>
+          <p:nvPr/>
+        </p:nvPicPr>
+        <p:blipFill>
+          <a:blip r:embed="rId3"/>
+          <a:stretch>
+            <a:fillRect/>
+          </a:stretch>
+        </p:blipFill>
+        <p:spPr>
+          <a:xfrm>
+            <a:off x="381000" y="989764"/>
+            <a:ext cx="5506883" cy="5741870"/>
+          </a:xfrm>
+          <a:prstGeom prst="rect">
+            <a:avLst/>
+          </a:prstGeom>
+        </p:spPr>
+      </p:pic>
+      <p:sp>
+        <p:nvSpPr>
+          <p:cNvPr id="2" name="TextBox 1">
+            <a:extLst>
+              <a:ext uri="{FF2B5EF4-FFF2-40B4-BE49-F238E27FC236}">
+                <a16:creationId xmlns:a16="http://schemas.microsoft.com/office/drawing/2014/main" id="{7AA96BCA-0943-40C9-9D78-D4B6129A4AAD}"/>
+              </a:ext>
+            </a:extLst>
+          </p:cNvPr>
+          <p:cNvSpPr txBox="1"/>
+          <p:nvPr/>
+        </p:nvSpPr>
+        <p:spPr>
+          <a:xfrm>
+            <a:off x="6998181" y="2938302"/>
+            <a:ext cx="3314218" cy="646331"/>
+          </a:xfrm>
+          <a:prstGeom prst="rect">
+            <a:avLst/>
+          </a:prstGeom>
+          <a:noFill/>
+        </p:spPr>
+        <p:txBody>
+          <a:bodyPr wrap="square" rtlCol="0">
+            <a:spAutoFit/>
+          </a:bodyPr>
+          <a:lstStyle/>
+          <a:p>
+            <a:r>
+              <a:rPr lang="en-US" dirty="0">
+                <a:highlight>
+                  <a:srgbClr val="FFFF00"/>
+                </a:highlight>
+              </a:rPr>
+              <a:t>All attribute reconstruction errors are less than 0.1%</a:t>
+            </a:r>
+          </a:p>
+        </p:txBody>
+      </p:sp>
+    </p:spTree>
+    <p:extLst>
+      <p:ext uri="{BB962C8B-B14F-4D97-AF65-F5344CB8AC3E}">
+        <p14:creationId xmlns:p14="http://schemas.microsoft.com/office/powerpoint/2010/main" val="1354079381"/>
+      </p:ext>
+    </p:extLst>
+  </p:cSld>
+  <p:clrMapOvr>
+    <a:masterClrMapping/>
+  </p:clrMapOvr>
+</p:sld>
+</file>
+
+<file path=ppt/slides/slide11.xml><?xml version="1.0" encoding="utf-8"?>
+<p:sld xmlns:a="http://schemas.openxmlformats.org/drawingml/2006/main" xmlns:r="http://schemas.openxmlformats.org/officeDocument/2006/relationships" xmlns:p="http://schemas.openxmlformats.org/presentationml/2006/main">
+  <p:cSld>
+    <p:spTree>
+      <p:nvGrpSpPr>
+        <p:cNvPr id="1" name="">
+          <a:extLst>
+            <a:ext uri="{FF2B5EF4-FFF2-40B4-BE49-F238E27FC236}">
+              <a16:creationId xmlns:a16="http://schemas.microsoft.com/office/drawing/2014/main" id="{C8C8C716-A279-FE58-C315-E8F688C671FA}"/>
+            </a:ext>
+          </a:extLst>
+        </p:cNvPr>
+        <p:cNvGrpSpPr/>
+        <p:nvPr/>
+      </p:nvGrpSpPr>
+      <p:grpSpPr>
+        <a:xfrm>
+          <a:off x="0" y="0"/>
+          <a:ext cx="0" cy="0"/>
+          <a:chOff x="0" y="0"/>
+          <a:chExt cx="0" cy="0"/>
+        </a:xfrm>
+      </p:grpSpPr>
+      <p:sp>
+        <p:nvSpPr>
+          <p:cNvPr id="3" name="Slide Number Placeholder 2">
+            <a:extLst>
+              <a:ext uri="{FF2B5EF4-FFF2-40B4-BE49-F238E27FC236}">
+                <a16:creationId xmlns:a16="http://schemas.microsoft.com/office/drawing/2014/main" id="{951DC64E-D59B-B022-5E59-2DAF65548B4D}"/>
+              </a:ext>
+            </a:extLst>
+          </p:cNvPr>
+          <p:cNvSpPr>
+            <a:spLocks noGrp="1"/>
+          </p:cNvSpPr>
+          <p:nvPr>
+            <p:ph type="sldNum" sz="quarter" idx="11"/>
+          </p:nvPr>
+        </p:nvSpPr>
+        <p:spPr>
+          <a:xfrm>
+            <a:off x="8940799" y="6430254"/>
+            <a:ext cx="2743200" cy="365125"/>
+          </a:xfrm>
+        </p:spPr>
+        <p:txBody>
+          <a:bodyPr/>
+          <a:lstStyle/>
+          <a:p>
+            <a:pPr>
+              <a:defRPr/>
+            </a:pPr>
+            <a:fld id="{231CC523-8BC6-4921-807A-66BD262F34AB}" type="slidenum">
+              <a:rPr lang="en-US" smtClean="0"/>
+              <a:pPr>
+                <a:defRPr/>
+              </a:pPr>
+              <a:t>11</a:t>
+            </a:fld>
+            <a:endParaRPr lang="en-US"/>
+          </a:p>
+        </p:txBody>
+      </p:sp>
+      <p:sp>
+        <p:nvSpPr>
+          <p:cNvPr id="9" name="Title 8">
+            <a:extLst>
+              <a:ext uri="{FF2B5EF4-FFF2-40B4-BE49-F238E27FC236}">
+                <a16:creationId xmlns:a16="http://schemas.microsoft.com/office/drawing/2014/main" id="{66AF962D-7AD7-0F67-D54C-64AC542BE90A}"/>
+              </a:ext>
+            </a:extLst>
+          </p:cNvPr>
+          <p:cNvSpPr>
+            <a:spLocks noGrp="1"/>
+          </p:cNvSpPr>
+          <p:nvPr>
+            <p:ph type="ctrTitle"/>
+          </p:nvPr>
+        </p:nvSpPr>
+        <p:spPr>
+          <a:xfrm>
+            <a:off x="381000" y="126366"/>
+            <a:ext cx="11302999" cy="612648"/>
+          </a:xfrm>
+        </p:spPr>
+        <p:txBody>
+          <a:bodyPr>
+            <a:normAutofit/>
+          </a:bodyPr>
+          <a:lstStyle/>
+          <a:p>
+            <a:r>
+              <a:rPr lang="en-US" dirty="0"/>
+              <a:t>Sample Latent Spaces</a:t>
+            </a:r>
+          </a:p>
+        </p:txBody>
+      </p:sp>
+      <p:pic>
+        <p:nvPicPr>
+          <p:cNvPr id="7" name="Picture 6">
+            <a:extLst>
+              <a:ext uri="{FF2B5EF4-FFF2-40B4-BE49-F238E27FC236}">
+                <a16:creationId xmlns:a16="http://schemas.microsoft.com/office/drawing/2014/main" id="{2957D66F-B187-024F-CE3B-38B3025B625B}"/>
+              </a:ext>
+            </a:extLst>
+          </p:cNvPr>
+          <p:cNvPicPr>
+            <a:picLocks noChangeAspect="1"/>
+          </p:cNvPicPr>
+          <p:nvPr/>
+        </p:nvPicPr>
+        <p:blipFill>
+          <a:blip r:embed="rId3"/>
+          <a:stretch>
+            <a:fillRect/>
+          </a:stretch>
+        </p:blipFill>
+        <p:spPr>
+          <a:xfrm>
+            <a:off x="133214" y="1362181"/>
+            <a:ext cx="6326465" cy="5140253"/>
+          </a:xfrm>
+          <a:prstGeom prst="rect">
+            <a:avLst/>
+          </a:prstGeom>
+        </p:spPr>
+      </p:pic>
+      <p:sp>
+        <p:nvSpPr>
+          <p:cNvPr id="8" name="TextBox 7">
+            <a:extLst>
+              <a:ext uri="{FF2B5EF4-FFF2-40B4-BE49-F238E27FC236}">
+                <a16:creationId xmlns:a16="http://schemas.microsoft.com/office/drawing/2014/main" id="{A0B26563-04CD-FF0C-6110-03FEB2294280}"/>
+              </a:ext>
+            </a:extLst>
+          </p:cNvPr>
+          <p:cNvSpPr txBox="1"/>
+          <p:nvPr/>
+        </p:nvSpPr>
+        <p:spPr>
+          <a:xfrm>
+            <a:off x="3146205" y="1070240"/>
+            <a:ext cx="526106" cy="461665"/>
+          </a:xfrm>
+          <a:prstGeom prst="rect">
+            <a:avLst/>
+          </a:prstGeom>
+          <a:noFill/>
+        </p:spPr>
+        <p:txBody>
+          <a:bodyPr wrap="none" rtlCol="0">
+            <a:spAutoFit/>
+          </a:bodyPr>
+          <a:lstStyle/>
+          <a:p>
+            <a:r>
+              <a:rPr lang="en-US" sz="2400" b="1" dirty="0"/>
+              <a:t>E0</a:t>
+            </a:r>
+          </a:p>
+        </p:txBody>
+      </p:sp>
+      <p:pic>
+        <p:nvPicPr>
+          <p:cNvPr id="12" name="Picture 11">
+            <a:extLst>
+              <a:ext uri="{FF2B5EF4-FFF2-40B4-BE49-F238E27FC236}">
+                <a16:creationId xmlns:a16="http://schemas.microsoft.com/office/drawing/2014/main" id="{D71EF97D-71F2-0C65-8B22-E357F0D55C93}"/>
+              </a:ext>
+            </a:extLst>
+          </p:cNvPr>
+          <p:cNvPicPr>
+            <a:picLocks noChangeAspect="1"/>
+          </p:cNvPicPr>
+          <p:nvPr/>
+        </p:nvPicPr>
+        <p:blipFill>
+          <a:blip r:embed="rId4"/>
+          <a:stretch>
+            <a:fillRect/>
+          </a:stretch>
+        </p:blipFill>
+        <p:spPr>
+          <a:xfrm>
+            <a:off x="6459679" y="1362181"/>
+            <a:ext cx="5732321" cy="4846165"/>
+          </a:xfrm>
+          <a:prstGeom prst="rect">
+            <a:avLst/>
+          </a:prstGeom>
+        </p:spPr>
+      </p:pic>
+      <p:sp>
+        <p:nvSpPr>
+          <p:cNvPr id="13" name="TextBox 12">
+            <a:extLst>
+              <a:ext uri="{FF2B5EF4-FFF2-40B4-BE49-F238E27FC236}">
+                <a16:creationId xmlns:a16="http://schemas.microsoft.com/office/drawing/2014/main" id="{8679D8DD-F5ED-9395-7CD0-613317794465}"/>
+              </a:ext>
+            </a:extLst>
+          </p:cNvPr>
+          <p:cNvSpPr txBox="1"/>
+          <p:nvPr/>
+        </p:nvSpPr>
+        <p:spPr>
+          <a:xfrm>
+            <a:off x="8909211" y="1131348"/>
+            <a:ext cx="526106" cy="461665"/>
+          </a:xfrm>
+          <a:prstGeom prst="rect">
+            <a:avLst/>
+          </a:prstGeom>
+          <a:noFill/>
+        </p:spPr>
+        <p:txBody>
+          <a:bodyPr wrap="none" rtlCol="0">
+            <a:spAutoFit/>
+          </a:bodyPr>
+          <a:lstStyle/>
+          <a:p>
+            <a:r>
+              <a:rPr lang="en-US" sz="2400" b="1" dirty="0"/>
+              <a:t>E1</a:t>
+            </a:r>
+          </a:p>
+        </p:txBody>
+      </p:sp>
+    </p:spTree>
+    <p:extLst>
+      <p:ext uri="{BB962C8B-B14F-4D97-AF65-F5344CB8AC3E}">
+        <p14:creationId xmlns:p14="http://schemas.microsoft.com/office/powerpoint/2010/main" val="186458134"/>
+      </p:ext>
+    </p:extLst>
+  </p:cSld>
+  <p:clrMapOvr>
+    <a:masterClrMapping/>
+  </p:clrMapOvr>
+</p:sld>
+</file>
+
+<file path=ppt/slides/slide12.xml><?xml version="1.0" encoding="utf-8"?>
+<p:sld xmlns:a="http://schemas.openxmlformats.org/drawingml/2006/main" xmlns:r="http://schemas.openxmlformats.org/officeDocument/2006/relationships" xmlns:p="http://schemas.openxmlformats.org/presentationml/2006/main">
+  <p:cSld>
+    <p:spTree>
+      <p:nvGrpSpPr>
+        <p:cNvPr id="1" name="">
+          <a:extLst>
+            <a:ext uri="{FF2B5EF4-FFF2-40B4-BE49-F238E27FC236}">
+              <a16:creationId xmlns:a16="http://schemas.microsoft.com/office/drawing/2014/main" id="{A5667251-FD65-CF96-53AA-76D502701F1E}"/>
+            </a:ext>
+          </a:extLst>
+        </p:cNvPr>
+        <p:cNvGrpSpPr/>
+        <p:nvPr/>
+      </p:nvGrpSpPr>
+      <p:grpSpPr>
+        <a:xfrm>
+          <a:off x="0" y="0"/>
+          <a:ext cx="0" cy="0"/>
+          <a:chOff x="0" y="0"/>
+          <a:chExt cx="0" cy="0"/>
+        </a:xfrm>
+      </p:grpSpPr>
+      <p:sp>
+        <p:nvSpPr>
+          <p:cNvPr id="3" name="Slide Number Placeholder 2">
+            <a:extLst>
+              <a:ext uri="{FF2B5EF4-FFF2-40B4-BE49-F238E27FC236}">
+                <a16:creationId xmlns:a16="http://schemas.microsoft.com/office/drawing/2014/main" id="{3D66B6DD-5118-41C8-E1CC-5AAD2BC4E111}"/>
+              </a:ext>
+            </a:extLst>
+          </p:cNvPr>
+          <p:cNvSpPr>
+            <a:spLocks noGrp="1"/>
+          </p:cNvSpPr>
+          <p:nvPr>
+            <p:ph type="sldNum" sz="quarter" idx="11"/>
+          </p:nvPr>
+        </p:nvSpPr>
+        <p:spPr>
+          <a:xfrm>
+            <a:off x="8940799" y="6430254"/>
+            <a:ext cx="2743200" cy="365125"/>
+          </a:xfrm>
+        </p:spPr>
+        <p:txBody>
+          <a:bodyPr/>
+          <a:lstStyle/>
+          <a:p>
+            <a:pPr>
+              <a:defRPr/>
+            </a:pPr>
+            <a:fld id="{231CC523-8BC6-4921-807A-66BD262F34AB}" type="slidenum">
+              <a:rPr lang="en-US" smtClean="0"/>
+              <a:pPr>
+                <a:defRPr/>
+              </a:pPr>
+              <a:t>12</a:t>
+            </a:fld>
+            <a:endParaRPr lang="en-US"/>
+          </a:p>
+        </p:txBody>
+      </p:sp>
+      <p:sp>
+        <p:nvSpPr>
+          <p:cNvPr id="9" name="Title 8">
+            <a:extLst>
+              <a:ext uri="{FF2B5EF4-FFF2-40B4-BE49-F238E27FC236}">
+                <a16:creationId xmlns:a16="http://schemas.microsoft.com/office/drawing/2014/main" id="{3DFEC319-A7D3-F90A-265C-4E07813FB121}"/>
+              </a:ext>
+            </a:extLst>
+          </p:cNvPr>
+          <p:cNvSpPr>
+            <a:spLocks noGrp="1"/>
+          </p:cNvSpPr>
+          <p:nvPr>
+            <p:ph type="ctrTitle"/>
+          </p:nvPr>
+        </p:nvSpPr>
+        <p:spPr>
+          <a:xfrm>
+            <a:off x="381000" y="126366"/>
+            <a:ext cx="11302999" cy="612648"/>
+          </a:xfrm>
+        </p:spPr>
+        <p:txBody>
+          <a:bodyPr>
+            <a:normAutofit/>
+          </a:bodyPr>
+          <a:lstStyle/>
+          <a:p>
+            <a:r>
+              <a:rPr lang="en-US" dirty="0"/>
+              <a:t>Example 5a</a:t>
+            </a:r>
+          </a:p>
+        </p:txBody>
+      </p:sp>
+      <p:sp>
+        <p:nvSpPr>
+          <p:cNvPr id="2" name="TextBox 1">
+            <a:extLst>
+              <a:ext uri="{FF2B5EF4-FFF2-40B4-BE49-F238E27FC236}">
+                <a16:creationId xmlns:a16="http://schemas.microsoft.com/office/drawing/2014/main" id="{7C7F105B-DE88-CE40-8FB9-4F898B88E619}"/>
+              </a:ext>
+            </a:extLst>
+          </p:cNvPr>
+          <p:cNvSpPr txBox="1"/>
+          <p:nvPr/>
+        </p:nvSpPr>
+        <p:spPr>
+          <a:xfrm>
+            <a:off x="280685" y="1330201"/>
+            <a:ext cx="1677062" cy="369332"/>
+          </a:xfrm>
+          <a:prstGeom prst="rect">
+            <a:avLst/>
+          </a:prstGeom>
+          <a:noFill/>
+        </p:spPr>
+        <p:txBody>
+          <a:bodyPr wrap="none" rtlCol="0">
+            <a:spAutoFit/>
+          </a:bodyPr>
+          <a:lstStyle/>
+          <a:p>
+            <a:r>
+              <a:rPr lang="en-US" dirty="0">
+                <a:highlight>
+                  <a:srgbClr val="FFFF00"/>
+                </a:highlight>
+              </a:rPr>
+              <a:t>Linear thermal </a:t>
+            </a:r>
+          </a:p>
+        </p:txBody>
+      </p:sp>
+      <p:sp>
+        <p:nvSpPr>
+          <p:cNvPr id="7" name="TextBox 6">
+            <a:extLst>
+              <a:ext uri="{FF2B5EF4-FFF2-40B4-BE49-F238E27FC236}">
+                <a16:creationId xmlns:a16="http://schemas.microsoft.com/office/drawing/2014/main" id="{0A98E942-6ADF-4E77-06A8-C4E4CB71DAD1}"/>
+              </a:ext>
+            </a:extLst>
+          </p:cNvPr>
+          <p:cNvSpPr txBox="1"/>
+          <p:nvPr/>
+        </p:nvSpPr>
+        <p:spPr>
+          <a:xfrm>
+            <a:off x="280685" y="1037150"/>
+            <a:ext cx="8319303" cy="267124"/>
+          </a:xfrm>
+          <a:prstGeom prst="rect">
+            <a:avLst/>
+          </a:prstGeom>
+          <a:noFill/>
+        </p:spPr>
+        <p:txBody>
+          <a:bodyPr wrap="square">
+            <a:spAutoFit/>
+          </a:bodyPr>
+          <a:lstStyle/>
+          <a:p>
+            <a:pPr>
+              <a:lnSpc>
+                <a:spcPts val="1200"/>
+              </a:lnSpc>
+              <a:buNone/>
+            </a:pPr>
+            <a:r>
+              <a:rPr lang="en-US" b="0" dirty="0" err="1">
+                <a:solidFill>
+                  <a:srgbClr val="4EC9B0"/>
+                </a:solidFill>
+                <a:effectLst/>
+                <a:latin typeface="Consolas" panose="020B0609020204030204" pitchFamily="49" charset="0"/>
+              </a:rPr>
+              <a:t>MMTOTempDependentExamples</a:t>
+            </a:r>
+            <a:r>
+              <a:rPr lang="en-US" b="0" dirty="0" err="1">
+                <a:solidFill>
+                  <a:srgbClr val="CCCCCC"/>
+                </a:solidFill>
+                <a:effectLst/>
+                <a:latin typeface="Consolas" panose="020B0609020204030204" pitchFamily="49" charset="0"/>
+              </a:rPr>
+              <a:t>.</a:t>
+            </a:r>
+            <a:r>
+              <a:rPr lang="en-US" b="0" dirty="0" err="1">
+                <a:solidFill>
+                  <a:srgbClr val="4FC1FF"/>
+                </a:solidFill>
+                <a:effectLst/>
+                <a:latin typeface="Consolas" panose="020B0609020204030204" pitchFamily="49" charset="0"/>
+              </a:rPr>
+              <a:t>BliskSection_Compliance_MassCost</a:t>
+            </a:r>
+            <a:endParaRPr lang="en-US" b="0" dirty="0">
+              <a:solidFill>
+                <a:srgbClr val="CCCCCC"/>
+              </a:solidFill>
+              <a:effectLst/>
+              <a:latin typeface="Consolas" panose="020B0609020204030204" pitchFamily="49" charset="0"/>
+            </a:endParaRPr>
+          </a:p>
+        </p:txBody>
+      </p:sp>
+      <p:pic>
+        <p:nvPicPr>
+          <p:cNvPr id="13" name="Picture 12">
+            <a:extLst>
+              <a:ext uri="{FF2B5EF4-FFF2-40B4-BE49-F238E27FC236}">
+                <a16:creationId xmlns:a16="http://schemas.microsoft.com/office/drawing/2014/main" id="{8B49620D-81F9-85CC-5B32-7E3863549379}"/>
+              </a:ext>
+            </a:extLst>
+          </p:cNvPr>
+          <p:cNvPicPr>
+            <a:picLocks noChangeAspect="1"/>
+          </p:cNvPicPr>
+          <p:nvPr/>
+        </p:nvPicPr>
+        <p:blipFill>
+          <a:blip r:embed="rId3"/>
+          <a:stretch>
+            <a:fillRect/>
+          </a:stretch>
+        </p:blipFill>
+        <p:spPr>
+          <a:xfrm>
+            <a:off x="8382375" y="2113786"/>
+            <a:ext cx="3183038" cy="2334849"/>
+          </a:xfrm>
+          <a:prstGeom prst="rect">
+            <a:avLst/>
+          </a:prstGeom>
+        </p:spPr>
+      </p:pic>
+      <p:pic>
+        <p:nvPicPr>
+          <p:cNvPr id="16" name="Picture 15">
+            <a:extLst>
+              <a:ext uri="{FF2B5EF4-FFF2-40B4-BE49-F238E27FC236}">
+                <a16:creationId xmlns:a16="http://schemas.microsoft.com/office/drawing/2014/main" id="{DD022C4C-ADCA-6454-BE78-25D90ABC654F}"/>
+              </a:ext>
+            </a:extLst>
+          </p:cNvPr>
+          <p:cNvPicPr>
+            <a:picLocks noChangeAspect="1"/>
+          </p:cNvPicPr>
+          <p:nvPr/>
+        </p:nvPicPr>
+        <p:blipFill>
+          <a:blip r:embed="rId4"/>
+          <a:stretch>
+            <a:fillRect/>
+          </a:stretch>
+        </p:blipFill>
+        <p:spPr>
+          <a:xfrm>
+            <a:off x="182996" y="4966639"/>
+            <a:ext cx="5349704" cy="1196444"/>
+          </a:xfrm>
+          <a:prstGeom prst="rect">
+            <a:avLst/>
+          </a:prstGeom>
+        </p:spPr>
+      </p:pic>
+      <p:pic>
+        <p:nvPicPr>
+          <p:cNvPr id="18" name="Picture 17">
+            <a:extLst>
+              <a:ext uri="{FF2B5EF4-FFF2-40B4-BE49-F238E27FC236}">
+                <a16:creationId xmlns:a16="http://schemas.microsoft.com/office/drawing/2014/main" id="{911655AC-A191-762A-F534-67D441C7A6D9}"/>
+              </a:ext>
+            </a:extLst>
+          </p:cNvPr>
+          <p:cNvPicPr>
+            <a:picLocks noChangeAspect="1"/>
+          </p:cNvPicPr>
+          <p:nvPr/>
+        </p:nvPicPr>
+        <p:blipFill>
+          <a:blip r:embed="rId5"/>
+          <a:stretch>
+            <a:fillRect/>
+          </a:stretch>
+        </p:blipFill>
+        <p:spPr>
+          <a:xfrm>
+            <a:off x="182996" y="1959029"/>
+            <a:ext cx="3945529" cy="2712225"/>
+          </a:xfrm>
+          <a:prstGeom prst="rect">
+            <a:avLst/>
+          </a:prstGeom>
+        </p:spPr>
+      </p:pic>
+      <p:pic>
+        <p:nvPicPr>
+          <p:cNvPr id="20" name="Picture 19">
+            <a:extLst>
+              <a:ext uri="{FF2B5EF4-FFF2-40B4-BE49-F238E27FC236}">
+                <a16:creationId xmlns:a16="http://schemas.microsoft.com/office/drawing/2014/main" id="{8A57D98B-2362-BD19-E478-22F4DB118421}"/>
+              </a:ext>
+            </a:extLst>
+          </p:cNvPr>
+          <p:cNvPicPr>
+            <a:picLocks noChangeAspect="1"/>
+          </p:cNvPicPr>
+          <p:nvPr/>
+        </p:nvPicPr>
+        <p:blipFill>
+          <a:blip r:embed="rId6"/>
+          <a:stretch>
+            <a:fillRect/>
+          </a:stretch>
+        </p:blipFill>
+        <p:spPr>
+          <a:xfrm>
+            <a:off x="3955036" y="2010409"/>
+            <a:ext cx="3838337" cy="2609463"/>
+          </a:xfrm>
+          <a:prstGeom prst="rect">
+            <a:avLst/>
+          </a:prstGeom>
+        </p:spPr>
+      </p:pic>
+      <p:pic>
+        <p:nvPicPr>
+          <p:cNvPr id="22" name="Picture 21">
+            <a:extLst>
+              <a:ext uri="{FF2B5EF4-FFF2-40B4-BE49-F238E27FC236}">
+                <a16:creationId xmlns:a16="http://schemas.microsoft.com/office/drawing/2014/main" id="{0129ED78-EDB8-FAF2-65C7-0067A331041A}"/>
+              </a:ext>
+            </a:extLst>
+          </p:cNvPr>
+          <p:cNvPicPr>
+            <a:picLocks noChangeAspect="1"/>
+          </p:cNvPicPr>
+          <p:nvPr/>
+        </p:nvPicPr>
+        <p:blipFill>
+          <a:blip r:embed="rId7"/>
+          <a:stretch>
+            <a:fillRect/>
+          </a:stretch>
+        </p:blipFill>
+        <p:spPr>
+          <a:xfrm>
+            <a:off x="8720879" y="4511256"/>
+            <a:ext cx="3183039" cy="2346744"/>
+          </a:xfrm>
+          <a:prstGeom prst="rect">
+            <a:avLst/>
+          </a:prstGeom>
+        </p:spPr>
+      </p:pic>
+      <p:sp>
+        <p:nvSpPr>
+          <p:cNvPr id="23" name="TextBox 22">
+            <a:extLst>
+              <a:ext uri="{FF2B5EF4-FFF2-40B4-BE49-F238E27FC236}">
+                <a16:creationId xmlns:a16="http://schemas.microsoft.com/office/drawing/2014/main" id="{2D6F3D9F-2F00-BBA9-3C73-81880A4905A8}"/>
+              </a:ext>
+            </a:extLst>
+          </p:cNvPr>
+          <p:cNvSpPr txBox="1"/>
+          <p:nvPr/>
+        </p:nvSpPr>
+        <p:spPr>
+          <a:xfrm>
+            <a:off x="902825" y="1863524"/>
+            <a:ext cx="1874552" cy="369332"/>
+          </a:xfrm>
+          <a:prstGeom prst="rect">
+            <a:avLst/>
+          </a:prstGeom>
+          <a:noFill/>
+        </p:spPr>
+        <p:txBody>
+          <a:bodyPr wrap="none" rtlCol="0">
+            <a:spAutoFit/>
+          </a:bodyPr>
+          <a:lstStyle/>
+          <a:p>
+            <a:r>
+              <a:rPr lang="en-US" dirty="0"/>
+              <a:t>Young’s modulus</a:t>
+            </a:r>
+          </a:p>
+        </p:txBody>
+      </p:sp>
+      <p:sp>
+        <p:nvSpPr>
+          <p:cNvPr id="25" name="TextBox 24">
+            <a:extLst>
+              <a:ext uri="{FF2B5EF4-FFF2-40B4-BE49-F238E27FC236}">
+                <a16:creationId xmlns:a16="http://schemas.microsoft.com/office/drawing/2014/main" id="{2D913C89-11A7-E09E-67EE-63F4FB60D95B}"/>
+              </a:ext>
+            </a:extLst>
+          </p:cNvPr>
+          <p:cNvSpPr txBox="1"/>
+          <p:nvPr/>
+        </p:nvSpPr>
+        <p:spPr>
+          <a:xfrm>
+            <a:off x="9361994" y="1728457"/>
+            <a:ext cx="1618264" cy="369332"/>
+          </a:xfrm>
+          <a:prstGeom prst="rect">
+            <a:avLst/>
+          </a:prstGeom>
+          <a:noFill/>
+        </p:spPr>
+        <p:txBody>
+          <a:bodyPr wrap="none" rtlCol="0">
+            <a:spAutoFit/>
+          </a:bodyPr>
+          <a:lstStyle/>
+          <a:p>
+            <a:r>
+              <a:rPr lang="en-US" dirty="0"/>
+              <a:t>Max Use Temp</a:t>
+            </a:r>
+          </a:p>
+        </p:txBody>
+      </p:sp>
+      <p:sp>
+        <p:nvSpPr>
+          <p:cNvPr id="26" name="TextBox 25">
+            <a:extLst>
+              <a:ext uri="{FF2B5EF4-FFF2-40B4-BE49-F238E27FC236}">
+                <a16:creationId xmlns:a16="http://schemas.microsoft.com/office/drawing/2014/main" id="{A627C177-3A1B-BD40-28A2-6DDBD3EA675C}"/>
+              </a:ext>
+            </a:extLst>
+          </p:cNvPr>
+          <p:cNvSpPr txBox="1"/>
+          <p:nvPr/>
+        </p:nvSpPr>
+        <p:spPr>
+          <a:xfrm>
+            <a:off x="5155130" y="1774363"/>
+            <a:ext cx="1438151" cy="369332"/>
+          </a:xfrm>
+          <a:prstGeom prst="rect">
+            <a:avLst/>
+          </a:prstGeom>
+          <a:noFill/>
+        </p:spPr>
+        <p:txBody>
+          <a:bodyPr wrap="none" rtlCol="0">
+            <a:spAutoFit/>
+          </a:bodyPr>
+          <a:lstStyle/>
+          <a:p>
+            <a:r>
+              <a:rPr lang="en-US" dirty="0"/>
+              <a:t>Temperature</a:t>
+            </a:r>
+          </a:p>
+        </p:txBody>
+      </p:sp>
+      <p:sp>
+        <p:nvSpPr>
+          <p:cNvPr id="27" name="TextBox 26">
+            <a:extLst>
+              <a:ext uri="{FF2B5EF4-FFF2-40B4-BE49-F238E27FC236}">
+                <a16:creationId xmlns:a16="http://schemas.microsoft.com/office/drawing/2014/main" id="{480904AD-16F8-9235-4AA1-D61458C26FF7}"/>
+              </a:ext>
+            </a:extLst>
+          </p:cNvPr>
+          <p:cNvSpPr txBox="1"/>
+          <p:nvPr/>
+        </p:nvSpPr>
+        <p:spPr>
+          <a:xfrm>
+            <a:off x="5685100" y="5274370"/>
+            <a:ext cx="3067288" cy="923330"/>
+          </a:xfrm>
+          <a:prstGeom prst="rect">
+            <a:avLst/>
+          </a:prstGeom>
+          <a:noFill/>
+        </p:spPr>
+        <p:txBody>
+          <a:bodyPr wrap="square" rtlCol="0">
+            <a:spAutoFit/>
+          </a:bodyPr>
+          <a:lstStyle/>
+          <a:p>
+            <a:r>
+              <a:rPr lang="en-US" dirty="0">
+                <a:highlight>
+                  <a:srgbClr val="FFFF00"/>
+                </a:highlight>
+              </a:rPr>
+              <a:t>0.2% elements exceed temperature limit (additional filtering needed)</a:t>
+            </a:r>
+          </a:p>
+        </p:txBody>
+      </p:sp>
+    </p:spTree>
+    <p:extLst>
+      <p:ext uri="{BB962C8B-B14F-4D97-AF65-F5344CB8AC3E}">
+        <p14:creationId xmlns:p14="http://schemas.microsoft.com/office/powerpoint/2010/main" val="1174046686"/>
+      </p:ext>
+    </p:extLst>
+  </p:cSld>
+  <p:clrMapOvr>
+    <a:masterClrMapping/>
+  </p:clrMapOvr>
+</p:sld>
+</file>
+
+<file path=ppt/slides/slide13.xml><?xml version="1.0" encoding="utf-8"?>
+<p:sld xmlns:a="http://schemas.openxmlformats.org/drawingml/2006/main" xmlns:r="http://schemas.openxmlformats.org/officeDocument/2006/relationships" xmlns:p="http://schemas.openxmlformats.org/presentationml/2006/main">
+  <p:cSld>
+    <p:spTree>
+      <p:nvGrpSpPr>
+        <p:cNvPr id="1" name="">
+          <a:extLst>
+            <a:ext uri="{FF2B5EF4-FFF2-40B4-BE49-F238E27FC236}">
+              <a16:creationId xmlns:a16="http://schemas.microsoft.com/office/drawing/2014/main" id="{D2F20926-E43A-C426-BABD-84F2FFD1803F}"/>
+            </a:ext>
+          </a:extLst>
+        </p:cNvPr>
+        <p:cNvGrpSpPr/>
+        <p:nvPr/>
+      </p:nvGrpSpPr>
+      <p:grpSpPr>
+        <a:xfrm>
+          <a:off x="0" y="0"/>
+          <a:ext cx="0" cy="0"/>
+          <a:chOff x="0" y="0"/>
+          <a:chExt cx="0" cy="0"/>
+        </a:xfrm>
+      </p:grpSpPr>
+      <p:sp>
+        <p:nvSpPr>
+          <p:cNvPr id="3" name="Slide Number Placeholder 2">
+            <a:extLst>
+              <a:ext uri="{FF2B5EF4-FFF2-40B4-BE49-F238E27FC236}">
+                <a16:creationId xmlns:a16="http://schemas.microsoft.com/office/drawing/2014/main" id="{19FED218-251E-7502-CF75-A4983F0E4C61}"/>
+              </a:ext>
+            </a:extLst>
+          </p:cNvPr>
+          <p:cNvSpPr>
+            <a:spLocks noGrp="1"/>
+          </p:cNvSpPr>
+          <p:nvPr>
+            <p:ph type="sldNum" sz="quarter" idx="11"/>
+          </p:nvPr>
+        </p:nvSpPr>
+        <p:spPr>
+          <a:xfrm>
+            <a:off x="8940799" y="6430254"/>
+            <a:ext cx="2743200" cy="365125"/>
+          </a:xfrm>
+        </p:spPr>
+        <p:txBody>
+          <a:bodyPr/>
+          <a:lstStyle/>
+          <a:p>
+            <a:pPr>
+              <a:defRPr/>
+            </a:pPr>
+            <a:fld id="{231CC523-8BC6-4921-807A-66BD262F34AB}" type="slidenum">
+              <a:rPr lang="en-US" smtClean="0"/>
+              <a:pPr>
+                <a:defRPr/>
+              </a:pPr>
+              <a:t>13</a:t>
+            </a:fld>
+            <a:endParaRPr lang="en-US"/>
+          </a:p>
+        </p:txBody>
+      </p:sp>
+      <p:sp>
+        <p:nvSpPr>
+          <p:cNvPr id="9" name="Title 8">
+            <a:extLst>
+              <a:ext uri="{FF2B5EF4-FFF2-40B4-BE49-F238E27FC236}">
+                <a16:creationId xmlns:a16="http://schemas.microsoft.com/office/drawing/2014/main" id="{1A7B5990-846F-BCE8-1113-C451659A41B9}"/>
+              </a:ext>
+            </a:extLst>
+          </p:cNvPr>
+          <p:cNvSpPr>
+            <a:spLocks noGrp="1"/>
+          </p:cNvSpPr>
+          <p:nvPr>
+            <p:ph type="ctrTitle"/>
+          </p:nvPr>
+        </p:nvSpPr>
+        <p:spPr>
+          <a:xfrm>
+            <a:off x="381000" y="126366"/>
+            <a:ext cx="11302999" cy="612648"/>
+          </a:xfrm>
+        </p:spPr>
+        <p:txBody>
+          <a:bodyPr>
+            <a:normAutofit/>
+          </a:bodyPr>
+          <a:lstStyle/>
+          <a:p>
+            <a:r>
+              <a:rPr lang="en-US" dirty="0"/>
+              <a:t>Example 5b</a:t>
+            </a:r>
+          </a:p>
+        </p:txBody>
+      </p:sp>
+      <p:sp>
+        <p:nvSpPr>
+          <p:cNvPr id="2" name="TextBox 1">
+            <a:extLst>
+              <a:ext uri="{FF2B5EF4-FFF2-40B4-BE49-F238E27FC236}">
+                <a16:creationId xmlns:a16="http://schemas.microsoft.com/office/drawing/2014/main" id="{6A5A414E-6D77-E3B9-D429-7F3E8E4D0180}"/>
+              </a:ext>
+            </a:extLst>
+          </p:cNvPr>
+          <p:cNvSpPr txBox="1"/>
+          <p:nvPr/>
+        </p:nvSpPr>
+        <p:spPr>
+          <a:xfrm>
+            <a:off x="280685" y="1330201"/>
+            <a:ext cx="2093843" cy="369332"/>
+          </a:xfrm>
+          <a:prstGeom prst="rect">
+            <a:avLst/>
+          </a:prstGeom>
+          <a:noFill/>
+        </p:spPr>
+        <p:txBody>
+          <a:bodyPr wrap="none" rtlCol="0">
+            <a:spAutoFit/>
+          </a:bodyPr>
+          <a:lstStyle/>
+          <a:p>
+            <a:r>
+              <a:rPr lang="en-US" dirty="0" err="1">
+                <a:highlight>
+                  <a:srgbClr val="FFFF00"/>
+                </a:highlight>
+              </a:rPr>
+              <a:t>NonLinear</a:t>
+            </a:r>
+            <a:r>
+              <a:rPr lang="en-US" dirty="0">
+                <a:highlight>
+                  <a:srgbClr val="FFFF00"/>
+                </a:highlight>
+              </a:rPr>
+              <a:t> thermal </a:t>
+            </a:r>
+          </a:p>
+        </p:txBody>
+      </p:sp>
+      <p:sp>
+        <p:nvSpPr>
+          <p:cNvPr id="7" name="TextBox 6">
+            <a:extLst>
+              <a:ext uri="{FF2B5EF4-FFF2-40B4-BE49-F238E27FC236}">
+                <a16:creationId xmlns:a16="http://schemas.microsoft.com/office/drawing/2014/main" id="{30CAA858-9806-CE4B-20D1-6F60BBDB2211}"/>
+              </a:ext>
+            </a:extLst>
+          </p:cNvPr>
+          <p:cNvSpPr txBox="1"/>
+          <p:nvPr/>
+        </p:nvSpPr>
+        <p:spPr>
+          <a:xfrm>
+            <a:off x="280685" y="1037150"/>
+            <a:ext cx="8319303" cy="267124"/>
+          </a:xfrm>
+          <a:prstGeom prst="rect">
+            <a:avLst/>
+          </a:prstGeom>
+          <a:noFill/>
+        </p:spPr>
+        <p:txBody>
+          <a:bodyPr wrap="square">
+            <a:spAutoFit/>
+          </a:bodyPr>
+          <a:lstStyle/>
+          <a:p>
+            <a:pPr>
+              <a:lnSpc>
+                <a:spcPts val="1200"/>
+              </a:lnSpc>
+              <a:buNone/>
+            </a:pPr>
+            <a:r>
+              <a:rPr lang="en-US" b="0" dirty="0" err="1">
+                <a:solidFill>
+                  <a:srgbClr val="4EC9B0"/>
+                </a:solidFill>
+                <a:effectLst/>
+                <a:latin typeface="Consolas" panose="020B0609020204030204" pitchFamily="49" charset="0"/>
+              </a:rPr>
+              <a:t>MMTOTempDependentExamples</a:t>
+            </a:r>
+            <a:r>
+              <a:rPr lang="en-US" b="0" dirty="0" err="1">
+                <a:solidFill>
+                  <a:srgbClr val="CCCCCC"/>
+                </a:solidFill>
+                <a:effectLst/>
+                <a:latin typeface="Consolas" panose="020B0609020204030204" pitchFamily="49" charset="0"/>
+              </a:rPr>
+              <a:t>.</a:t>
+            </a:r>
+            <a:r>
+              <a:rPr lang="en-US" b="0" dirty="0" err="1">
+                <a:solidFill>
+                  <a:srgbClr val="4FC1FF"/>
+                </a:solidFill>
+                <a:effectLst/>
+                <a:latin typeface="Consolas" panose="020B0609020204030204" pitchFamily="49" charset="0"/>
+              </a:rPr>
+              <a:t>BliskSection_Compliance_MassCost</a:t>
+            </a:r>
+            <a:endParaRPr lang="en-US" b="0" dirty="0">
+              <a:solidFill>
+                <a:srgbClr val="CCCCCC"/>
+              </a:solidFill>
+              <a:effectLst/>
+              <a:latin typeface="Consolas" panose="020B0609020204030204" pitchFamily="49" charset="0"/>
+            </a:endParaRPr>
+          </a:p>
+        </p:txBody>
+      </p:sp>
+      <p:sp>
+        <p:nvSpPr>
+          <p:cNvPr id="23" name="TextBox 22">
+            <a:extLst>
+              <a:ext uri="{FF2B5EF4-FFF2-40B4-BE49-F238E27FC236}">
+                <a16:creationId xmlns:a16="http://schemas.microsoft.com/office/drawing/2014/main" id="{510AA497-B07E-3C9C-F2BA-B5E4F98EB349}"/>
+              </a:ext>
+            </a:extLst>
+          </p:cNvPr>
+          <p:cNvSpPr txBox="1"/>
+          <p:nvPr/>
+        </p:nvSpPr>
+        <p:spPr>
+          <a:xfrm>
+            <a:off x="902825" y="1863524"/>
+            <a:ext cx="1874552" cy="369332"/>
+          </a:xfrm>
+          <a:prstGeom prst="rect">
+            <a:avLst/>
+          </a:prstGeom>
+          <a:noFill/>
+        </p:spPr>
+        <p:txBody>
+          <a:bodyPr wrap="none" rtlCol="0">
+            <a:spAutoFit/>
+          </a:bodyPr>
+          <a:lstStyle/>
+          <a:p>
+            <a:r>
+              <a:rPr lang="en-US" dirty="0"/>
+              <a:t>Young’s modulus</a:t>
+            </a:r>
+          </a:p>
+        </p:txBody>
+      </p:sp>
+      <p:sp>
+        <p:nvSpPr>
+          <p:cNvPr id="25" name="TextBox 24">
+            <a:extLst>
+              <a:ext uri="{FF2B5EF4-FFF2-40B4-BE49-F238E27FC236}">
+                <a16:creationId xmlns:a16="http://schemas.microsoft.com/office/drawing/2014/main" id="{9A8C5E9D-5092-117B-E5DA-F1F66BF72AC7}"/>
+              </a:ext>
+            </a:extLst>
+          </p:cNvPr>
+          <p:cNvSpPr txBox="1"/>
+          <p:nvPr/>
+        </p:nvSpPr>
+        <p:spPr>
+          <a:xfrm>
+            <a:off x="9382375" y="1838162"/>
+            <a:ext cx="1618264" cy="369332"/>
+          </a:xfrm>
+          <a:prstGeom prst="rect">
+            <a:avLst/>
+          </a:prstGeom>
+          <a:noFill/>
+        </p:spPr>
+        <p:txBody>
+          <a:bodyPr wrap="none" rtlCol="0">
+            <a:spAutoFit/>
+          </a:bodyPr>
+          <a:lstStyle/>
+          <a:p>
+            <a:r>
+              <a:rPr lang="en-US" dirty="0"/>
+              <a:t>Max Use Temp</a:t>
+            </a:r>
+          </a:p>
+        </p:txBody>
+      </p:sp>
+      <p:sp>
+        <p:nvSpPr>
+          <p:cNvPr id="26" name="TextBox 25">
+            <a:extLst>
+              <a:ext uri="{FF2B5EF4-FFF2-40B4-BE49-F238E27FC236}">
+                <a16:creationId xmlns:a16="http://schemas.microsoft.com/office/drawing/2014/main" id="{AED1DDFC-05E7-94EB-9558-A3DCF3B8DC10}"/>
+              </a:ext>
+            </a:extLst>
+          </p:cNvPr>
+          <p:cNvSpPr txBox="1"/>
+          <p:nvPr/>
+        </p:nvSpPr>
+        <p:spPr>
+          <a:xfrm>
+            <a:off x="5155130" y="1774363"/>
+            <a:ext cx="1438151" cy="369332"/>
+          </a:xfrm>
+          <a:prstGeom prst="rect">
+            <a:avLst/>
+          </a:prstGeom>
+          <a:noFill/>
+        </p:spPr>
+        <p:txBody>
+          <a:bodyPr wrap="none" rtlCol="0">
+            <a:spAutoFit/>
+          </a:bodyPr>
+          <a:lstStyle/>
+          <a:p>
+            <a:r>
+              <a:rPr lang="en-US" dirty="0"/>
+              <a:t>Temperature</a:t>
+            </a:r>
+          </a:p>
+        </p:txBody>
+      </p:sp>
+      <p:sp>
+        <p:nvSpPr>
+          <p:cNvPr id="27" name="TextBox 26">
+            <a:extLst>
+              <a:ext uri="{FF2B5EF4-FFF2-40B4-BE49-F238E27FC236}">
+                <a16:creationId xmlns:a16="http://schemas.microsoft.com/office/drawing/2014/main" id="{C0C15286-C717-66F6-979F-216BA3971860}"/>
+              </a:ext>
+            </a:extLst>
+          </p:cNvPr>
+          <p:cNvSpPr txBox="1"/>
+          <p:nvPr/>
+        </p:nvSpPr>
+        <p:spPr>
+          <a:xfrm>
+            <a:off x="8463667" y="1128032"/>
+            <a:ext cx="3697464" cy="646331"/>
+          </a:xfrm>
+          <a:prstGeom prst="rect">
+            <a:avLst/>
+          </a:prstGeom>
+          <a:noFill/>
+        </p:spPr>
+        <p:txBody>
+          <a:bodyPr wrap="square" rtlCol="0">
+            <a:spAutoFit/>
+          </a:bodyPr>
+          <a:lstStyle/>
+          <a:p>
+            <a:r>
+              <a:rPr lang="en-US" dirty="0">
+                <a:highlight>
+                  <a:srgbClr val="FFFF00"/>
+                </a:highlight>
+              </a:rPr>
+              <a:t>0.2% elements exceed temperature limit (additional filtering needed)</a:t>
+            </a:r>
+          </a:p>
+        </p:txBody>
+      </p:sp>
+      <p:pic>
+        <p:nvPicPr>
+          <p:cNvPr id="5" name="Picture 4">
+            <a:extLst>
+              <a:ext uri="{FF2B5EF4-FFF2-40B4-BE49-F238E27FC236}">
+                <a16:creationId xmlns:a16="http://schemas.microsoft.com/office/drawing/2014/main" id="{56E04258-C4F8-2F01-1CE9-C1E0707704EC}"/>
+              </a:ext>
+            </a:extLst>
+          </p:cNvPr>
+          <p:cNvPicPr>
+            <a:picLocks noChangeAspect="1"/>
+          </p:cNvPicPr>
+          <p:nvPr/>
+        </p:nvPicPr>
+        <p:blipFill>
+          <a:blip r:embed="rId3"/>
+          <a:stretch>
+            <a:fillRect/>
+          </a:stretch>
+        </p:blipFill>
+        <p:spPr>
+          <a:xfrm>
+            <a:off x="8599988" y="2201155"/>
+            <a:ext cx="3183039" cy="2226434"/>
+          </a:xfrm>
+          <a:prstGeom prst="rect">
+            <a:avLst/>
+          </a:prstGeom>
+        </p:spPr>
+      </p:pic>
+      <p:pic>
+        <p:nvPicPr>
+          <p:cNvPr id="8" name="Picture 7">
+            <a:extLst>
+              <a:ext uri="{FF2B5EF4-FFF2-40B4-BE49-F238E27FC236}">
+                <a16:creationId xmlns:a16="http://schemas.microsoft.com/office/drawing/2014/main" id="{226D8394-9B93-D752-4F8D-216BB2051863}"/>
+              </a:ext>
+            </a:extLst>
+          </p:cNvPr>
+          <p:cNvPicPr>
+            <a:picLocks noChangeAspect="1"/>
+          </p:cNvPicPr>
+          <p:nvPr/>
+        </p:nvPicPr>
+        <p:blipFill>
+          <a:blip r:embed="rId4"/>
+          <a:stretch>
+            <a:fillRect/>
+          </a:stretch>
+        </p:blipFill>
+        <p:spPr>
+          <a:xfrm>
+            <a:off x="280685" y="4970774"/>
+            <a:ext cx="5326842" cy="1226926"/>
+          </a:xfrm>
+          <a:prstGeom prst="rect">
+            <a:avLst/>
+          </a:prstGeom>
+        </p:spPr>
+      </p:pic>
+      <p:pic>
+        <p:nvPicPr>
+          <p:cNvPr id="11" name="Picture 10">
+            <a:extLst>
+              <a:ext uri="{FF2B5EF4-FFF2-40B4-BE49-F238E27FC236}">
+                <a16:creationId xmlns:a16="http://schemas.microsoft.com/office/drawing/2014/main" id="{B78F6A04-6A75-36E5-9D6B-F097C83F7ACE}"/>
+              </a:ext>
+            </a:extLst>
+          </p:cNvPr>
+          <p:cNvPicPr>
+            <a:picLocks noChangeAspect="1"/>
+          </p:cNvPicPr>
+          <p:nvPr/>
+        </p:nvPicPr>
+        <p:blipFill>
+          <a:blip r:embed="rId5"/>
+          <a:stretch>
+            <a:fillRect/>
+          </a:stretch>
+        </p:blipFill>
+        <p:spPr>
+          <a:xfrm>
+            <a:off x="472039" y="2258783"/>
+            <a:ext cx="3804977" cy="2677974"/>
+          </a:xfrm>
+          <a:prstGeom prst="rect">
+            <a:avLst/>
+          </a:prstGeom>
+        </p:spPr>
+      </p:pic>
+      <p:pic>
+        <p:nvPicPr>
+          <p:cNvPr id="14" name="Picture 13">
+            <a:extLst>
+              <a:ext uri="{FF2B5EF4-FFF2-40B4-BE49-F238E27FC236}">
+                <a16:creationId xmlns:a16="http://schemas.microsoft.com/office/drawing/2014/main" id="{D946DC00-6D5A-0ED8-2792-54005372012C}"/>
+              </a:ext>
+            </a:extLst>
+          </p:cNvPr>
+          <p:cNvPicPr>
+            <a:picLocks noChangeAspect="1"/>
+          </p:cNvPicPr>
+          <p:nvPr/>
+        </p:nvPicPr>
+        <p:blipFill>
+          <a:blip r:embed="rId6"/>
+          <a:stretch>
+            <a:fillRect/>
+          </a:stretch>
+        </p:blipFill>
+        <p:spPr>
+          <a:xfrm>
+            <a:off x="4478881" y="2143695"/>
+            <a:ext cx="3609683" cy="2776237"/>
+          </a:xfrm>
+          <a:prstGeom prst="rect">
+            <a:avLst/>
+          </a:prstGeom>
+        </p:spPr>
+      </p:pic>
+      <p:pic>
+        <p:nvPicPr>
+          <p:cNvPr id="17" name="Picture 16">
+            <a:extLst>
+              <a:ext uri="{FF2B5EF4-FFF2-40B4-BE49-F238E27FC236}">
+                <a16:creationId xmlns:a16="http://schemas.microsoft.com/office/drawing/2014/main" id="{276306AC-9E68-7441-E89D-396F9E1ED457}"/>
+              </a:ext>
+            </a:extLst>
+          </p:cNvPr>
+          <p:cNvPicPr>
+            <a:picLocks noChangeAspect="1"/>
+          </p:cNvPicPr>
+          <p:nvPr/>
+        </p:nvPicPr>
+        <p:blipFill>
+          <a:blip r:embed="rId7"/>
+          <a:stretch>
+            <a:fillRect/>
+          </a:stretch>
+        </p:blipFill>
+        <p:spPr>
+          <a:xfrm>
+            <a:off x="8599988" y="4294298"/>
+            <a:ext cx="3501989" cy="2563702"/>
+          </a:xfrm>
+          <a:prstGeom prst="rect">
+            <a:avLst/>
+          </a:prstGeom>
+        </p:spPr>
+      </p:pic>
+      <p:sp>
+        <p:nvSpPr>
+          <p:cNvPr id="19" name="TextBox 18">
+            <a:extLst>
+              <a:ext uri="{FF2B5EF4-FFF2-40B4-BE49-F238E27FC236}">
+                <a16:creationId xmlns:a16="http://schemas.microsoft.com/office/drawing/2014/main" id="{E19093C6-238C-7668-A03D-2BCC7093BCE5}"/>
+              </a:ext>
+            </a:extLst>
+          </p:cNvPr>
+          <p:cNvSpPr txBox="1"/>
+          <p:nvPr/>
+        </p:nvSpPr>
+        <p:spPr>
+          <a:xfrm>
+            <a:off x="167188" y="6259403"/>
+            <a:ext cx="6558744" cy="369332"/>
+          </a:xfrm>
+          <a:prstGeom prst="rect">
+            <a:avLst/>
+          </a:prstGeom>
+          <a:noFill/>
+        </p:spPr>
+        <p:txBody>
+          <a:bodyPr wrap="square" rtlCol="0">
+            <a:spAutoFit/>
+          </a:bodyPr>
+          <a:lstStyle/>
+          <a:p>
+            <a:r>
+              <a:rPr lang="en-US" dirty="0">
+                <a:highlight>
+                  <a:srgbClr val="FFFF00"/>
+                </a:highlight>
+              </a:rPr>
+              <a:t>Non-linear MMTO with 130,000 degrees of freedom in 22 mins   </a:t>
+            </a:r>
+          </a:p>
+        </p:txBody>
+      </p:sp>
+    </p:spTree>
+    <p:extLst>
+      <p:ext uri="{BB962C8B-B14F-4D97-AF65-F5344CB8AC3E}">
+        <p14:creationId xmlns:p14="http://schemas.microsoft.com/office/powerpoint/2010/main" val="1454572893"/>
+      </p:ext>
+    </p:extLst>
+  </p:cSld>
+  <p:clrMapOvr>
+    <a:masterClrMapping/>
+  </p:clrMapOvr>
+</p:sld>
+</file>
+
+<file path=ppt/slides/slide2.xml><?xml version="1.0" encoding="utf-8"?>
+<p:sld xmlns:a="http://schemas.openxmlformats.org/drawingml/2006/main" xmlns:r="http://schemas.openxmlformats.org/officeDocument/2006/relationships" xmlns:p="http://schemas.openxmlformats.org/presentationml/2006/main">
+  <p:cSld>
+    <p:spTree>
+      <p:nvGrpSpPr>
+        <p:cNvPr id="1" name="">
+          <a:extLst>
+            <a:ext uri="{FF2B5EF4-FFF2-40B4-BE49-F238E27FC236}">
+              <a16:creationId xmlns:a16="http://schemas.microsoft.com/office/drawing/2014/main" id="{AA717E4E-F9CF-332D-B426-98BB3C230074}"/>
+            </a:ext>
+          </a:extLst>
+        </p:cNvPr>
+        <p:cNvGrpSpPr/>
+        <p:nvPr/>
+      </p:nvGrpSpPr>
+      <p:grpSpPr>
+        <a:xfrm>
+          <a:off x="0" y="0"/>
+          <a:ext cx="0" cy="0"/>
+          <a:chOff x="0" y="0"/>
+          <a:chExt cx="0" cy="0"/>
+        </a:xfrm>
+      </p:grpSpPr>
+      <p:sp>
+        <p:nvSpPr>
+          <p:cNvPr id="3" name="Slide Number Placeholder 2">
+            <a:extLst>
+              <a:ext uri="{FF2B5EF4-FFF2-40B4-BE49-F238E27FC236}">
+                <a16:creationId xmlns:a16="http://schemas.microsoft.com/office/drawing/2014/main" id="{7FB25F00-855C-9993-40CE-A5DE1ABABA1C}"/>
+              </a:ext>
+            </a:extLst>
+          </p:cNvPr>
+          <p:cNvSpPr>
+            <a:spLocks noGrp="1"/>
+          </p:cNvSpPr>
+          <p:nvPr>
+            <p:ph type="sldNum" sz="quarter" idx="11"/>
+          </p:nvPr>
+        </p:nvSpPr>
+        <p:spPr>
+          <a:xfrm>
+            <a:off x="9222902" y="6492875"/>
+            <a:ext cx="2743200" cy="365125"/>
+          </a:xfrm>
+        </p:spPr>
+        <p:txBody>
+          <a:bodyPr/>
+          <a:lstStyle/>
+          <a:p>
+            <a:pPr>
+              <a:defRPr/>
+            </a:pPr>
+            <a:fld id="{231CC523-8BC6-4921-807A-66BD262F34AB}" type="slidenum">
+              <a:rPr lang="en-US" smtClean="0"/>
+              <a:pPr>
+                <a:defRPr/>
+              </a:pPr>
+              <a:t>2</a:t>
+            </a:fld>
+            <a:endParaRPr lang="en-US"/>
+          </a:p>
+        </p:txBody>
+      </p:sp>
+      <p:sp>
+        <p:nvSpPr>
+          <p:cNvPr id="9" name="Title 8">
+            <a:extLst>
+              <a:ext uri="{FF2B5EF4-FFF2-40B4-BE49-F238E27FC236}">
+                <a16:creationId xmlns:a16="http://schemas.microsoft.com/office/drawing/2014/main" id="{E8DFDD62-0E32-6E82-BD12-06D9825F4B94}"/>
+              </a:ext>
+            </a:extLst>
+          </p:cNvPr>
+          <p:cNvSpPr>
+            <a:spLocks noGrp="1"/>
+          </p:cNvSpPr>
+          <p:nvPr>
+            <p:ph type="ctrTitle"/>
+          </p:nvPr>
+        </p:nvSpPr>
+        <p:spPr>
+          <a:xfrm>
+            <a:off x="381000" y="126366"/>
+            <a:ext cx="11302999" cy="612648"/>
+          </a:xfrm>
+        </p:spPr>
+        <p:txBody>
+          <a:bodyPr>
+            <a:normAutofit/>
+          </a:bodyPr>
+          <a:lstStyle/>
+          <a:p>
+            <a:r>
+              <a:rPr lang="en-US" dirty="0"/>
+              <a:t>Material: </a:t>
+            </a:r>
+            <a:r>
+              <a:rPr lang="en-US" dirty="0" err="1"/>
+              <a:t>DataVaryingTemperature</a:t>
+            </a:r>
+            <a:r>
+              <a:rPr lang="en-US" dirty="0"/>
+              <a:t>/3MaterialsTempDependent.xlsx</a:t>
+            </a:r>
+          </a:p>
+        </p:txBody>
+      </p:sp>
+      <p:sp>
+        <p:nvSpPr>
+          <p:cNvPr id="8" name="TextBox 7">
+            <a:extLst>
+              <a:ext uri="{FF2B5EF4-FFF2-40B4-BE49-F238E27FC236}">
+                <a16:creationId xmlns:a16="http://schemas.microsoft.com/office/drawing/2014/main" id="{B56006D1-AB20-2C9B-E484-CD43DE025578}"/>
+              </a:ext>
+            </a:extLst>
+          </p:cNvPr>
+          <p:cNvSpPr txBox="1"/>
+          <p:nvPr/>
+        </p:nvSpPr>
+        <p:spPr>
+          <a:xfrm>
+            <a:off x="24642" y="961000"/>
+            <a:ext cx="1799467" cy="646331"/>
+          </a:xfrm>
+          <a:prstGeom prst="rect">
+            <a:avLst/>
+          </a:prstGeom>
+          <a:noFill/>
+        </p:spPr>
+        <p:txBody>
+          <a:bodyPr wrap="none" rtlCol="0">
+            <a:spAutoFit/>
+          </a:bodyPr>
+          <a:lstStyle/>
+          <a:p>
+            <a:pPr marL="285750" indent="-285750">
+              <a:buFont typeface="Arial" panose="020B0604020202020204" pitchFamily="34" charset="0"/>
+              <a:buChar char="•"/>
+            </a:pPr>
+            <a:r>
+              <a:rPr lang="en-US" b="1" dirty="0"/>
+              <a:t>3 materials</a:t>
+            </a:r>
+          </a:p>
+          <a:p>
+            <a:pPr marL="285750" indent="-285750">
+              <a:buFont typeface="Arial" panose="020B0604020202020204" pitchFamily="34" charset="0"/>
+              <a:buChar char="•"/>
+            </a:pPr>
+            <a:r>
+              <a:rPr lang="en-US" b="1" dirty="0"/>
+              <a:t>16 attributes</a:t>
+            </a:r>
+          </a:p>
+        </p:txBody>
+      </p:sp>
+      <p:pic>
+        <p:nvPicPr>
+          <p:cNvPr id="11" name="Picture 10">
+            <a:extLst>
+              <a:ext uri="{FF2B5EF4-FFF2-40B4-BE49-F238E27FC236}">
+                <a16:creationId xmlns:a16="http://schemas.microsoft.com/office/drawing/2014/main" id="{05D74625-E3BD-660B-9C75-D2CE4C4F843A}"/>
+              </a:ext>
+            </a:extLst>
+          </p:cNvPr>
+          <p:cNvPicPr>
+            <a:picLocks noChangeAspect="1"/>
+          </p:cNvPicPr>
+          <p:nvPr/>
+        </p:nvPicPr>
+        <p:blipFill>
+          <a:blip r:embed="rId3"/>
+          <a:stretch>
+            <a:fillRect/>
+          </a:stretch>
+        </p:blipFill>
+        <p:spPr>
+          <a:xfrm>
+            <a:off x="23172" y="3250863"/>
+            <a:ext cx="3802827" cy="2804743"/>
+          </a:xfrm>
+          <a:prstGeom prst="rect">
+            <a:avLst/>
+          </a:prstGeom>
+        </p:spPr>
+      </p:pic>
+      <p:sp>
+        <p:nvSpPr>
+          <p:cNvPr id="16" name="Right Brace 15">
+            <a:extLst>
+              <a:ext uri="{FF2B5EF4-FFF2-40B4-BE49-F238E27FC236}">
+                <a16:creationId xmlns:a16="http://schemas.microsoft.com/office/drawing/2014/main" id="{66030CC5-EC78-D6F5-392D-BAB555B69B80}"/>
+              </a:ext>
+            </a:extLst>
+          </p:cNvPr>
+          <p:cNvSpPr/>
+          <p:nvPr/>
+        </p:nvSpPr>
+        <p:spPr>
+          <a:xfrm rot="16200000">
+            <a:off x="3772046" y="534318"/>
+            <a:ext cx="291537" cy="2222771"/>
+          </a:xfrm>
+          <a:prstGeom prst="rightBrace">
+            <a:avLst/>
+          </a:prstGeom>
+        </p:spPr>
+        <p:style>
+          <a:lnRef idx="2">
+            <a:schemeClr val="accent1"/>
+          </a:lnRef>
+          <a:fillRef idx="0">
+            <a:schemeClr val="accent1"/>
+          </a:fillRef>
+          <a:effectRef idx="1">
+            <a:schemeClr val="accent1"/>
+          </a:effectRef>
+          <a:fontRef idx="minor">
+            <a:schemeClr val="tx1"/>
+          </a:fontRef>
+        </p:style>
+        <p:txBody>
+          <a:bodyPr rtlCol="0" anchor="ctr"/>
+          <a:lstStyle/>
+          <a:p>
+            <a:pPr algn="ctr"/>
+            <a:endParaRPr lang="en-US"/>
+          </a:p>
+        </p:txBody>
+      </p:sp>
+      <p:sp>
+        <p:nvSpPr>
+          <p:cNvPr id="17" name="TextBox 16">
+            <a:extLst>
+              <a:ext uri="{FF2B5EF4-FFF2-40B4-BE49-F238E27FC236}">
+                <a16:creationId xmlns:a16="http://schemas.microsoft.com/office/drawing/2014/main" id="{FC130244-6D8E-6EAB-B374-307626F75635}"/>
+              </a:ext>
+            </a:extLst>
+          </p:cNvPr>
+          <p:cNvSpPr txBox="1"/>
+          <p:nvPr/>
+        </p:nvSpPr>
+        <p:spPr>
+          <a:xfrm>
+            <a:off x="3103123" y="1029807"/>
+            <a:ext cx="1586332" cy="369332"/>
+          </a:xfrm>
+          <a:prstGeom prst="rect">
+            <a:avLst/>
+          </a:prstGeom>
+          <a:noFill/>
+        </p:spPr>
+        <p:txBody>
+          <a:bodyPr wrap="none" rtlCol="0">
+            <a:spAutoFit/>
+          </a:bodyPr>
+          <a:lstStyle/>
+          <a:p>
+            <a:r>
+              <a:rPr lang="en-US" b="1" dirty="0"/>
+              <a:t>Captures E(T)</a:t>
+            </a:r>
+          </a:p>
+        </p:txBody>
+      </p:sp>
+      <p:sp>
+        <p:nvSpPr>
+          <p:cNvPr id="18" name="Right Brace 17">
+            <a:extLst>
+              <a:ext uri="{FF2B5EF4-FFF2-40B4-BE49-F238E27FC236}">
+                <a16:creationId xmlns:a16="http://schemas.microsoft.com/office/drawing/2014/main" id="{2FB0BB55-51E5-FC9B-BB1A-1C1759A8AB45}"/>
+              </a:ext>
+            </a:extLst>
+          </p:cNvPr>
+          <p:cNvSpPr/>
+          <p:nvPr/>
+        </p:nvSpPr>
+        <p:spPr>
+          <a:xfrm rot="16200000">
+            <a:off x="6245393" y="477012"/>
+            <a:ext cx="291537" cy="2222771"/>
+          </a:xfrm>
+          <a:prstGeom prst="rightBrace">
+            <a:avLst/>
+          </a:prstGeom>
+        </p:spPr>
+        <p:style>
+          <a:lnRef idx="2">
+            <a:schemeClr val="accent1"/>
+          </a:lnRef>
+          <a:fillRef idx="0">
+            <a:schemeClr val="accent1"/>
+          </a:fillRef>
+          <a:effectRef idx="1">
+            <a:schemeClr val="accent1"/>
+          </a:effectRef>
+          <a:fontRef idx="minor">
+            <a:schemeClr val="tx1"/>
+          </a:fontRef>
+        </p:style>
+        <p:txBody>
+          <a:bodyPr rtlCol="0" anchor="ctr"/>
+          <a:lstStyle/>
+          <a:p>
+            <a:pPr algn="ctr"/>
+            <a:endParaRPr lang="en-US"/>
+          </a:p>
+        </p:txBody>
+      </p:sp>
+      <p:sp>
+        <p:nvSpPr>
+          <p:cNvPr id="19" name="TextBox 18">
+            <a:extLst>
+              <a:ext uri="{FF2B5EF4-FFF2-40B4-BE49-F238E27FC236}">
+                <a16:creationId xmlns:a16="http://schemas.microsoft.com/office/drawing/2014/main" id="{9ABF8393-334A-C96E-98D3-409900BC09E6}"/>
+              </a:ext>
+            </a:extLst>
+          </p:cNvPr>
+          <p:cNvSpPr txBox="1"/>
+          <p:nvPr/>
+        </p:nvSpPr>
+        <p:spPr>
+          <a:xfrm>
+            <a:off x="5576470" y="972501"/>
+            <a:ext cx="1586332" cy="369332"/>
+          </a:xfrm>
+          <a:prstGeom prst="rect">
+            <a:avLst/>
+          </a:prstGeom>
+          <a:noFill/>
+        </p:spPr>
+        <p:txBody>
+          <a:bodyPr wrap="none" rtlCol="0">
+            <a:spAutoFit/>
+          </a:bodyPr>
+          <a:lstStyle/>
+          <a:p>
+            <a:r>
+              <a:rPr lang="en-US" b="1" dirty="0"/>
+              <a:t>Captures Y(T)</a:t>
+            </a:r>
+          </a:p>
+        </p:txBody>
+      </p:sp>
+      <p:sp>
+        <p:nvSpPr>
+          <p:cNvPr id="20" name="Right Brace 19">
+            <a:extLst>
+              <a:ext uri="{FF2B5EF4-FFF2-40B4-BE49-F238E27FC236}">
+                <a16:creationId xmlns:a16="http://schemas.microsoft.com/office/drawing/2014/main" id="{C37343C6-A368-01AD-493B-D27ACAA88BE5}"/>
+              </a:ext>
+            </a:extLst>
+          </p:cNvPr>
+          <p:cNvSpPr/>
+          <p:nvPr/>
+        </p:nvSpPr>
+        <p:spPr>
+          <a:xfrm rot="16200000">
+            <a:off x="8667608" y="435857"/>
+            <a:ext cx="291537" cy="2222771"/>
+          </a:xfrm>
+          <a:prstGeom prst="rightBrace">
+            <a:avLst/>
+          </a:prstGeom>
+        </p:spPr>
+        <p:style>
+          <a:lnRef idx="2">
+            <a:schemeClr val="accent1"/>
+          </a:lnRef>
+          <a:fillRef idx="0">
+            <a:schemeClr val="accent1"/>
+          </a:fillRef>
+          <a:effectRef idx="1">
+            <a:schemeClr val="accent1"/>
+          </a:effectRef>
+          <a:fontRef idx="minor">
+            <a:schemeClr val="tx1"/>
+          </a:fontRef>
+        </p:style>
+        <p:txBody>
+          <a:bodyPr rtlCol="0" anchor="ctr"/>
+          <a:lstStyle/>
+          <a:p>
+            <a:pPr algn="ctr"/>
+            <a:endParaRPr lang="en-US"/>
+          </a:p>
+        </p:txBody>
+      </p:sp>
+      <p:sp>
+        <p:nvSpPr>
+          <p:cNvPr id="21" name="TextBox 20">
+            <a:extLst>
+              <a:ext uri="{FF2B5EF4-FFF2-40B4-BE49-F238E27FC236}">
+                <a16:creationId xmlns:a16="http://schemas.microsoft.com/office/drawing/2014/main" id="{BC5D70B3-4D0B-B99D-D6C8-D31495338AB5}"/>
+              </a:ext>
+            </a:extLst>
+          </p:cNvPr>
+          <p:cNvSpPr txBox="1"/>
+          <p:nvPr/>
+        </p:nvSpPr>
+        <p:spPr>
+          <a:xfrm>
+            <a:off x="8020210" y="914833"/>
+            <a:ext cx="1586332" cy="369332"/>
+          </a:xfrm>
+          <a:prstGeom prst="rect">
+            <a:avLst/>
+          </a:prstGeom>
+          <a:noFill/>
+        </p:spPr>
+        <p:txBody>
+          <a:bodyPr wrap="none" rtlCol="0">
+            <a:spAutoFit/>
+          </a:bodyPr>
+          <a:lstStyle/>
+          <a:p>
+            <a:r>
+              <a:rPr lang="en-US" b="1" dirty="0"/>
+              <a:t>Captures K(T)</a:t>
+            </a:r>
+          </a:p>
+        </p:txBody>
+      </p:sp>
+      <p:sp>
+        <p:nvSpPr>
+          <p:cNvPr id="22" name="TextBox 21">
+            <a:extLst>
+              <a:ext uri="{FF2B5EF4-FFF2-40B4-BE49-F238E27FC236}">
+                <a16:creationId xmlns:a16="http://schemas.microsoft.com/office/drawing/2014/main" id="{D3F60A53-8E79-A4A0-F47E-0846BF567619}"/>
+              </a:ext>
+            </a:extLst>
+          </p:cNvPr>
+          <p:cNvSpPr txBox="1"/>
+          <p:nvPr/>
+        </p:nvSpPr>
+        <p:spPr>
+          <a:xfrm>
+            <a:off x="9996303" y="999372"/>
+            <a:ext cx="1196398" cy="646331"/>
+          </a:xfrm>
+          <a:prstGeom prst="rect">
+            <a:avLst/>
+          </a:prstGeom>
+          <a:noFill/>
+        </p:spPr>
+        <p:txBody>
+          <a:bodyPr wrap="square" rtlCol="0">
+            <a:spAutoFit/>
+          </a:bodyPr>
+          <a:lstStyle/>
+          <a:p>
+            <a:pPr algn="ctr"/>
+            <a:r>
+              <a:rPr lang="en-US" b="1" dirty="0"/>
+              <a:t>Max use temp</a:t>
+            </a:r>
+          </a:p>
+        </p:txBody>
+      </p:sp>
+      <p:pic>
+        <p:nvPicPr>
+          <p:cNvPr id="24" name="Picture 23">
+            <a:extLst>
+              <a:ext uri="{FF2B5EF4-FFF2-40B4-BE49-F238E27FC236}">
+                <a16:creationId xmlns:a16="http://schemas.microsoft.com/office/drawing/2014/main" id="{7B9ECC18-B429-B495-CA1D-C7E9E77E2B2A}"/>
+              </a:ext>
+            </a:extLst>
+          </p:cNvPr>
+          <p:cNvPicPr>
+            <a:picLocks noChangeAspect="1"/>
+          </p:cNvPicPr>
+          <p:nvPr/>
+        </p:nvPicPr>
+        <p:blipFill>
+          <a:blip r:embed="rId4"/>
+          <a:stretch>
+            <a:fillRect/>
+          </a:stretch>
+        </p:blipFill>
+        <p:spPr>
+          <a:xfrm>
+            <a:off x="8027544" y="3107978"/>
+            <a:ext cx="4031489" cy="3033662"/>
+          </a:xfrm>
+          <a:prstGeom prst="rect">
+            <a:avLst/>
+          </a:prstGeom>
+        </p:spPr>
+      </p:pic>
+      <p:pic>
+        <p:nvPicPr>
+          <p:cNvPr id="4" name="Picture 3">
+            <a:extLst>
+              <a:ext uri="{FF2B5EF4-FFF2-40B4-BE49-F238E27FC236}">
+                <a16:creationId xmlns:a16="http://schemas.microsoft.com/office/drawing/2014/main" id="{2722B7A2-53FF-844F-92BB-8CE1AFACBFAB}"/>
+              </a:ext>
+            </a:extLst>
+          </p:cNvPr>
+          <p:cNvPicPr>
+            <a:picLocks noChangeAspect="1"/>
+          </p:cNvPicPr>
+          <p:nvPr/>
+        </p:nvPicPr>
+        <p:blipFill>
+          <a:blip r:embed="rId5"/>
+          <a:stretch>
+            <a:fillRect/>
+          </a:stretch>
+        </p:blipFill>
+        <p:spPr>
+          <a:xfrm>
+            <a:off x="3886109" y="3069829"/>
+            <a:ext cx="4163357" cy="3166809"/>
+          </a:xfrm>
+          <a:prstGeom prst="rect">
+            <a:avLst/>
+          </a:prstGeom>
+        </p:spPr>
+      </p:pic>
+      <p:pic>
+        <p:nvPicPr>
+          <p:cNvPr id="7" name="Picture 6">
+            <a:extLst>
+              <a:ext uri="{FF2B5EF4-FFF2-40B4-BE49-F238E27FC236}">
+                <a16:creationId xmlns:a16="http://schemas.microsoft.com/office/drawing/2014/main" id="{F6B30ECE-F9AB-2F82-B564-BF04EC403FCA}"/>
+              </a:ext>
+            </a:extLst>
+          </p:cNvPr>
+          <p:cNvPicPr>
+            <a:picLocks noChangeAspect="1"/>
+          </p:cNvPicPr>
+          <p:nvPr/>
+        </p:nvPicPr>
+        <p:blipFill>
+          <a:blip r:embed="rId6"/>
+          <a:stretch>
+            <a:fillRect/>
+          </a:stretch>
+        </p:blipFill>
+        <p:spPr>
+          <a:xfrm>
+            <a:off x="-63501" y="1829317"/>
+            <a:ext cx="12192000" cy="990683"/>
+          </a:xfrm>
+          <a:prstGeom prst="rect">
+            <a:avLst/>
+          </a:prstGeom>
+        </p:spPr>
+      </p:pic>
+      <p:sp>
+        <p:nvSpPr>
+          <p:cNvPr id="10" name="TextBox 9">
+            <a:extLst>
+              <a:ext uri="{FF2B5EF4-FFF2-40B4-BE49-F238E27FC236}">
+                <a16:creationId xmlns:a16="http://schemas.microsoft.com/office/drawing/2014/main" id="{269E3B27-6150-1276-EF74-EB2A21E941FE}"/>
+              </a:ext>
+            </a:extLst>
+          </p:cNvPr>
+          <p:cNvSpPr txBox="1"/>
+          <p:nvPr/>
+        </p:nvSpPr>
+        <p:spPr>
+          <a:xfrm>
+            <a:off x="1530698" y="2881531"/>
+            <a:ext cx="569387" cy="369332"/>
+          </a:xfrm>
+          <a:prstGeom prst="rect">
+            <a:avLst/>
+          </a:prstGeom>
+          <a:noFill/>
+        </p:spPr>
+        <p:txBody>
+          <a:bodyPr wrap="none" rtlCol="0">
+            <a:spAutoFit/>
+          </a:bodyPr>
+          <a:lstStyle/>
+          <a:p>
+            <a:r>
+              <a:rPr lang="en-US" b="1" dirty="0"/>
+              <a:t>E(T)</a:t>
+            </a:r>
+          </a:p>
+        </p:txBody>
+      </p:sp>
+      <p:sp>
+        <p:nvSpPr>
+          <p:cNvPr id="12" name="TextBox 11">
+            <a:extLst>
+              <a:ext uri="{FF2B5EF4-FFF2-40B4-BE49-F238E27FC236}">
+                <a16:creationId xmlns:a16="http://schemas.microsoft.com/office/drawing/2014/main" id="{AFF2E598-FFCD-DA8C-BF45-D2D7E54D9345}"/>
+              </a:ext>
+            </a:extLst>
+          </p:cNvPr>
+          <p:cNvSpPr txBox="1"/>
+          <p:nvPr/>
+        </p:nvSpPr>
+        <p:spPr>
+          <a:xfrm>
+            <a:off x="5737625" y="2778169"/>
+            <a:ext cx="569387" cy="369332"/>
+          </a:xfrm>
+          <a:prstGeom prst="rect">
+            <a:avLst/>
+          </a:prstGeom>
+          <a:noFill/>
+        </p:spPr>
+        <p:txBody>
+          <a:bodyPr wrap="none" rtlCol="0">
+            <a:spAutoFit/>
+          </a:bodyPr>
+          <a:lstStyle/>
+          <a:p>
+            <a:r>
+              <a:rPr lang="en-US" b="1" dirty="0"/>
+              <a:t>Y(T)</a:t>
+            </a:r>
+          </a:p>
+        </p:txBody>
+      </p:sp>
+      <p:sp>
+        <p:nvSpPr>
+          <p:cNvPr id="13" name="TextBox 12">
+            <a:extLst>
+              <a:ext uri="{FF2B5EF4-FFF2-40B4-BE49-F238E27FC236}">
+                <a16:creationId xmlns:a16="http://schemas.microsoft.com/office/drawing/2014/main" id="{7C0EE723-EA9E-F37D-E9FF-0D923ECCE86D}"/>
+              </a:ext>
+            </a:extLst>
+          </p:cNvPr>
+          <p:cNvSpPr txBox="1"/>
+          <p:nvPr/>
+        </p:nvSpPr>
+        <p:spPr>
+          <a:xfrm>
+            <a:off x="9900982" y="2870257"/>
+            <a:ext cx="580608" cy="369332"/>
+          </a:xfrm>
+          <a:prstGeom prst="rect">
+            <a:avLst/>
+          </a:prstGeom>
+          <a:noFill/>
+        </p:spPr>
+        <p:txBody>
+          <a:bodyPr wrap="none" rtlCol="0">
+            <a:spAutoFit/>
+          </a:bodyPr>
+          <a:lstStyle/>
+          <a:p>
+            <a:r>
+              <a:rPr lang="en-US" b="1" dirty="0"/>
+              <a:t>K(T)</a:t>
+            </a:r>
+          </a:p>
+        </p:txBody>
+      </p:sp>
+      <p:sp>
+        <p:nvSpPr>
+          <p:cNvPr id="2" name="TextBox 1">
+            <a:extLst>
+              <a:ext uri="{FF2B5EF4-FFF2-40B4-BE49-F238E27FC236}">
+                <a16:creationId xmlns:a16="http://schemas.microsoft.com/office/drawing/2014/main" id="{694D32C4-4E52-DEDD-CDB3-D97E03103824}"/>
+              </a:ext>
+            </a:extLst>
+          </p:cNvPr>
+          <p:cNvSpPr txBox="1"/>
+          <p:nvPr/>
+        </p:nvSpPr>
+        <p:spPr>
+          <a:xfrm>
+            <a:off x="222645" y="6213772"/>
+            <a:ext cx="11746709" cy="461665"/>
+          </a:xfrm>
+          <a:prstGeom prst="rect">
+            <a:avLst/>
+          </a:prstGeom>
+          <a:noFill/>
+        </p:spPr>
+        <p:txBody>
+          <a:bodyPr wrap="square" rtlCol="0">
+            <a:spAutoFit/>
+          </a:bodyPr>
+          <a:lstStyle/>
+          <a:p>
+            <a:r>
+              <a:rPr lang="en-US" sz="2400" dirty="0">
+                <a:highlight>
+                  <a:srgbClr val="FFFF00"/>
+                </a:highlight>
+              </a:rPr>
+              <a:t>A steep drop in E and Y dissuades the optimizer from using 7068 Al at high temperatures</a:t>
+            </a:r>
+          </a:p>
+        </p:txBody>
+      </p:sp>
+    </p:spTree>
+    <p:extLst>
+      <p:ext uri="{BB962C8B-B14F-4D97-AF65-F5344CB8AC3E}">
+        <p14:creationId xmlns:p14="http://schemas.microsoft.com/office/powerpoint/2010/main" val="728101808"/>
+      </p:ext>
+    </p:extLst>
+  </p:cSld>
+  <p:clrMapOvr>
+    <a:masterClrMapping/>
+  </p:clrMapOvr>
+</p:sld>
+</file>
+
+<file path=ppt/slides/slide3.xml><?xml version="1.0" encoding="utf-8"?>
+<p:sld xmlns:a="http://schemas.openxmlformats.org/drawingml/2006/main" xmlns:r="http://schemas.openxmlformats.org/officeDocument/2006/relationships" xmlns:p="http://schemas.openxmlformats.org/presentationml/2006/main">
+  <p:cSld>
+    <p:spTree>
+      <p:nvGrpSpPr>
+        <p:cNvPr id="1" name="">
+          <a:extLst>
+            <a:ext uri="{FF2B5EF4-FFF2-40B4-BE49-F238E27FC236}">
+              <a16:creationId xmlns:a16="http://schemas.microsoft.com/office/drawing/2014/main" id="{CFC1559E-5A41-81E3-3708-79648CE5D27C}"/>
+            </a:ext>
+          </a:extLst>
+        </p:cNvPr>
+        <p:cNvGrpSpPr/>
+        <p:nvPr/>
+      </p:nvGrpSpPr>
+      <p:grpSpPr>
+        <a:xfrm>
+          <a:off x="0" y="0"/>
+          <a:ext cx="0" cy="0"/>
+          <a:chOff x="0" y="0"/>
+          <a:chExt cx="0" cy="0"/>
+        </a:xfrm>
+      </p:grpSpPr>
+      <p:sp>
+        <p:nvSpPr>
+          <p:cNvPr id="3" name="Slide Number Placeholder 2">
+            <a:extLst>
+              <a:ext uri="{FF2B5EF4-FFF2-40B4-BE49-F238E27FC236}">
+                <a16:creationId xmlns:a16="http://schemas.microsoft.com/office/drawing/2014/main" id="{209F2DA8-BD79-62E1-04D5-8755ACD3B537}"/>
+              </a:ext>
+            </a:extLst>
+          </p:cNvPr>
+          <p:cNvSpPr>
+            <a:spLocks noGrp="1"/>
+          </p:cNvSpPr>
+          <p:nvPr>
+            <p:ph type="sldNum" sz="quarter" idx="11"/>
+          </p:nvPr>
+        </p:nvSpPr>
+        <p:spPr>
+          <a:xfrm>
+            <a:off x="9222902" y="6492875"/>
+            <a:ext cx="2743200" cy="365125"/>
+          </a:xfrm>
+        </p:spPr>
+        <p:txBody>
+          <a:bodyPr/>
+          <a:lstStyle/>
+          <a:p>
+            <a:pPr>
+              <a:defRPr/>
+            </a:pPr>
+            <a:fld id="{231CC523-8BC6-4921-807A-66BD262F34AB}" type="slidenum">
+              <a:rPr lang="en-US" smtClean="0"/>
+              <a:pPr>
+                <a:defRPr/>
+              </a:pPr>
+              <a:t>3</a:t>
+            </a:fld>
+            <a:endParaRPr lang="en-US"/>
+          </a:p>
+        </p:txBody>
+      </p:sp>
+      <p:sp>
+        <p:nvSpPr>
+          <p:cNvPr id="9" name="Title 8">
+            <a:extLst>
+              <a:ext uri="{FF2B5EF4-FFF2-40B4-BE49-F238E27FC236}">
+                <a16:creationId xmlns:a16="http://schemas.microsoft.com/office/drawing/2014/main" id="{F4B39436-CCB4-D1E2-0C9F-A62C609D48B8}"/>
+              </a:ext>
+            </a:extLst>
+          </p:cNvPr>
+          <p:cNvSpPr>
+            <a:spLocks noGrp="1"/>
+          </p:cNvSpPr>
+          <p:nvPr>
+            <p:ph type="ctrTitle"/>
+          </p:nvPr>
+        </p:nvSpPr>
+        <p:spPr>
+          <a:xfrm>
+            <a:off x="381000" y="126366"/>
+            <a:ext cx="11302999" cy="612648"/>
+          </a:xfrm>
+        </p:spPr>
+        <p:txBody>
+          <a:bodyPr>
+            <a:normAutofit/>
+          </a:bodyPr>
+          <a:lstStyle/>
+          <a:p>
+            <a:r>
+              <a:rPr lang="en-US" dirty="0"/>
+              <a:t>Latent Space Accuracy</a:t>
+            </a:r>
+          </a:p>
+        </p:txBody>
+      </p:sp>
+    </p:spTree>
+    <p:extLst>
+      <p:ext uri="{BB962C8B-B14F-4D97-AF65-F5344CB8AC3E}">
+        <p14:creationId xmlns:p14="http://schemas.microsoft.com/office/powerpoint/2010/main" val="176123675"/>
+      </p:ext>
+    </p:extLst>
+  </p:cSld>
+  <p:clrMapOvr>
+    <a:masterClrMapping/>
+  </p:clrMapOvr>
+</p:sld>
+</file>
+
+<file path=ppt/slides/slide4.xml><?xml version="1.0" encoding="utf-8"?>
+<p:sld xmlns:a="http://schemas.openxmlformats.org/drawingml/2006/main" xmlns:r="http://schemas.openxmlformats.org/officeDocument/2006/relationships" xmlns:p="http://schemas.openxmlformats.org/presentationml/2006/main">
+  <p:cSld>
+    <p:spTree>
+      <p:nvGrpSpPr>
+        <p:cNvPr id="1" name="">
+          <a:extLst>
+            <a:ext uri="{FF2B5EF4-FFF2-40B4-BE49-F238E27FC236}">
+              <a16:creationId xmlns:a16="http://schemas.microsoft.com/office/drawing/2014/main" id="{114382EE-4DD5-AC3C-34AD-39EFBF945E32}"/>
+            </a:ext>
+          </a:extLst>
+        </p:cNvPr>
+        <p:cNvGrpSpPr/>
+        <p:nvPr/>
+      </p:nvGrpSpPr>
+      <p:grpSpPr>
+        <a:xfrm>
+          <a:off x="0" y="0"/>
+          <a:ext cx="0" cy="0"/>
+          <a:chOff x="0" y="0"/>
+          <a:chExt cx="0" cy="0"/>
+        </a:xfrm>
+      </p:grpSpPr>
+      <p:sp>
+        <p:nvSpPr>
+          <p:cNvPr id="3" name="Slide Number Placeholder 2">
+            <a:extLst>
+              <a:ext uri="{FF2B5EF4-FFF2-40B4-BE49-F238E27FC236}">
+                <a16:creationId xmlns:a16="http://schemas.microsoft.com/office/drawing/2014/main" id="{807DE274-243D-0CA6-5AFC-F37C1AC1AB23}"/>
+              </a:ext>
+            </a:extLst>
+          </p:cNvPr>
+          <p:cNvSpPr>
+            <a:spLocks noGrp="1"/>
+          </p:cNvSpPr>
+          <p:nvPr>
+            <p:ph type="sldNum" sz="quarter" idx="11"/>
+          </p:nvPr>
+        </p:nvSpPr>
+        <p:spPr>
+          <a:xfrm>
+            <a:off x="9129175" y="5613199"/>
+            <a:ext cx="2743200" cy="365125"/>
+          </a:xfrm>
+        </p:spPr>
+        <p:txBody>
+          <a:bodyPr/>
+          <a:lstStyle/>
+          <a:p>
+            <a:pPr>
+              <a:defRPr/>
+            </a:pPr>
+            <a:fld id="{231CC523-8BC6-4921-807A-66BD262F34AB}" type="slidenum">
+              <a:rPr lang="en-US" smtClean="0"/>
+              <a:pPr>
+                <a:defRPr/>
+              </a:pPr>
+              <a:t>4</a:t>
+            </a:fld>
+            <a:endParaRPr lang="en-US"/>
+          </a:p>
+        </p:txBody>
+      </p:sp>
+      <p:sp>
+        <p:nvSpPr>
+          <p:cNvPr id="9" name="Title 8">
+            <a:extLst>
+              <a:ext uri="{FF2B5EF4-FFF2-40B4-BE49-F238E27FC236}">
+                <a16:creationId xmlns:a16="http://schemas.microsoft.com/office/drawing/2014/main" id="{EEBC48CA-9DFD-1F0A-F5DF-5365B2644CFB}"/>
+              </a:ext>
+            </a:extLst>
+          </p:cNvPr>
+          <p:cNvSpPr>
+            <a:spLocks noGrp="1"/>
+          </p:cNvSpPr>
+          <p:nvPr>
+            <p:ph type="ctrTitle"/>
+          </p:nvPr>
+        </p:nvSpPr>
+        <p:spPr>
+          <a:xfrm>
+            <a:off x="381000" y="126366"/>
+            <a:ext cx="11302999" cy="612648"/>
+          </a:xfrm>
+        </p:spPr>
+        <p:txBody>
+          <a:bodyPr>
+            <a:normAutofit/>
+          </a:bodyPr>
+          <a:lstStyle/>
+          <a:p>
+            <a:r>
+              <a:rPr lang="en-US" dirty="0"/>
+              <a:t>Sample Latent Spaces</a:t>
+            </a:r>
+          </a:p>
+        </p:txBody>
+      </p:sp>
+      <p:pic>
+        <p:nvPicPr>
+          <p:cNvPr id="5" name="Picture 4">
+            <a:extLst>
+              <a:ext uri="{FF2B5EF4-FFF2-40B4-BE49-F238E27FC236}">
+                <a16:creationId xmlns:a16="http://schemas.microsoft.com/office/drawing/2014/main" id="{2D2E8DE8-EF3A-D09D-520F-91EFB053D7A4}"/>
+              </a:ext>
+            </a:extLst>
+          </p:cNvPr>
+          <p:cNvPicPr>
+            <a:picLocks noChangeAspect="1"/>
+          </p:cNvPicPr>
+          <p:nvPr/>
+        </p:nvPicPr>
+        <p:blipFill>
+          <a:blip r:embed="rId2"/>
+          <a:stretch>
+            <a:fillRect/>
+          </a:stretch>
+        </p:blipFill>
+        <p:spPr>
+          <a:xfrm>
+            <a:off x="381000" y="1401335"/>
+            <a:ext cx="5557772" cy="4576989"/>
+          </a:xfrm>
+          <a:prstGeom prst="rect">
+            <a:avLst/>
+          </a:prstGeom>
+        </p:spPr>
+      </p:pic>
+      <p:sp>
+        <p:nvSpPr>
+          <p:cNvPr id="6" name="TextBox 5">
+            <a:extLst>
+              <a:ext uri="{FF2B5EF4-FFF2-40B4-BE49-F238E27FC236}">
+                <a16:creationId xmlns:a16="http://schemas.microsoft.com/office/drawing/2014/main" id="{259D887D-872F-9BE8-3502-B1C72D872558}"/>
+              </a:ext>
+            </a:extLst>
+          </p:cNvPr>
+          <p:cNvSpPr txBox="1"/>
+          <p:nvPr/>
+        </p:nvSpPr>
+        <p:spPr>
+          <a:xfrm>
+            <a:off x="1909241" y="984307"/>
+            <a:ext cx="2422715" cy="461665"/>
+          </a:xfrm>
+          <a:prstGeom prst="rect">
+            <a:avLst/>
+          </a:prstGeom>
+          <a:noFill/>
+        </p:spPr>
+        <p:txBody>
+          <a:bodyPr wrap="none" rtlCol="0">
+            <a:spAutoFit/>
+          </a:bodyPr>
+          <a:lstStyle/>
+          <a:p>
+            <a:r>
+              <a:rPr lang="en-US" sz="2400" b="1" dirty="0"/>
+              <a:t>E0 Latent Space</a:t>
+            </a:r>
+          </a:p>
+        </p:txBody>
+      </p:sp>
+      <p:pic>
+        <p:nvPicPr>
+          <p:cNvPr id="12" name="Picture 11">
+            <a:extLst>
+              <a:ext uri="{FF2B5EF4-FFF2-40B4-BE49-F238E27FC236}">
+                <a16:creationId xmlns:a16="http://schemas.microsoft.com/office/drawing/2014/main" id="{62D43E05-388B-66E1-AAC3-F9CC778EC4A4}"/>
+              </a:ext>
+            </a:extLst>
+          </p:cNvPr>
+          <p:cNvPicPr>
+            <a:picLocks noChangeAspect="1"/>
+          </p:cNvPicPr>
+          <p:nvPr/>
+        </p:nvPicPr>
+        <p:blipFill>
+          <a:blip r:embed="rId3"/>
+          <a:stretch>
+            <a:fillRect/>
+          </a:stretch>
+        </p:blipFill>
+        <p:spPr>
+          <a:xfrm>
+            <a:off x="6305924" y="1401334"/>
+            <a:ext cx="5646502" cy="4576989"/>
+          </a:xfrm>
+          <a:prstGeom prst="rect">
+            <a:avLst/>
+          </a:prstGeom>
+        </p:spPr>
+      </p:pic>
+      <p:sp>
+        <p:nvSpPr>
+          <p:cNvPr id="13" name="TextBox 12">
+            <a:extLst>
+              <a:ext uri="{FF2B5EF4-FFF2-40B4-BE49-F238E27FC236}">
+                <a16:creationId xmlns:a16="http://schemas.microsoft.com/office/drawing/2014/main" id="{2B251CDC-CC67-8B66-AEDE-74E6B29C8127}"/>
+              </a:ext>
+            </a:extLst>
+          </p:cNvPr>
+          <p:cNvSpPr txBox="1"/>
+          <p:nvPr/>
+        </p:nvSpPr>
+        <p:spPr>
+          <a:xfrm>
+            <a:off x="7672590" y="967775"/>
+            <a:ext cx="2422715" cy="461665"/>
+          </a:xfrm>
+          <a:prstGeom prst="rect">
+            <a:avLst/>
+          </a:prstGeom>
+          <a:noFill/>
+        </p:spPr>
+        <p:txBody>
+          <a:bodyPr wrap="none" rtlCol="0">
+            <a:spAutoFit/>
+          </a:bodyPr>
+          <a:lstStyle/>
+          <a:p>
+            <a:r>
+              <a:rPr lang="en-US" sz="2400" b="1" dirty="0"/>
+              <a:t>E1 Latent Space</a:t>
+            </a:r>
+          </a:p>
+        </p:txBody>
+      </p:sp>
+    </p:spTree>
+    <p:extLst>
+      <p:ext uri="{BB962C8B-B14F-4D97-AF65-F5344CB8AC3E}">
+        <p14:creationId xmlns:p14="http://schemas.microsoft.com/office/powerpoint/2010/main" val="1096257750"/>
+      </p:ext>
+    </p:extLst>
+  </p:cSld>
+  <p:clrMapOvr>
+    <a:masterClrMapping/>
+  </p:clrMapOvr>
+</p:sld>
+</file>
+
+<file path=ppt/slides/slide5.xml><?xml version="1.0" encoding="utf-8"?>
+<p:sld xmlns:a="http://schemas.openxmlformats.org/drawingml/2006/main" xmlns:r="http://schemas.openxmlformats.org/officeDocument/2006/relationships" xmlns:p="http://schemas.openxmlformats.org/presentationml/2006/main">
+  <p:cSld>
+    <p:spTree>
+      <p:nvGrpSpPr>
+        <p:cNvPr id="1" name="">
+          <a:extLst>
+            <a:ext uri="{FF2B5EF4-FFF2-40B4-BE49-F238E27FC236}">
               <a16:creationId xmlns:a16="http://schemas.microsoft.com/office/drawing/2014/main" id="{8AA82AB9-3C4F-7EE5-5414-906B0218480D}"/>
             </a:ext>
           </a:extLst>
@@ -4032,7 +7665,7 @@
               <a:pPr>
                 <a:defRPr/>
               </a:pPr>
-              <a:t>1</a:t>
+              <a:t>5</a:t>
             </a:fld>
             <a:endParaRPr lang="en-US"/>
           </a:p>
@@ -4087,7 +7720,7 @@
         </p:nvSpPr>
         <p:spPr>
           <a:xfrm>
-            <a:off x="381000" y="1289431"/>
+            <a:off x="381000" y="1104606"/>
             <a:ext cx="8052071" cy="286360"/>
           </a:xfrm>
           <a:prstGeom prst="rect">
@@ -4147,12 +7780,51 @@
           </a:p>
         </p:txBody>
       </p:sp>
+      <p:sp>
+        <p:nvSpPr>
+          <p:cNvPr id="26" name="TextBox 25">
+            <a:extLst>
+              <a:ext uri="{FF2B5EF4-FFF2-40B4-BE49-F238E27FC236}">
+                <a16:creationId xmlns:a16="http://schemas.microsoft.com/office/drawing/2014/main" id="{29A76F48-6B0E-BF15-85D6-79D1575DE589}"/>
+              </a:ext>
+            </a:extLst>
+          </p:cNvPr>
+          <p:cNvSpPr txBox="1"/>
+          <p:nvPr/>
+        </p:nvSpPr>
+        <p:spPr>
+          <a:xfrm>
+            <a:off x="381000" y="1368141"/>
+            <a:ext cx="6515181" cy="369332"/>
+          </a:xfrm>
+          <a:prstGeom prst="rect">
+            <a:avLst/>
+          </a:prstGeom>
+          <a:noFill/>
+        </p:spPr>
+        <p:txBody>
+          <a:bodyPr wrap="none" rtlCol="0">
+            <a:spAutoFit/>
+          </a:bodyPr>
+          <a:lstStyle/>
+          <a:p>
+            <a:r>
+              <a:rPr lang="en-US" dirty="0">
+                <a:highlight>
+                  <a:srgbClr val="FFFF00"/>
+                </a:highlight>
+              </a:rPr>
+              <a:t>Linear thermal (i.e., conductivity is assumed to be constant = K0)</a:t>
+            </a:r>
+          </a:p>
+        </p:txBody>
+      </p:sp>
       <p:pic>
         <p:nvPicPr>
-          <p:cNvPr id="19" name="Picture 18">
-            <a:extLst>
-              <a:ext uri="{FF2B5EF4-FFF2-40B4-BE49-F238E27FC236}">
-                <a16:creationId xmlns:a16="http://schemas.microsoft.com/office/drawing/2014/main" id="{E6903D71-577A-2FD7-E796-E0080C46A8CF}"/>
+          <p:cNvPr id="12" name="Picture 11">
+            <a:extLst>
+              <a:ext uri="{FF2B5EF4-FFF2-40B4-BE49-F238E27FC236}">
+                <a16:creationId xmlns:a16="http://schemas.microsoft.com/office/drawing/2014/main" id="{796B5933-0563-6313-25EC-F1F1DC93AA59}"/>
               </a:ext>
             </a:extLst>
           </p:cNvPr>
@@ -4169,8 +7841,8 @@
         </p:blipFill>
         <p:spPr>
           <a:xfrm>
-            <a:off x="4200000" y="1713360"/>
-            <a:ext cx="4133333" cy="2847619"/>
+            <a:off x="8830370" y="4737244"/>
+            <a:ext cx="2743200" cy="2030979"/>
           </a:xfrm>
           <a:prstGeom prst="rect">
             <a:avLst/>
@@ -4179,10 +7851,10 @@
       </p:pic>
       <p:pic>
         <p:nvPicPr>
-          <p:cNvPr id="21" name="Picture 20">
-            <a:extLst>
-              <a:ext uri="{FF2B5EF4-FFF2-40B4-BE49-F238E27FC236}">
-                <a16:creationId xmlns:a16="http://schemas.microsoft.com/office/drawing/2014/main" id="{B5D1D6F0-F313-B60E-C348-795E23C266CA}"/>
+          <p:cNvPr id="16" name="Picture 15">
+            <a:extLst>
+              <a:ext uri="{FF2B5EF4-FFF2-40B4-BE49-F238E27FC236}">
+                <a16:creationId xmlns:a16="http://schemas.microsoft.com/office/drawing/2014/main" id="{FCB43CEA-93F3-A280-0660-1EB86E69544D}"/>
               </a:ext>
             </a:extLst>
           </p:cNvPr>
@@ -4199,8 +7871,8 @@
         </p:blipFill>
         <p:spPr>
           <a:xfrm>
-            <a:off x="508001" y="5411206"/>
-            <a:ext cx="5076190" cy="1019048"/>
+            <a:off x="4619187" y="1961714"/>
+            <a:ext cx="3214921" cy="2352381"/>
           </a:xfrm>
           <a:prstGeom prst="rect">
             <a:avLst/>
@@ -4209,10 +7881,10 @@
       </p:pic>
       <p:pic>
         <p:nvPicPr>
-          <p:cNvPr id="23" name="Picture 22">
-            <a:extLst>
-              <a:ext uri="{FF2B5EF4-FFF2-40B4-BE49-F238E27FC236}">
-                <a16:creationId xmlns:a16="http://schemas.microsoft.com/office/drawing/2014/main" id="{4A577D1D-A717-7D68-D1FB-1D002E74F73E}"/>
+          <p:cNvPr id="18" name="Picture 17">
+            <a:extLst>
+              <a:ext uri="{FF2B5EF4-FFF2-40B4-BE49-F238E27FC236}">
+                <a16:creationId xmlns:a16="http://schemas.microsoft.com/office/drawing/2014/main" id="{FF40E77D-07BD-0483-F644-37F7F16352F1}"/>
               </a:ext>
             </a:extLst>
           </p:cNvPr>
@@ -4229,8 +7901,8 @@
         </p:blipFill>
         <p:spPr>
           <a:xfrm>
-            <a:off x="0" y="1764905"/>
-            <a:ext cx="4200000" cy="2809524"/>
+            <a:off x="819300" y="1961714"/>
+            <a:ext cx="3293620" cy="2529683"/>
           </a:xfrm>
           <a:prstGeom prst="rect">
             <a:avLst/>
@@ -4239,10 +7911,10 @@
       </p:pic>
       <p:pic>
         <p:nvPicPr>
-          <p:cNvPr id="25" name="Picture 24">
-            <a:extLst>
-              <a:ext uri="{FF2B5EF4-FFF2-40B4-BE49-F238E27FC236}">
-                <a16:creationId xmlns:a16="http://schemas.microsoft.com/office/drawing/2014/main" id="{0BAA4E31-4AB7-B47B-0CCA-EE138BF66291}"/>
+          <p:cNvPr id="22" name="Picture 21">
+            <a:extLst>
+              <a:ext uri="{FF2B5EF4-FFF2-40B4-BE49-F238E27FC236}">
+                <a16:creationId xmlns:a16="http://schemas.microsoft.com/office/drawing/2014/main" id="{7220A3F1-8DB0-098B-2690-BF138F335487}"/>
               </a:ext>
             </a:extLst>
           </p:cNvPr>
@@ -4259,8 +7931,8 @@
         </p:blipFill>
         <p:spPr>
           <a:xfrm>
-            <a:off x="8293138" y="1532017"/>
-            <a:ext cx="3866436" cy="2847620"/>
+            <a:off x="381000" y="4795570"/>
+            <a:ext cx="4385553" cy="957164"/>
           </a:xfrm>
           <a:prstGeom prst="rect">
             <a:avLst/>
@@ -4269,10 +7941,10 @@
       </p:pic>
       <p:sp>
         <p:nvSpPr>
-          <p:cNvPr id="26" name="TextBox 25">
-            <a:extLst>
-              <a:ext uri="{FF2B5EF4-FFF2-40B4-BE49-F238E27FC236}">
-                <a16:creationId xmlns:a16="http://schemas.microsoft.com/office/drawing/2014/main" id="{29A76F48-6B0E-BF15-85D6-79D1575DE589}"/>
+          <p:cNvPr id="24" name="TextBox 23">
+            <a:extLst>
+              <a:ext uri="{FF2B5EF4-FFF2-40B4-BE49-F238E27FC236}">
+                <a16:creationId xmlns:a16="http://schemas.microsoft.com/office/drawing/2014/main" id="{F4DD3BB6-6D16-E781-8AD2-DA5228FB212E}"/>
               </a:ext>
             </a:extLst>
           </p:cNvPr>
@@ -4281,8 +7953,8 @@
         </p:nvSpPr>
         <p:spPr>
           <a:xfrm>
-            <a:off x="7412477" y="5107021"/>
-            <a:ext cx="3759171" cy="369332"/>
+            <a:off x="5155791" y="4938227"/>
+            <a:ext cx="2038210" cy="671849"/>
           </a:xfrm>
           <a:prstGeom prst="rect">
             <a:avLst/>
@@ -4290,7 +7962,7 @@
           <a:noFill/>
         </p:spPr>
         <p:txBody>
-          <a:bodyPr wrap="none" rtlCol="0">
+          <a:bodyPr wrap="square" rtlCol="0">
             <a:spAutoFit/>
           </a:bodyPr>
           <a:lstStyle/>
@@ -4301,7 +7973,7 @@
                   <a:srgbClr val="FFFF00"/>
                 </a:highlight>
               </a:rPr>
-              <a:t>Linear (i.e., conductivity is constant)</a:t>
+              <a:t>0 elements exceed temperature limit</a:t>
             </a:r>
           </a:p>
         </p:txBody>
@@ -4319,7 +7991,7 @@
 </p:sld>
 </file>
 
-<file path=ppt/slides/slide2.xml><?xml version="1.0" encoding="utf-8"?>
+<file path=ppt/slides/slide6.xml><?xml version="1.0" encoding="utf-8"?>
 <p:sld xmlns:a="http://schemas.openxmlformats.org/drawingml/2006/main" xmlns:r="http://schemas.openxmlformats.org/officeDocument/2006/relationships" xmlns:p="http://schemas.openxmlformats.org/presentationml/2006/main">
   <p:cSld>
     <p:spTree>
@@ -4376,7 +8048,7 @@
               <a:pPr>
                 <a:defRPr/>
               </a:pPr>
-              <a:t>2</a:t>
+              <a:t>6</a:t>
             </a:fld>
             <a:endParaRPr lang="en-US"/>
           </a:p>
@@ -4431,7 +8103,7 @@
         </p:nvSpPr>
         <p:spPr>
           <a:xfrm>
-            <a:off x="381000" y="1289431"/>
+            <a:off x="381000" y="1025481"/>
             <a:ext cx="8052071" cy="286360"/>
           </a:xfrm>
           <a:prstGeom prst="rect">
@@ -4493,10 +8165,10 @@
       </p:sp>
       <p:sp>
         <p:nvSpPr>
-          <p:cNvPr id="26" name="TextBox 25">
-            <a:extLst>
-              <a:ext uri="{FF2B5EF4-FFF2-40B4-BE49-F238E27FC236}">
-                <a16:creationId xmlns:a16="http://schemas.microsoft.com/office/drawing/2014/main" id="{7554FC13-3FF8-2CA3-8881-32656250B4D9}"/>
+          <p:cNvPr id="2" name="TextBox 1">
+            <a:extLst>
+              <a:ext uri="{FF2B5EF4-FFF2-40B4-BE49-F238E27FC236}">
+                <a16:creationId xmlns:a16="http://schemas.microsoft.com/office/drawing/2014/main" id="{83436832-3398-91A7-55C7-B41E1A8105CA}"/>
               </a:ext>
             </a:extLst>
           </p:cNvPr>
@@ -4505,8 +8177,8 @@
         </p:nvSpPr>
         <p:spPr>
           <a:xfrm>
-            <a:off x="7023371" y="5411206"/>
-            <a:ext cx="4965718" cy="369332"/>
+            <a:off x="381000" y="1410012"/>
+            <a:ext cx="6270563" cy="369332"/>
           </a:xfrm>
           <a:prstGeom prst="rect">
             <a:avLst/>
@@ -4525,17 +8197,17 @@
                   <a:srgbClr val="FFFF00"/>
                 </a:highlight>
               </a:rPr>
-              <a:t>Non-linear (i.e., conductivity is temp dependent)</a:t>
+              <a:t>Non-Linear thermal (i.e., conductivity is also temp dependent)</a:t>
             </a:r>
           </a:p>
         </p:txBody>
       </p:sp>
       <p:pic>
         <p:nvPicPr>
-          <p:cNvPr id="4" name="Picture 3">
-            <a:extLst>
-              <a:ext uri="{FF2B5EF4-FFF2-40B4-BE49-F238E27FC236}">
-                <a16:creationId xmlns:a16="http://schemas.microsoft.com/office/drawing/2014/main" id="{AEEA349C-2643-D655-3B0D-8DE84B14B0C1}"/>
+          <p:cNvPr id="7" name="Picture 6">
+            <a:extLst>
+              <a:ext uri="{FF2B5EF4-FFF2-40B4-BE49-F238E27FC236}">
+                <a16:creationId xmlns:a16="http://schemas.microsoft.com/office/drawing/2014/main" id="{195E4870-5E88-1C40-8FEF-63CCE119DD46}"/>
               </a:ext>
             </a:extLst>
           </p:cNvPr>
@@ -4552,8 +8224,8 @@
         </p:blipFill>
         <p:spPr>
           <a:xfrm>
-            <a:off x="4772954" y="1941116"/>
-            <a:ext cx="3219048" cy="2314286"/>
+            <a:off x="4875101" y="2060472"/>
+            <a:ext cx="3628571" cy="2266667"/>
           </a:xfrm>
           <a:prstGeom prst="rect">
             <a:avLst/>
@@ -4562,10 +8234,10 @@
       </p:pic>
       <p:pic>
         <p:nvPicPr>
-          <p:cNvPr id="10" name="Picture 9">
-            <a:extLst>
-              <a:ext uri="{FF2B5EF4-FFF2-40B4-BE49-F238E27FC236}">
-                <a16:creationId xmlns:a16="http://schemas.microsoft.com/office/drawing/2014/main" id="{5CF31BD9-2426-B7F1-7AE6-351767D0DFAB}"/>
+          <p:cNvPr id="11" name="Picture 10">
+            <a:extLst>
+              <a:ext uri="{FF2B5EF4-FFF2-40B4-BE49-F238E27FC236}">
+                <a16:creationId xmlns:a16="http://schemas.microsoft.com/office/drawing/2014/main" id="{932ED7E6-D958-5901-1F0C-79937CE09062}"/>
               </a:ext>
             </a:extLst>
           </p:cNvPr>
@@ -4582,20 +8254,98 @@
         </p:blipFill>
         <p:spPr>
           <a:xfrm>
-            <a:off x="637177" y="2093497"/>
-            <a:ext cx="3485714" cy="2161905"/>
+            <a:off x="258189" y="5078657"/>
+            <a:ext cx="4885714" cy="1114286"/>
           </a:xfrm>
           <a:prstGeom prst="rect">
             <a:avLst/>
           </a:prstGeom>
         </p:spPr>
       </p:pic>
+      <p:sp>
+        <p:nvSpPr>
+          <p:cNvPr id="13" name="TextBox 12">
+            <a:extLst>
+              <a:ext uri="{FF2B5EF4-FFF2-40B4-BE49-F238E27FC236}">
+                <a16:creationId xmlns:a16="http://schemas.microsoft.com/office/drawing/2014/main" id="{85B34008-87E6-092F-C64D-D801468B6FA8}"/>
+              </a:ext>
+            </a:extLst>
+          </p:cNvPr>
+          <p:cNvSpPr txBox="1"/>
+          <p:nvPr/>
+        </p:nvSpPr>
+        <p:spPr>
+          <a:xfrm>
+            <a:off x="167178" y="6362302"/>
+            <a:ext cx="4523098" cy="369332"/>
+          </a:xfrm>
+          <a:prstGeom prst="rect">
+            <a:avLst/>
+          </a:prstGeom>
+          <a:noFill/>
+        </p:spPr>
+        <p:txBody>
+          <a:bodyPr wrap="none" rtlCol="0">
+            <a:spAutoFit/>
+          </a:bodyPr>
+          <a:lstStyle/>
+          <a:p>
+            <a:r>
+              <a:rPr lang="en-US" dirty="0">
+                <a:highlight>
+                  <a:srgbClr val="FFFF00"/>
+                </a:highlight>
+              </a:rPr>
+              <a:t>Non-linear adds 30% to computational time</a:t>
+            </a:r>
+          </a:p>
+        </p:txBody>
+      </p:sp>
+      <p:sp>
+        <p:nvSpPr>
+          <p:cNvPr id="15" name="TextBox 14">
+            <a:extLst>
+              <a:ext uri="{FF2B5EF4-FFF2-40B4-BE49-F238E27FC236}">
+                <a16:creationId xmlns:a16="http://schemas.microsoft.com/office/drawing/2014/main" id="{669FE24F-0B15-1941-28E3-0A8C630FD278}"/>
+              </a:ext>
+            </a:extLst>
+          </p:cNvPr>
+          <p:cNvSpPr txBox="1"/>
+          <p:nvPr/>
+        </p:nvSpPr>
+        <p:spPr>
+          <a:xfrm>
+            <a:off x="5580432" y="4989469"/>
+            <a:ext cx="2217907" cy="646331"/>
+          </a:xfrm>
+          <a:prstGeom prst="rect">
+            <a:avLst/>
+          </a:prstGeom>
+          <a:noFill/>
+        </p:spPr>
+        <p:txBody>
+          <a:bodyPr wrap="square" rtlCol="0">
+            <a:spAutoFit/>
+          </a:bodyPr>
+          <a:lstStyle/>
+          <a:p>
+            <a:r>
+              <a:rPr lang="en-US" dirty="0">
+                <a:highlight>
+                  <a:srgbClr val="FFFF00"/>
+                </a:highlight>
+              </a:rPr>
+              <a:t>0 elements exceed temperature limit</a:t>
+            </a:r>
+          </a:p>
+        </p:txBody>
+      </p:sp>
       <p:pic>
         <p:nvPicPr>
-          <p:cNvPr id="12" name="Picture 11">
-            <a:extLst>
-              <a:ext uri="{FF2B5EF4-FFF2-40B4-BE49-F238E27FC236}">
-                <a16:creationId xmlns:a16="http://schemas.microsoft.com/office/drawing/2014/main" id="{113C88D1-B04F-0DFC-FDEC-D6914115F11F}"/>
+          <p:cNvPr id="17" name="Picture 16">
+            <a:extLst>
+              <a:ext uri="{FF2B5EF4-FFF2-40B4-BE49-F238E27FC236}">
+                <a16:creationId xmlns:a16="http://schemas.microsoft.com/office/drawing/2014/main" id="{8A054D95-3891-CBD5-4B07-7FB36FC5EF9A}"/>
               </a:ext>
             </a:extLst>
           </p:cNvPr>
@@ -4612,8 +8362,684 @@
         </p:blipFill>
         <p:spPr>
           <a:xfrm>
-            <a:off x="788653" y="4982634"/>
-            <a:ext cx="4914286" cy="857143"/>
+            <a:off x="515887" y="2125440"/>
+            <a:ext cx="3514286" cy="2485714"/>
+          </a:xfrm>
+          <a:prstGeom prst="rect">
+            <a:avLst/>
+          </a:prstGeom>
+        </p:spPr>
+      </p:pic>
+    </p:spTree>
+    <p:extLst>
+      <p:ext uri="{BB962C8B-B14F-4D97-AF65-F5344CB8AC3E}">
+        <p14:creationId xmlns:p14="http://schemas.microsoft.com/office/powerpoint/2010/main" val="1626619165"/>
+      </p:ext>
+    </p:extLst>
+  </p:cSld>
+  <p:clrMapOvr>
+    <a:masterClrMapping/>
+  </p:clrMapOvr>
+</p:sld>
+</file>
+
+<file path=ppt/slides/slide7.xml><?xml version="1.0" encoding="utf-8"?>
+<p:sld xmlns:a="http://schemas.openxmlformats.org/drawingml/2006/main" xmlns:r="http://schemas.openxmlformats.org/officeDocument/2006/relationships" xmlns:p="http://schemas.openxmlformats.org/presentationml/2006/main">
+  <p:cSld>
+    <p:spTree>
+      <p:nvGrpSpPr>
+        <p:cNvPr id="1" name="">
+          <a:extLst>
+            <a:ext uri="{FF2B5EF4-FFF2-40B4-BE49-F238E27FC236}">
+              <a16:creationId xmlns:a16="http://schemas.microsoft.com/office/drawing/2014/main" id="{B6282D2B-2DDB-23E2-B36A-89826C2022FA}"/>
+            </a:ext>
+          </a:extLst>
+        </p:cNvPr>
+        <p:cNvGrpSpPr/>
+        <p:nvPr/>
+      </p:nvGrpSpPr>
+      <p:grpSpPr>
+        <a:xfrm>
+          <a:off x="0" y="0"/>
+          <a:ext cx="0" cy="0"/>
+          <a:chOff x="0" y="0"/>
+          <a:chExt cx="0" cy="0"/>
+        </a:xfrm>
+      </p:grpSpPr>
+      <p:sp>
+        <p:nvSpPr>
+          <p:cNvPr id="3" name="Slide Number Placeholder 2">
+            <a:extLst>
+              <a:ext uri="{FF2B5EF4-FFF2-40B4-BE49-F238E27FC236}">
+                <a16:creationId xmlns:a16="http://schemas.microsoft.com/office/drawing/2014/main" id="{8CA3B781-456A-6E2A-7EE7-C7D9BBA723E0}"/>
+              </a:ext>
+            </a:extLst>
+          </p:cNvPr>
+          <p:cNvSpPr>
+            <a:spLocks noGrp="1"/>
+          </p:cNvSpPr>
+          <p:nvPr>
+            <p:ph type="sldNum" sz="quarter" idx="11"/>
+          </p:nvPr>
+        </p:nvSpPr>
+        <p:spPr>
+          <a:xfrm>
+            <a:off x="8940799" y="6430254"/>
+            <a:ext cx="2743200" cy="365125"/>
+          </a:xfrm>
+        </p:spPr>
+        <p:txBody>
+          <a:bodyPr/>
+          <a:lstStyle/>
+          <a:p>
+            <a:pPr>
+              <a:defRPr/>
+            </a:pPr>
+            <a:fld id="{231CC523-8BC6-4921-807A-66BD262F34AB}" type="slidenum">
+              <a:rPr lang="en-US" smtClean="0"/>
+              <a:pPr>
+                <a:defRPr/>
+              </a:pPr>
+              <a:t>7</a:t>
+            </a:fld>
+            <a:endParaRPr lang="en-US"/>
+          </a:p>
+        </p:txBody>
+      </p:sp>
+      <p:sp>
+        <p:nvSpPr>
+          <p:cNvPr id="9" name="Title 8">
+            <a:extLst>
+              <a:ext uri="{FF2B5EF4-FFF2-40B4-BE49-F238E27FC236}">
+                <a16:creationId xmlns:a16="http://schemas.microsoft.com/office/drawing/2014/main" id="{0A365960-1B7A-D298-8F24-088EF488F209}"/>
+              </a:ext>
+            </a:extLst>
+          </p:cNvPr>
+          <p:cNvSpPr>
+            <a:spLocks noGrp="1"/>
+          </p:cNvSpPr>
+          <p:nvPr>
+            <p:ph type="ctrTitle"/>
+          </p:nvPr>
+        </p:nvSpPr>
+        <p:spPr>
+          <a:xfrm>
+            <a:off x="381000" y="126366"/>
+            <a:ext cx="11302999" cy="612648"/>
+          </a:xfrm>
+        </p:spPr>
+        <p:txBody>
+          <a:bodyPr>
+            <a:normAutofit/>
+          </a:bodyPr>
+          <a:lstStyle/>
+          <a:p>
+            <a:r>
+              <a:rPr lang="en-US" dirty="0"/>
+              <a:t>Example 2a</a:t>
+            </a:r>
+          </a:p>
+        </p:txBody>
+      </p:sp>
+      <p:sp>
+        <p:nvSpPr>
+          <p:cNvPr id="26" name="TextBox 25">
+            <a:extLst>
+              <a:ext uri="{FF2B5EF4-FFF2-40B4-BE49-F238E27FC236}">
+                <a16:creationId xmlns:a16="http://schemas.microsoft.com/office/drawing/2014/main" id="{A630FB44-1DFB-BA1F-AA88-38EC239EF060}"/>
+              </a:ext>
+            </a:extLst>
+          </p:cNvPr>
+          <p:cNvSpPr txBox="1"/>
+          <p:nvPr/>
+        </p:nvSpPr>
+        <p:spPr>
+          <a:xfrm>
+            <a:off x="381000" y="1368141"/>
+            <a:ext cx="6515181" cy="369332"/>
+          </a:xfrm>
+          <a:prstGeom prst="rect">
+            <a:avLst/>
+          </a:prstGeom>
+          <a:noFill/>
+        </p:spPr>
+        <p:txBody>
+          <a:bodyPr wrap="none" rtlCol="0">
+            <a:spAutoFit/>
+          </a:bodyPr>
+          <a:lstStyle/>
+          <a:p>
+            <a:r>
+              <a:rPr lang="en-US" dirty="0">
+                <a:highlight>
+                  <a:srgbClr val="FFFF00"/>
+                </a:highlight>
+              </a:rPr>
+              <a:t>Linear thermal (i.e., conductivity is assumed to be constant = K0)</a:t>
+            </a:r>
+          </a:p>
+        </p:txBody>
+      </p:sp>
+      <p:sp>
+        <p:nvSpPr>
+          <p:cNvPr id="24" name="TextBox 23">
+            <a:extLst>
+              <a:ext uri="{FF2B5EF4-FFF2-40B4-BE49-F238E27FC236}">
+                <a16:creationId xmlns:a16="http://schemas.microsoft.com/office/drawing/2014/main" id="{82BDD72D-C275-464B-4100-B7D915AF1542}"/>
+              </a:ext>
+            </a:extLst>
+          </p:cNvPr>
+          <p:cNvSpPr txBox="1"/>
+          <p:nvPr/>
+        </p:nvSpPr>
+        <p:spPr>
+          <a:xfrm>
+            <a:off x="5993360" y="4907395"/>
+            <a:ext cx="2217907" cy="646331"/>
+          </a:xfrm>
+          <a:prstGeom prst="rect">
+            <a:avLst/>
+          </a:prstGeom>
+          <a:noFill/>
+        </p:spPr>
+        <p:txBody>
+          <a:bodyPr wrap="square" rtlCol="0">
+            <a:spAutoFit/>
+          </a:bodyPr>
+          <a:lstStyle/>
+          <a:p>
+            <a:r>
+              <a:rPr lang="en-US" dirty="0">
+                <a:highlight>
+                  <a:srgbClr val="FFFF00"/>
+                </a:highlight>
+              </a:rPr>
+              <a:t>0 elements exceed temperature limit</a:t>
+            </a:r>
+          </a:p>
+        </p:txBody>
+      </p:sp>
+      <p:sp>
+        <p:nvSpPr>
+          <p:cNvPr id="4" name="TextBox 3">
+            <a:extLst>
+              <a:ext uri="{FF2B5EF4-FFF2-40B4-BE49-F238E27FC236}">
+                <a16:creationId xmlns:a16="http://schemas.microsoft.com/office/drawing/2014/main" id="{D2475156-FD84-949B-31CB-C787277FC634}"/>
+              </a:ext>
+            </a:extLst>
+          </p:cNvPr>
+          <p:cNvSpPr txBox="1"/>
+          <p:nvPr/>
+        </p:nvSpPr>
+        <p:spPr>
+          <a:xfrm>
+            <a:off x="381000" y="986944"/>
+            <a:ext cx="8636810" cy="286360"/>
+          </a:xfrm>
+          <a:prstGeom prst="rect">
+            <a:avLst/>
+          </a:prstGeom>
+          <a:noFill/>
+        </p:spPr>
+        <p:txBody>
+          <a:bodyPr wrap="square">
+            <a:spAutoFit/>
+          </a:bodyPr>
+          <a:lstStyle/>
+          <a:p>
+            <a:pPr>
+              <a:lnSpc>
+                <a:spcPts val="1425"/>
+              </a:lnSpc>
+              <a:buNone/>
+            </a:pPr>
+            <a:r>
+              <a:rPr lang="en-US" b="0">
+                <a:solidFill>
+                  <a:srgbClr val="4EC9B0"/>
+                </a:solidFill>
+                <a:effectLst/>
+                <a:latin typeface="Consolas" panose="020B0609020204030204" pitchFamily="49" charset="0"/>
+              </a:rPr>
+              <a:t>MMTOTempDependentExamples</a:t>
+            </a:r>
+            <a:r>
+              <a:rPr lang="en-US" b="0">
+                <a:solidFill>
+                  <a:srgbClr val="CCCCCC"/>
+                </a:solidFill>
+                <a:effectLst/>
+                <a:latin typeface="Consolas" panose="020B0609020204030204" pitchFamily="49" charset="0"/>
+              </a:rPr>
+              <a:t>.</a:t>
+            </a:r>
+            <a:r>
+              <a:rPr lang="en-US" b="0">
+                <a:solidFill>
+                  <a:srgbClr val="4FC1FF"/>
+                </a:solidFill>
+                <a:effectLst/>
+                <a:latin typeface="Consolas" panose="020B0609020204030204" pitchFamily="49" charset="0"/>
+              </a:rPr>
+              <a:t>LBracket_Compliance_MassCriticality</a:t>
+            </a:r>
+            <a:endParaRPr lang="en-US" b="0" dirty="0">
+              <a:solidFill>
+                <a:srgbClr val="CCCCCC"/>
+              </a:solidFill>
+              <a:effectLst/>
+              <a:latin typeface="Consolas" panose="020B0609020204030204" pitchFamily="49" charset="0"/>
+            </a:endParaRPr>
+          </a:p>
+        </p:txBody>
+      </p:sp>
+      <p:pic>
+        <p:nvPicPr>
+          <p:cNvPr id="7" name="Picture 6">
+            <a:extLst>
+              <a:ext uri="{FF2B5EF4-FFF2-40B4-BE49-F238E27FC236}">
+                <a16:creationId xmlns:a16="http://schemas.microsoft.com/office/drawing/2014/main" id="{FB5A0585-85A6-D6F2-4688-14E6446A7E69}"/>
+              </a:ext>
+            </a:extLst>
+          </p:cNvPr>
+          <p:cNvPicPr>
+            <a:picLocks noChangeAspect="1"/>
+          </p:cNvPicPr>
+          <p:nvPr/>
+        </p:nvPicPr>
+        <p:blipFill>
+          <a:blip r:embed="rId2"/>
+          <a:stretch>
+            <a:fillRect/>
+          </a:stretch>
+        </p:blipFill>
+        <p:spPr>
+          <a:xfrm>
+            <a:off x="4324571" y="2319033"/>
+            <a:ext cx="3542857" cy="2180952"/>
+          </a:xfrm>
+          <a:prstGeom prst="rect">
+            <a:avLst/>
+          </a:prstGeom>
+        </p:spPr>
+      </p:pic>
+      <p:pic>
+        <p:nvPicPr>
+          <p:cNvPr id="10" name="Picture 9">
+            <a:extLst>
+              <a:ext uri="{FF2B5EF4-FFF2-40B4-BE49-F238E27FC236}">
+                <a16:creationId xmlns:a16="http://schemas.microsoft.com/office/drawing/2014/main" id="{0520F1FC-5604-94A3-61AC-2D7EB0D17D5B}"/>
+              </a:ext>
+            </a:extLst>
+          </p:cNvPr>
+          <p:cNvPicPr>
+            <a:picLocks noChangeAspect="1"/>
+          </p:cNvPicPr>
+          <p:nvPr/>
+        </p:nvPicPr>
+        <p:blipFill>
+          <a:blip r:embed="rId3"/>
+          <a:stretch>
+            <a:fillRect/>
+          </a:stretch>
+        </p:blipFill>
+        <p:spPr>
+          <a:xfrm>
+            <a:off x="705257" y="2319476"/>
+            <a:ext cx="2933333" cy="2219048"/>
+          </a:xfrm>
+          <a:prstGeom prst="rect">
+            <a:avLst/>
+          </a:prstGeom>
+        </p:spPr>
+      </p:pic>
+      <p:pic>
+        <p:nvPicPr>
+          <p:cNvPr id="13" name="Picture 12">
+            <a:extLst>
+              <a:ext uri="{FF2B5EF4-FFF2-40B4-BE49-F238E27FC236}">
+                <a16:creationId xmlns:a16="http://schemas.microsoft.com/office/drawing/2014/main" id="{FBFB1AAD-D6AC-1042-E64B-3DF8BFE6E065}"/>
+              </a:ext>
+            </a:extLst>
+          </p:cNvPr>
+          <p:cNvPicPr>
+            <a:picLocks noChangeAspect="1"/>
+          </p:cNvPicPr>
+          <p:nvPr/>
+        </p:nvPicPr>
+        <p:blipFill>
+          <a:blip r:embed="rId4"/>
+          <a:stretch>
+            <a:fillRect/>
+          </a:stretch>
+        </p:blipFill>
+        <p:spPr>
+          <a:xfrm>
+            <a:off x="137307" y="4747567"/>
+            <a:ext cx="4952381" cy="1314286"/>
+          </a:xfrm>
+          <a:prstGeom prst="rect">
+            <a:avLst/>
+          </a:prstGeom>
+        </p:spPr>
+      </p:pic>
+    </p:spTree>
+    <p:extLst>
+      <p:ext uri="{BB962C8B-B14F-4D97-AF65-F5344CB8AC3E}">
+        <p14:creationId xmlns:p14="http://schemas.microsoft.com/office/powerpoint/2010/main" val="716583535"/>
+      </p:ext>
+    </p:extLst>
+  </p:cSld>
+  <p:clrMapOvr>
+    <a:masterClrMapping/>
+  </p:clrMapOvr>
+</p:sld>
+</file>
+
+<file path=ppt/slides/slide8.xml><?xml version="1.0" encoding="utf-8"?>
+<p:sld xmlns:a="http://schemas.openxmlformats.org/drawingml/2006/main" xmlns:r="http://schemas.openxmlformats.org/officeDocument/2006/relationships" xmlns:p="http://schemas.openxmlformats.org/presentationml/2006/main">
+  <p:cSld>
+    <p:spTree>
+      <p:nvGrpSpPr>
+        <p:cNvPr id="1" name="">
+          <a:extLst>
+            <a:ext uri="{FF2B5EF4-FFF2-40B4-BE49-F238E27FC236}">
+              <a16:creationId xmlns:a16="http://schemas.microsoft.com/office/drawing/2014/main" id="{CBAFD678-47D5-F04C-7996-4B1B8BB280E9}"/>
+            </a:ext>
+          </a:extLst>
+        </p:cNvPr>
+        <p:cNvGrpSpPr/>
+        <p:nvPr/>
+      </p:nvGrpSpPr>
+      <p:grpSpPr>
+        <a:xfrm>
+          <a:off x="0" y="0"/>
+          <a:ext cx="0" cy="0"/>
+          <a:chOff x="0" y="0"/>
+          <a:chExt cx="0" cy="0"/>
+        </a:xfrm>
+      </p:grpSpPr>
+      <p:sp>
+        <p:nvSpPr>
+          <p:cNvPr id="3" name="Slide Number Placeholder 2">
+            <a:extLst>
+              <a:ext uri="{FF2B5EF4-FFF2-40B4-BE49-F238E27FC236}">
+                <a16:creationId xmlns:a16="http://schemas.microsoft.com/office/drawing/2014/main" id="{CD771A68-6AF9-9A97-A304-5E7B66DC407D}"/>
+              </a:ext>
+            </a:extLst>
+          </p:cNvPr>
+          <p:cNvSpPr>
+            <a:spLocks noGrp="1"/>
+          </p:cNvSpPr>
+          <p:nvPr>
+            <p:ph type="sldNum" sz="quarter" idx="11"/>
+          </p:nvPr>
+        </p:nvSpPr>
+        <p:spPr>
+          <a:xfrm>
+            <a:off x="8940799" y="6430254"/>
+            <a:ext cx="2743200" cy="365125"/>
+          </a:xfrm>
+        </p:spPr>
+        <p:txBody>
+          <a:bodyPr/>
+          <a:lstStyle/>
+          <a:p>
+            <a:pPr>
+              <a:defRPr/>
+            </a:pPr>
+            <a:fld id="{231CC523-8BC6-4921-807A-66BD262F34AB}" type="slidenum">
+              <a:rPr lang="en-US" smtClean="0"/>
+              <a:pPr>
+                <a:defRPr/>
+              </a:pPr>
+              <a:t>8</a:t>
+            </a:fld>
+            <a:endParaRPr lang="en-US"/>
+          </a:p>
+        </p:txBody>
+      </p:sp>
+      <p:sp>
+        <p:nvSpPr>
+          <p:cNvPr id="9" name="Title 8">
+            <a:extLst>
+              <a:ext uri="{FF2B5EF4-FFF2-40B4-BE49-F238E27FC236}">
+                <a16:creationId xmlns:a16="http://schemas.microsoft.com/office/drawing/2014/main" id="{D4C9DFB8-A8BC-AE0C-4996-4B6AEC8F6E0D}"/>
+              </a:ext>
+            </a:extLst>
+          </p:cNvPr>
+          <p:cNvSpPr>
+            <a:spLocks noGrp="1"/>
+          </p:cNvSpPr>
+          <p:nvPr>
+            <p:ph type="ctrTitle"/>
+          </p:nvPr>
+        </p:nvSpPr>
+        <p:spPr>
+          <a:xfrm>
+            <a:off x="381000" y="126366"/>
+            <a:ext cx="11302999" cy="612648"/>
+          </a:xfrm>
+        </p:spPr>
+        <p:txBody>
+          <a:bodyPr>
+            <a:normAutofit/>
+          </a:bodyPr>
+          <a:lstStyle/>
+          <a:p>
+            <a:r>
+              <a:rPr lang="en-US" dirty="0"/>
+              <a:t>Example 2b</a:t>
+            </a:r>
+          </a:p>
+        </p:txBody>
+      </p:sp>
+      <p:sp>
+        <p:nvSpPr>
+          <p:cNvPr id="24" name="TextBox 23">
+            <a:extLst>
+              <a:ext uri="{FF2B5EF4-FFF2-40B4-BE49-F238E27FC236}">
+                <a16:creationId xmlns:a16="http://schemas.microsoft.com/office/drawing/2014/main" id="{6A5F99DF-8559-9CE2-98FD-31F11569E87A}"/>
+              </a:ext>
+            </a:extLst>
+          </p:cNvPr>
+          <p:cNvSpPr txBox="1"/>
+          <p:nvPr/>
+        </p:nvSpPr>
+        <p:spPr>
+          <a:xfrm>
+            <a:off x="5993360" y="4907395"/>
+            <a:ext cx="2217907" cy="646331"/>
+          </a:xfrm>
+          <a:prstGeom prst="rect">
+            <a:avLst/>
+          </a:prstGeom>
+          <a:noFill/>
+        </p:spPr>
+        <p:txBody>
+          <a:bodyPr wrap="square" rtlCol="0">
+            <a:spAutoFit/>
+          </a:bodyPr>
+          <a:lstStyle/>
+          <a:p>
+            <a:r>
+              <a:rPr lang="en-US" dirty="0">
+                <a:highlight>
+                  <a:srgbClr val="FFFF00"/>
+                </a:highlight>
+              </a:rPr>
+              <a:t>0 elements exceed temperature limit</a:t>
+            </a:r>
+          </a:p>
+        </p:txBody>
+      </p:sp>
+      <p:sp>
+        <p:nvSpPr>
+          <p:cNvPr id="4" name="TextBox 3">
+            <a:extLst>
+              <a:ext uri="{FF2B5EF4-FFF2-40B4-BE49-F238E27FC236}">
+                <a16:creationId xmlns:a16="http://schemas.microsoft.com/office/drawing/2014/main" id="{B25033E9-AC60-3CC8-DA1A-461160D5224B}"/>
+              </a:ext>
+            </a:extLst>
+          </p:cNvPr>
+          <p:cNvSpPr txBox="1"/>
+          <p:nvPr/>
+        </p:nvSpPr>
+        <p:spPr>
+          <a:xfrm>
+            <a:off x="381000" y="986944"/>
+            <a:ext cx="8636810" cy="286360"/>
+          </a:xfrm>
+          <a:prstGeom prst="rect">
+            <a:avLst/>
+          </a:prstGeom>
+          <a:noFill/>
+        </p:spPr>
+        <p:txBody>
+          <a:bodyPr wrap="square">
+            <a:spAutoFit/>
+          </a:bodyPr>
+          <a:lstStyle/>
+          <a:p>
+            <a:pPr>
+              <a:lnSpc>
+                <a:spcPts val="1425"/>
+              </a:lnSpc>
+              <a:buNone/>
+            </a:pPr>
+            <a:r>
+              <a:rPr lang="en-US" b="0">
+                <a:solidFill>
+                  <a:srgbClr val="4EC9B0"/>
+                </a:solidFill>
+                <a:effectLst/>
+                <a:latin typeface="Consolas" panose="020B0609020204030204" pitchFamily="49" charset="0"/>
+              </a:rPr>
+              <a:t>MMTOTempDependentExamples</a:t>
+            </a:r>
+            <a:r>
+              <a:rPr lang="en-US" b="0">
+                <a:solidFill>
+                  <a:srgbClr val="CCCCCC"/>
+                </a:solidFill>
+                <a:effectLst/>
+                <a:latin typeface="Consolas" panose="020B0609020204030204" pitchFamily="49" charset="0"/>
+              </a:rPr>
+              <a:t>.</a:t>
+            </a:r>
+            <a:r>
+              <a:rPr lang="en-US" b="0">
+                <a:solidFill>
+                  <a:srgbClr val="4FC1FF"/>
+                </a:solidFill>
+                <a:effectLst/>
+                <a:latin typeface="Consolas" panose="020B0609020204030204" pitchFamily="49" charset="0"/>
+              </a:rPr>
+              <a:t>LBracket_Compliance_MassCriticality</a:t>
+            </a:r>
+            <a:endParaRPr lang="en-US" b="0" dirty="0">
+              <a:solidFill>
+                <a:srgbClr val="CCCCCC"/>
+              </a:solidFill>
+              <a:effectLst/>
+              <a:latin typeface="Consolas" panose="020B0609020204030204" pitchFamily="49" charset="0"/>
+            </a:endParaRPr>
+          </a:p>
+        </p:txBody>
+      </p:sp>
+      <p:sp>
+        <p:nvSpPr>
+          <p:cNvPr id="2" name="TextBox 1">
+            <a:extLst>
+              <a:ext uri="{FF2B5EF4-FFF2-40B4-BE49-F238E27FC236}">
+                <a16:creationId xmlns:a16="http://schemas.microsoft.com/office/drawing/2014/main" id="{10B9A661-874C-1344-7183-8305226E3876}"/>
+              </a:ext>
+            </a:extLst>
+          </p:cNvPr>
+          <p:cNvSpPr txBox="1"/>
+          <p:nvPr/>
+        </p:nvSpPr>
+        <p:spPr>
+          <a:xfrm>
+            <a:off x="381000" y="1410012"/>
+            <a:ext cx="6270563" cy="369332"/>
+          </a:xfrm>
+          <a:prstGeom prst="rect">
+            <a:avLst/>
+          </a:prstGeom>
+          <a:noFill/>
+        </p:spPr>
+        <p:txBody>
+          <a:bodyPr wrap="none" rtlCol="0">
+            <a:spAutoFit/>
+          </a:bodyPr>
+          <a:lstStyle/>
+          <a:p>
+            <a:r>
+              <a:rPr lang="en-US" dirty="0">
+                <a:highlight>
+                  <a:srgbClr val="FFFF00"/>
+                </a:highlight>
+              </a:rPr>
+              <a:t>Non-Linear thermal (i.e., conductivity is also temp dependent)</a:t>
+            </a:r>
+          </a:p>
+        </p:txBody>
+      </p:sp>
+      <p:pic>
+        <p:nvPicPr>
+          <p:cNvPr id="6" name="Picture 5">
+            <a:extLst>
+              <a:ext uri="{FF2B5EF4-FFF2-40B4-BE49-F238E27FC236}">
+                <a16:creationId xmlns:a16="http://schemas.microsoft.com/office/drawing/2014/main" id="{75CE1415-A9C0-F61B-EA21-FBC7003A050B}"/>
+              </a:ext>
+            </a:extLst>
+          </p:cNvPr>
+          <p:cNvPicPr>
+            <a:picLocks noChangeAspect="1"/>
+          </p:cNvPicPr>
+          <p:nvPr/>
+        </p:nvPicPr>
+        <p:blipFill>
+          <a:blip r:embed="rId3"/>
+          <a:stretch>
+            <a:fillRect/>
+          </a:stretch>
+        </p:blipFill>
+        <p:spPr>
+          <a:xfrm>
+            <a:off x="4699405" y="2172979"/>
+            <a:ext cx="3238095" cy="2180952"/>
+          </a:xfrm>
+          <a:prstGeom prst="rect">
+            <a:avLst/>
+          </a:prstGeom>
+        </p:spPr>
+      </p:pic>
+      <p:pic>
+        <p:nvPicPr>
+          <p:cNvPr id="11" name="Picture 10">
+            <a:extLst>
+              <a:ext uri="{FF2B5EF4-FFF2-40B4-BE49-F238E27FC236}">
+                <a16:creationId xmlns:a16="http://schemas.microsoft.com/office/drawing/2014/main" id="{AC26DEF8-70E8-7124-20D4-A48D770AA43D}"/>
+              </a:ext>
+            </a:extLst>
+          </p:cNvPr>
+          <p:cNvPicPr>
+            <a:picLocks noChangeAspect="1"/>
+          </p:cNvPicPr>
+          <p:nvPr/>
+        </p:nvPicPr>
+        <p:blipFill>
+          <a:blip r:embed="rId4"/>
+          <a:stretch>
+            <a:fillRect/>
+          </a:stretch>
+        </p:blipFill>
+        <p:spPr>
+          <a:xfrm>
+            <a:off x="381000" y="4747566"/>
+            <a:ext cx="4971429" cy="1276190"/>
           </a:xfrm>
           <a:prstGeom prst="rect">
             <a:avLst/>
@@ -4625,7 +9051,7 @@
           <p:cNvPr id="14" name="Picture 13">
             <a:extLst>
               <a:ext uri="{FF2B5EF4-FFF2-40B4-BE49-F238E27FC236}">
-                <a16:creationId xmlns:a16="http://schemas.microsoft.com/office/drawing/2014/main" id="{54E09CA6-423B-B175-112D-1D076B38F811}"/>
+                <a16:creationId xmlns:a16="http://schemas.microsoft.com/office/drawing/2014/main" id="{60AFBD22-25B8-E7FF-0130-3394F6B66CEE}"/>
               </a:ext>
             </a:extLst>
           </p:cNvPr>
@@ -4642,8 +9068,8 @@
         </p:blipFill>
         <p:spPr>
           <a:xfrm>
-            <a:off x="8203614" y="1746563"/>
-            <a:ext cx="3620217" cy="2682306"/>
+            <a:off x="882480" y="2303129"/>
+            <a:ext cx="3228571" cy="2247619"/>
           </a:xfrm>
           <a:prstGeom prst="rect">
             <a:avLst/>
@@ -4653,7 +9079,817 @@
     </p:spTree>
     <p:extLst>
       <p:ext uri="{BB962C8B-B14F-4D97-AF65-F5344CB8AC3E}">
-        <p14:creationId xmlns:p14="http://schemas.microsoft.com/office/powerpoint/2010/main" val="1626619165"/>
+        <p14:creationId xmlns:p14="http://schemas.microsoft.com/office/powerpoint/2010/main" val="928092769"/>
+      </p:ext>
+    </p:extLst>
+  </p:cSld>
+  <p:clrMapOvr>
+    <a:masterClrMapping/>
+  </p:clrMapOvr>
+</p:sld>
+</file>
+
+<file path=ppt/slides/slide9.xml><?xml version="1.0" encoding="utf-8"?>
+<p:sld xmlns:a="http://schemas.openxmlformats.org/drawingml/2006/main" xmlns:r="http://schemas.openxmlformats.org/officeDocument/2006/relationships" xmlns:p="http://schemas.openxmlformats.org/presentationml/2006/main">
+  <p:cSld>
+    <p:spTree>
+      <p:nvGrpSpPr>
+        <p:cNvPr id="1" name="">
+          <a:extLst>
+            <a:ext uri="{FF2B5EF4-FFF2-40B4-BE49-F238E27FC236}">
+              <a16:creationId xmlns:a16="http://schemas.microsoft.com/office/drawing/2014/main" id="{FCB49253-AEA9-67B5-7D19-B2C1BB068DBD}"/>
+            </a:ext>
+          </a:extLst>
+        </p:cNvPr>
+        <p:cNvGrpSpPr/>
+        <p:nvPr/>
+      </p:nvGrpSpPr>
+      <p:grpSpPr>
+        <a:xfrm>
+          <a:off x="0" y="0"/>
+          <a:ext cx="0" cy="0"/>
+          <a:chOff x="0" y="0"/>
+          <a:chExt cx="0" cy="0"/>
+        </a:xfrm>
+      </p:grpSpPr>
+      <p:sp>
+        <p:nvSpPr>
+          <p:cNvPr id="3" name="Slide Number Placeholder 2">
+            <a:extLst>
+              <a:ext uri="{FF2B5EF4-FFF2-40B4-BE49-F238E27FC236}">
+                <a16:creationId xmlns:a16="http://schemas.microsoft.com/office/drawing/2014/main" id="{31B7B17F-8035-E4F7-C010-3ED32FE0FAA3}"/>
+              </a:ext>
+            </a:extLst>
+          </p:cNvPr>
+          <p:cNvSpPr>
+            <a:spLocks noGrp="1"/>
+          </p:cNvSpPr>
+          <p:nvPr>
+            <p:ph type="sldNum" sz="quarter" idx="11"/>
+          </p:nvPr>
+        </p:nvSpPr>
+        <p:spPr>
+          <a:xfrm>
+            <a:off x="9222902" y="6324259"/>
+            <a:ext cx="2743200" cy="365125"/>
+          </a:xfrm>
+        </p:spPr>
+        <p:txBody>
+          <a:bodyPr/>
+          <a:lstStyle/>
+          <a:p>
+            <a:pPr>
+              <a:defRPr/>
+            </a:pPr>
+            <a:fld id="{231CC523-8BC6-4921-807A-66BD262F34AB}" type="slidenum">
+              <a:rPr lang="en-US" smtClean="0"/>
+              <a:pPr>
+                <a:defRPr/>
+              </a:pPr>
+              <a:t>9</a:t>
+            </a:fld>
+            <a:endParaRPr lang="en-US"/>
+          </a:p>
+        </p:txBody>
+      </p:sp>
+      <p:sp>
+        <p:nvSpPr>
+          <p:cNvPr id="9" name="Title 8">
+            <a:extLst>
+              <a:ext uri="{FF2B5EF4-FFF2-40B4-BE49-F238E27FC236}">
+                <a16:creationId xmlns:a16="http://schemas.microsoft.com/office/drawing/2014/main" id="{62888050-E696-26FD-B07D-F1DA9562F808}"/>
+              </a:ext>
+            </a:extLst>
+          </p:cNvPr>
+          <p:cNvSpPr>
+            <a:spLocks noGrp="1"/>
+          </p:cNvSpPr>
+          <p:nvPr>
+            <p:ph type="ctrTitle"/>
+          </p:nvPr>
+        </p:nvSpPr>
+        <p:spPr>
+          <a:xfrm>
+            <a:off x="381000" y="126366"/>
+            <a:ext cx="11302999" cy="612648"/>
+          </a:xfrm>
+        </p:spPr>
+        <p:txBody>
+          <a:bodyPr>
+            <a:normAutofit/>
+          </a:bodyPr>
+          <a:lstStyle/>
+          <a:p>
+            <a:r>
+              <a:rPr lang="en-US" dirty="0"/>
+              <a:t>Material: </a:t>
+            </a:r>
+            <a:r>
+              <a:rPr lang="en-US" dirty="0" err="1"/>
+              <a:t>DataVaryingTemperature</a:t>
+            </a:r>
+            <a:r>
+              <a:rPr lang="en-US" dirty="0"/>
+              <a:t>/6MaterialsTempDependent.xlsx</a:t>
+            </a:r>
+          </a:p>
+        </p:txBody>
+      </p:sp>
+      <p:sp>
+        <p:nvSpPr>
+          <p:cNvPr id="8" name="TextBox 7">
+            <a:extLst>
+              <a:ext uri="{FF2B5EF4-FFF2-40B4-BE49-F238E27FC236}">
+                <a16:creationId xmlns:a16="http://schemas.microsoft.com/office/drawing/2014/main" id="{F40ED8D1-99BC-7818-9F7A-DFBDB02CF5EF}"/>
+              </a:ext>
+            </a:extLst>
+          </p:cNvPr>
+          <p:cNvSpPr txBox="1"/>
+          <p:nvPr/>
+        </p:nvSpPr>
+        <p:spPr>
+          <a:xfrm>
+            <a:off x="24642" y="961000"/>
+            <a:ext cx="1799467" cy="646331"/>
+          </a:xfrm>
+          <a:prstGeom prst="rect">
+            <a:avLst/>
+          </a:prstGeom>
+          <a:noFill/>
+        </p:spPr>
+        <p:txBody>
+          <a:bodyPr wrap="none" rtlCol="0">
+            <a:spAutoFit/>
+          </a:bodyPr>
+          <a:lstStyle/>
+          <a:p>
+            <a:pPr marL="285750" indent="-285750">
+              <a:buFont typeface="Arial" panose="020B0604020202020204" pitchFamily="34" charset="0"/>
+              <a:buChar char="•"/>
+            </a:pPr>
+            <a:r>
+              <a:rPr lang="en-US" b="1" dirty="0"/>
+              <a:t>6 materials</a:t>
+            </a:r>
+          </a:p>
+          <a:p>
+            <a:pPr marL="285750" indent="-285750">
+              <a:buFont typeface="Arial" panose="020B0604020202020204" pitchFamily="34" charset="0"/>
+              <a:buChar char="•"/>
+            </a:pPr>
+            <a:r>
+              <a:rPr lang="en-US" b="1" dirty="0"/>
+              <a:t>16 attributes</a:t>
+            </a:r>
+          </a:p>
+        </p:txBody>
+      </p:sp>
+      <p:sp>
+        <p:nvSpPr>
+          <p:cNvPr id="16" name="Right Brace 15">
+            <a:extLst>
+              <a:ext uri="{FF2B5EF4-FFF2-40B4-BE49-F238E27FC236}">
+                <a16:creationId xmlns:a16="http://schemas.microsoft.com/office/drawing/2014/main" id="{58068B97-87D4-4A02-9E03-C600E07AF89F}"/>
+              </a:ext>
+            </a:extLst>
+          </p:cNvPr>
+          <p:cNvSpPr/>
+          <p:nvPr/>
+        </p:nvSpPr>
+        <p:spPr>
+          <a:xfrm rot="16200000">
+            <a:off x="3772046" y="534318"/>
+            <a:ext cx="291537" cy="2222771"/>
+          </a:xfrm>
+          <a:prstGeom prst="rightBrace">
+            <a:avLst/>
+          </a:prstGeom>
+        </p:spPr>
+        <p:style>
+          <a:lnRef idx="2">
+            <a:schemeClr val="accent1"/>
+          </a:lnRef>
+          <a:fillRef idx="0">
+            <a:schemeClr val="accent1"/>
+          </a:fillRef>
+          <a:effectRef idx="1">
+            <a:schemeClr val="accent1"/>
+          </a:effectRef>
+          <a:fontRef idx="minor">
+            <a:schemeClr val="tx1"/>
+          </a:fontRef>
+        </p:style>
+        <p:txBody>
+          <a:bodyPr rtlCol="0" anchor="ctr"/>
+          <a:lstStyle/>
+          <a:p>
+            <a:pPr algn="ctr"/>
+            <a:endParaRPr lang="en-US"/>
+          </a:p>
+        </p:txBody>
+      </p:sp>
+      <p:sp>
+        <p:nvSpPr>
+          <p:cNvPr id="17" name="TextBox 16">
+            <a:extLst>
+              <a:ext uri="{FF2B5EF4-FFF2-40B4-BE49-F238E27FC236}">
+                <a16:creationId xmlns:a16="http://schemas.microsoft.com/office/drawing/2014/main" id="{1A4B1A05-7F71-AA83-6ABC-3C5985FFB818}"/>
+              </a:ext>
+            </a:extLst>
+          </p:cNvPr>
+          <p:cNvSpPr txBox="1"/>
+          <p:nvPr/>
+        </p:nvSpPr>
+        <p:spPr>
+          <a:xfrm>
+            <a:off x="3103123" y="1029807"/>
+            <a:ext cx="1586332" cy="369332"/>
+          </a:xfrm>
+          <a:prstGeom prst="rect">
+            <a:avLst/>
+          </a:prstGeom>
+          <a:noFill/>
+        </p:spPr>
+        <p:txBody>
+          <a:bodyPr wrap="none" rtlCol="0">
+            <a:spAutoFit/>
+          </a:bodyPr>
+          <a:lstStyle/>
+          <a:p>
+            <a:r>
+              <a:rPr lang="en-US" b="1" dirty="0"/>
+              <a:t>Captures E(T)</a:t>
+            </a:r>
+          </a:p>
+        </p:txBody>
+      </p:sp>
+      <p:sp>
+        <p:nvSpPr>
+          <p:cNvPr id="18" name="Right Brace 17">
+            <a:extLst>
+              <a:ext uri="{FF2B5EF4-FFF2-40B4-BE49-F238E27FC236}">
+                <a16:creationId xmlns:a16="http://schemas.microsoft.com/office/drawing/2014/main" id="{4D656828-AE42-1718-779A-16C9DA2FF029}"/>
+              </a:ext>
+            </a:extLst>
+          </p:cNvPr>
+          <p:cNvSpPr/>
+          <p:nvPr/>
+        </p:nvSpPr>
+        <p:spPr>
+          <a:xfrm rot="16200000">
+            <a:off x="6245393" y="477012"/>
+            <a:ext cx="291537" cy="2222771"/>
+          </a:xfrm>
+          <a:prstGeom prst="rightBrace">
+            <a:avLst/>
+          </a:prstGeom>
+        </p:spPr>
+        <p:style>
+          <a:lnRef idx="2">
+            <a:schemeClr val="accent1"/>
+          </a:lnRef>
+          <a:fillRef idx="0">
+            <a:schemeClr val="accent1"/>
+          </a:fillRef>
+          <a:effectRef idx="1">
+            <a:schemeClr val="accent1"/>
+          </a:effectRef>
+          <a:fontRef idx="minor">
+            <a:schemeClr val="tx1"/>
+          </a:fontRef>
+        </p:style>
+        <p:txBody>
+          <a:bodyPr rtlCol="0" anchor="ctr"/>
+          <a:lstStyle/>
+          <a:p>
+            <a:pPr algn="ctr"/>
+            <a:endParaRPr lang="en-US"/>
+          </a:p>
+        </p:txBody>
+      </p:sp>
+      <p:sp>
+        <p:nvSpPr>
+          <p:cNvPr id="19" name="TextBox 18">
+            <a:extLst>
+              <a:ext uri="{FF2B5EF4-FFF2-40B4-BE49-F238E27FC236}">
+                <a16:creationId xmlns:a16="http://schemas.microsoft.com/office/drawing/2014/main" id="{6FF245A9-FB9A-4C44-C85A-FB8629814DF0}"/>
+              </a:ext>
+            </a:extLst>
+          </p:cNvPr>
+          <p:cNvSpPr txBox="1"/>
+          <p:nvPr/>
+        </p:nvSpPr>
+        <p:spPr>
+          <a:xfrm>
+            <a:off x="5576470" y="972501"/>
+            <a:ext cx="1586332" cy="369332"/>
+          </a:xfrm>
+          <a:prstGeom prst="rect">
+            <a:avLst/>
+          </a:prstGeom>
+          <a:noFill/>
+        </p:spPr>
+        <p:txBody>
+          <a:bodyPr wrap="none" rtlCol="0">
+            <a:spAutoFit/>
+          </a:bodyPr>
+          <a:lstStyle/>
+          <a:p>
+            <a:r>
+              <a:rPr lang="en-US" b="1" dirty="0"/>
+              <a:t>Captures Y(T)</a:t>
+            </a:r>
+          </a:p>
+        </p:txBody>
+      </p:sp>
+      <p:sp>
+        <p:nvSpPr>
+          <p:cNvPr id="20" name="Right Brace 19">
+            <a:extLst>
+              <a:ext uri="{FF2B5EF4-FFF2-40B4-BE49-F238E27FC236}">
+                <a16:creationId xmlns:a16="http://schemas.microsoft.com/office/drawing/2014/main" id="{5FED8EE8-78C4-0E90-327F-6D7D569DB13E}"/>
+              </a:ext>
+            </a:extLst>
+          </p:cNvPr>
+          <p:cNvSpPr/>
+          <p:nvPr/>
+        </p:nvSpPr>
+        <p:spPr>
+          <a:xfrm rot="16200000">
+            <a:off x="8667608" y="435857"/>
+            <a:ext cx="291537" cy="2222771"/>
+          </a:xfrm>
+          <a:prstGeom prst="rightBrace">
+            <a:avLst/>
+          </a:prstGeom>
+        </p:spPr>
+        <p:style>
+          <a:lnRef idx="2">
+            <a:schemeClr val="accent1"/>
+          </a:lnRef>
+          <a:fillRef idx="0">
+            <a:schemeClr val="accent1"/>
+          </a:fillRef>
+          <a:effectRef idx="1">
+            <a:schemeClr val="accent1"/>
+          </a:effectRef>
+          <a:fontRef idx="minor">
+            <a:schemeClr val="tx1"/>
+          </a:fontRef>
+        </p:style>
+        <p:txBody>
+          <a:bodyPr rtlCol="0" anchor="ctr"/>
+          <a:lstStyle/>
+          <a:p>
+            <a:pPr algn="ctr"/>
+            <a:endParaRPr lang="en-US"/>
+          </a:p>
+        </p:txBody>
+      </p:sp>
+      <p:sp>
+        <p:nvSpPr>
+          <p:cNvPr id="21" name="TextBox 20">
+            <a:extLst>
+              <a:ext uri="{FF2B5EF4-FFF2-40B4-BE49-F238E27FC236}">
+                <a16:creationId xmlns:a16="http://schemas.microsoft.com/office/drawing/2014/main" id="{D3F983C1-395F-3C60-C404-5676E59B8473}"/>
+              </a:ext>
+            </a:extLst>
+          </p:cNvPr>
+          <p:cNvSpPr txBox="1"/>
+          <p:nvPr/>
+        </p:nvSpPr>
+        <p:spPr>
+          <a:xfrm>
+            <a:off x="7898963" y="949579"/>
+            <a:ext cx="1586332" cy="369332"/>
+          </a:xfrm>
+          <a:prstGeom prst="rect">
+            <a:avLst/>
+          </a:prstGeom>
+          <a:noFill/>
+        </p:spPr>
+        <p:txBody>
+          <a:bodyPr wrap="none" rtlCol="0">
+            <a:spAutoFit/>
+          </a:bodyPr>
+          <a:lstStyle/>
+          <a:p>
+            <a:r>
+              <a:rPr lang="en-US" b="1" dirty="0"/>
+              <a:t>Captures K(T)</a:t>
+            </a:r>
+          </a:p>
+        </p:txBody>
+      </p:sp>
+      <p:sp>
+        <p:nvSpPr>
+          <p:cNvPr id="22" name="TextBox 21">
+            <a:extLst>
+              <a:ext uri="{FF2B5EF4-FFF2-40B4-BE49-F238E27FC236}">
+                <a16:creationId xmlns:a16="http://schemas.microsoft.com/office/drawing/2014/main" id="{39F7D6D7-E693-BE95-D627-90893EB94657}"/>
+              </a:ext>
+            </a:extLst>
+          </p:cNvPr>
+          <p:cNvSpPr txBox="1"/>
+          <p:nvPr/>
+        </p:nvSpPr>
+        <p:spPr>
+          <a:xfrm>
+            <a:off x="10995602" y="949579"/>
+            <a:ext cx="1196398" cy="646331"/>
+          </a:xfrm>
+          <a:prstGeom prst="rect">
+            <a:avLst/>
+          </a:prstGeom>
+          <a:noFill/>
+        </p:spPr>
+        <p:txBody>
+          <a:bodyPr wrap="square" rtlCol="0">
+            <a:spAutoFit/>
+          </a:bodyPr>
+          <a:lstStyle/>
+          <a:p>
+            <a:pPr algn="ctr"/>
+            <a:r>
+              <a:rPr lang="en-US" b="1" dirty="0"/>
+              <a:t>Max use temp</a:t>
+            </a:r>
+          </a:p>
+        </p:txBody>
+      </p:sp>
+      <p:sp>
+        <p:nvSpPr>
+          <p:cNvPr id="10" name="TextBox 9">
+            <a:extLst>
+              <a:ext uri="{FF2B5EF4-FFF2-40B4-BE49-F238E27FC236}">
+                <a16:creationId xmlns:a16="http://schemas.microsoft.com/office/drawing/2014/main" id="{F215DBC0-0AB0-A837-BDD3-240E55810F82}"/>
+              </a:ext>
+            </a:extLst>
+          </p:cNvPr>
+          <p:cNvSpPr txBox="1"/>
+          <p:nvPr/>
+        </p:nvSpPr>
+        <p:spPr>
+          <a:xfrm>
+            <a:off x="1540878" y="3059668"/>
+            <a:ext cx="569387" cy="369332"/>
+          </a:xfrm>
+          <a:prstGeom prst="rect">
+            <a:avLst/>
+          </a:prstGeom>
+          <a:noFill/>
+        </p:spPr>
+        <p:txBody>
+          <a:bodyPr wrap="none" rtlCol="0">
+            <a:spAutoFit/>
+          </a:bodyPr>
+          <a:lstStyle/>
+          <a:p>
+            <a:r>
+              <a:rPr lang="en-US" b="1" dirty="0"/>
+              <a:t>E(T)</a:t>
+            </a:r>
+          </a:p>
+        </p:txBody>
+      </p:sp>
+      <p:sp>
+        <p:nvSpPr>
+          <p:cNvPr id="12" name="TextBox 11">
+            <a:extLst>
+              <a:ext uri="{FF2B5EF4-FFF2-40B4-BE49-F238E27FC236}">
+                <a16:creationId xmlns:a16="http://schemas.microsoft.com/office/drawing/2014/main" id="{E622779E-0F4E-2584-B52E-67D25D8CD809}"/>
+              </a:ext>
+            </a:extLst>
+          </p:cNvPr>
+          <p:cNvSpPr txBox="1"/>
+          <p:nvPr/>
+        </p:nvSpPr>
+        <p:spPr>
+          <a:xfrm>
+            <a:off x="5747805" y="2956306"/>
+            <a:ext cx="569387" cy="369332"/>
+          </a:xfrm>
+          <a:prstGeom prst="rect">
+            <a:avLst/>
+          </a:prstGeom>
+          <a:noFill/>
+        </p:spPr>
+        <p:txBody>
+          <a:bodyPr wrap="none" rtlCol="0">
+            <a:spAutoFit/>
+          </a:bodyPr>
+          <a:lstStyle/>
+          <a:p>
+            <a:r>
+              <a:rPr lang="en-US" b="1" dirty="0"/>
+              <a:t>Y(T)</a:t>
+            </a:r>
+          </a:p>
+        </p:txBody>
+      </p:sp>
+      <p:sp>
+        <p:nvSpPr>
+          <p:cNvPr id="13" name="TextBox 12">
+            <a:extLst>
+              <a:ext uri="{FF2B5EF4-FFF2-40B4-BE49-F238E27FC236}">
+                <a16:creationId xmlns:a16="http://schemas.microsoft.com/office/drawing/2014/main" id="{4B8F3E0C-72D5-CC2B-09F4-E8F730FCDA0B}"/>
+              </a:ext>
+            </a:extLst>
+          </p:cNvPr>
+          <p:cNvSpPr txBox="1"/>
+          <p:nvPr/>
+        </p:nvSpPr>
+        <p:spPr>
+          <a:xfrm>
+            <a:off x="9711608" y="2875002"/>
+            <a:ext cx="580608" cy="369332"/>
+          </a:xfrm>
+          <a:prstGeom prst="rect">
+            <a:avLst/>
+          </a:prstGeom>
+          <a:noFill/>
+        </p:spPr>
+        <p:txBody>
+          <a:bodyPr wrap="none" rtlCol="0">
+            <a:spAutoFit/>
+          </a:bodyPr>
+          <a:lstStyle/>
+          <a:p>
+            <a:r>
+              <a:rPr lang="en-US" b="1" dirty="0"/>
+              <a:t>K(T)</a:t>
+            </a:r>
+          </a:p>
+        </p:txBody>
+      </p:sp>
+      <p:pic>
+        <p:nvPicPr>
+          <p:cNvPr id="5" name="Picture 4">
+            <a:extLst>
+              <a:ext uri="{FF2B5EF4-FFF2-40B4-BE49-F238E27FC236}">
+                <a16:creationId xmlns:a16="http://schemas.microsoft.com/office/drawing/2014/main" id="{052A7799-E665-0508-BE78-D4901CF48F51}"/>
+              </a:ext>
+            </a:extLst>
+          </p:cNvPr>
+          <p:cNvPicPr>
+            <a:picLocks noChangeAspect="1"/>
+          </p:cNvPicPr>
+          <p:nvPr/>
+        </p:nvPicPr>
+        <p:blipFill>
+          <a:blip r:embed="rId3"/>
+          <a:stretch>
+            <a:fillRect/>
+          </a:stretch>
+        </p:blipFill>
+        <p:spPr>
+          <a:xfrm>
+            <a:off x="24642" y="1775947"/>
+            <a:ext cx="12103856" cy="1580777"/>
+          </a:xfrm>
+          <a:prstGeom prst="rect">
+            <a:avLst/>
+          </a:prstGeom>
+        </p:spPr>
+      </p:pic>
+      <p:pic>
+        <p:nvPicPr>
+          <p:cNvPr id="14" name="Picture 13">
+            <a:extLst>
+              <a:ext uri="{FF2B5EF4-FFF2-40B4-BE49-F238E27FC236}">
+                <a16:creationId xmlns:a16="http://schemas.microsoft.com/office/drawing/2014/main" id="{E913809F-4498-5EAF-F9EA-F94B0360D306}"/>
+              </a:ext>
+            </a:extLst>
+          </p:cNvPr>
+          <p:cNvPicPr>
+            <a:picLocks noChangeAspect="1"/>
+          </p:cNvPicPr>
+          <p:nvPr/>
+        </p:nvPicPr>
+        <p:blipFill>
+          <a:blip r:embed="rId4"/>
+          <a:stretch>
+            <a:fillRect/>
+          </a:stretch>
+        </p:blipFill>
+        <p:spPr>
+          <a:xfrm>
+            <a:off x="24642" y="3647813"/>
+            <a:ext cx="3654614" cy="2734878"/>
+          </a:xfrm>
+          <a:prstGeom prst="rect">
+            <a:avLst/>
+          </a:prstGeom>
+        </p:spPr>
+      </p:pic>
+      <p:pic>
+        <p:nvPicPr>
+          <p:cNvPr id="23" name="Picture 22">
+            <a:extLst>
+              <a:ext uri="{FF2B5EF4-FFF2-40B4-BE49-F238E27FC236}">
+                <a16:creationId xmlns:a16="http://schemas.microsoft.com/office/drawing/2014/main" id="{8BCCB6B6-FFB1-5071-636F-C3A8D22E479E}"/>
+              </a:ext>
+            </a:extLst>
+          </p:cNvPr>
+          <p:cNvPicPr>
+            <a:picLocks noChangeAspect="1"/>
+          </p:cNvPicPr>
+          <p:nvPr/>
+        </p:nvPicPr>
+        <p:blipFill>
+          <a:blip r:embed="rId5"/>
+          <a:stretch>
+            <a:fillRect/>
+          </a:stretch>
+        </p:blipFill>
+        <p:spPr>
+          <a:xfrm>
+            <a:off x="4359255" y="3620448"/>
+            <a:ext cx="3833136" cy="2854783"/>
+          </a:xfrm>
+          <a:prstGeom prst="rect">
+            <a:avLst/>
+          </a:prstGeom>
+        </p:spPr>
+      </p:pic>
+      <p:pic>
+        <p:nvPicPr>
+          <p:cNvPr id="26" name="Picture 25">
+            <a:extLst>
+              <a:ext uri="{FF2B5EF4-FFF2-40B4-BE49-F238E27FC236}">
+                <a16:creationId xmlns:a16="http://schemas.microsoft.com/office/drawing/2014/main" id="{6ABFA5E3-FCE2-CF50-B0C4-9FE595198712}"/>
+              </a:ext>
+            </a:extLst>
+          </p:cNvPr>
+          <p:cNvPicPr>
+            <a:picLocks noChangeAspect="1"/>
+          </p:cNvPicPr>
+          <p:nvPr/>
+        </p:nvPicPr>
+        <p:blipFill>
+          <a:blip r:embed="rId6"/>
+          <a:stretch>
+            <a:fillRect/>
+          </a:stretch>
+        </p:blipFill>
+        <p:spPr>
+          <a:xfrm>
+            <a:off x="8542903" y="3706549"/>
+            <a:ext cx="3649097" cy="2748987"/>
+          </a:xfrm>
+          <a:prstGeom prst="rect">
+            <a:avLst/>
+          </a:prstGeom>
+        </p:spPr>
+      </p:pic>
+      <p:sp>
+        <p:nvSpPr>
+          <p:cNvPr id="27" name="TextBox 26">
+            <a:extLst>
+              <a:ext uri="{FF2B5EF4-FFF2-40B4-BE49-F238E27FC236}">
+                <a16:creationId xmlns:a16="http://schemas.microsoft.com/office/drawing/2014/main" id="{400D2D26-B40A-E28E-423D-3A364FD24728}"/>
+              </a:ext>
+            </a:extLst>
+          </p:cNvPr>
+          <p:cNvSpPr txBox="1"/>
+          <p:nvPr/>
+        </p:nvSpPr>
+        <p:spPr>
+          <a:xfrm>
+            <a:off x="1205909" y="3394218"/>
+            <a:ext cx="1586332" cy="369332"/>
+          </a:xfrm>
+          <a:prstGeom prst="rect">
+            <a:avLst/>
+          </a:prstGeom>
+          <a:noFill/>
+        </p:spPr>
+        <p:txBody>
+          <a:bodyPr wrap="none" rtlCol="0">
+            <a:spAutoFit/>
+          </a:bodyPr>
+          <a:lstStyle/>
+          <a:p>
+            <a:r>
+              <a:rPr lang="en-US" b="1" dirty="0"/>
+              <a:t>Captures E(T)</a:t>
+            </a:r>
+          </a:p>
+        </p:txBody>
+      </p:sp>
+      <p:sp>
+        <p:nvSpPr>
+          <p:cNvPr id="28" name="TextBox 27">
+            <a:extLst>
+              <a:ext uri="{FF2B5EF4-FFF2-40B4-BE49-F238E27FC236}">
+                <a16:creationId xmlns:a16="http://schemas.microsoft.com/office/drawing/2014/main" id="{888D4E65-5114-DE2F-5AE4-ED27E3FD0BDE}"/>
+              </a:ext>
+            </a:extLst>
+          </p:cNvPr>
+          <p:cNvSpPr txBox="1"/>
+          <p:nvPr/>
+        </p:nvSpPr>
+        <p:spPr>
+          <a:xfrm>
+            <a:off x="5239332" y="3356724"/>
+            <a:ext cx="1586332" cy="369332"/>
+          </a:xfrm>
+          <a:prstGeom prst="rect">
+            <a:avLst/>
+          </a:prstGeom>
+          <a:noFill/>
+        </p:spPr>
+        <p:txBody>
+          <a:bodyPr wrap="none" rtlCol="0">
+            <a:spAutoFit/>
+          </a:bodyPr>
+          <a:lstStyle/>
+          <a:p>
+            <a:r>
+              <a:rPr lang="en-US" b="1" dirty="0"/>
+              <a:t>Captures Y(T)</a:t>
+            </a:r>
+          </a:p>
+        </p:txBody>
+      </p:sp>
+      <p:sp>
+        <p:nvSpPr>
+          <p:cNvPr id="29" name="TextBox 28">
+            <a:extLst>
+              <a:ext uri="{FF2B5EF4-FFF2-40B4-BE49-F238E27FC236}">
+                <a16:creationId xmlns:a16="http://schemas.microsoft.com/office/drawing/2014/main" id="{191C929C-3CDD-462E-1684-A2022C0898F0}"/>
+              </a:ext>
+            </a:extLst>
+          </p:cNvPr>
+          <p:cNvSpPr txBox="1"/>
+          <p:nvPr/>
+        </p:nvSpPr>
+        <p:spPr>
+          <a:xfrm>
+            <a:off x="9924762" y="3368145"/>
+            <a:ext cx="1586332" cy="369332"/>
+          </a:xfrm>
+          <a:prstGeom prst="rect">
+            <a:avLst/>
+          </a:prstGeom>
+          <a:noFill/>
+        </p:spPr>
+        <p:txBody>
+          <a:bodyPr wrap="none" rtlCol="0">
+            <a:spAutoFit/>
+          </a:bodyPr>
+          <a:lstStyle/>
+          <a:p>
+            <a:r>
+              <a:rPr lang="en-US" b="1" dirty="0"/>
+              <a:t>Captures K(T)</a:t>
+            </a:r>
+          </a:p>
+        </p:txBody>
+      </p:sp>
+      <p:sp>
+        <p:nvSpPr>
+          <p:cNvPr id="30" name="TextBox 29">
+            <a:extLst>
+              <a:ext uri="{FF2B5EF4-FFF2-40B4-BE49-F238E27FC236}">
+                <a16:creationId xmlns:a16="http://schemas.microsoft.com/office/drawing/2014/main" id="{62EBA44B-D5D6-03D0-6327-A6C9D7C2EFEB}"/>
+              </a:ext>
+            </a:extLst>
+          </p:cNvPr>
+          <p:cNvSpPr txBox="1"/>
+          <p:nvPr/>
+        </p:nvSpPr>
+        <p:spPr>
+          <a:xfrm>
+            <a:off x="781742" y="6441123"/>
+            <a:ext cx="9932126" cy="369332"/>
+          </a:xfrm>
+          <a:prstGeom prst="rect">
+            <a:avLst/>
+          </a:prstGeom>
+          <a:noFill/>
+        </p:spPr>
+        <p:txBody>
+          <a:bodyPr wrap="square" rtlCol="0">
+            <a:spAutoFit/>
+          </a:bodyPr>
+          <a:lstStyle/>
+          <a:p>
+            <a:r>
+              <a:rPr lang="en-US" dirty="0">
+                <a:highlight>
+                  <a:srgbClr val="FFFF00"/>
+                </a:highlight>
+              </a:rPr>
+              <a:t>A steep drop in E and Y dissuades the optimizer from using some materials at high temperatures</a:t>
+            </a:r>
+          </a:p>
+        </p:txBody>
+      </p:sp>
+    </p:spTree>
+    <p:extLst>
+      <p:ext uri="{BB962C8B-B14F-4D97-AF65-F5344CB8AC3E}">
+        <p14:creationId xmlns:p14="http://schemas.microsoft.com/office/powerpoint/2010/main" val="1339667649"/>
       </p:ext>
     </p:extLst>
   </p:cSld>
